--- a/figures/IPEC_Figures_PowerPoint.pptx
+++ b/figures/IPEC_Figures_PowerPoint.pptx
@@ -1,17 +1,16 @@
 
 <file path=ppt/presentation.xml><?xml version="1.0" encoding="utf-8"?>
-<p:presentation xmlns:a="http://schemas.openxmlformats.org/drawingml/2006/main" xmlns:r="http://schemas.openxmlformats.org/officeDocument/2006/relationships" xmlns:p="http://schemas.openxmlformats.org/presentationml/2006/main" saveSubsetFonts="1">
+<p:presentation xmlns:a="http://schemas.openxmlformats.org/drawingml/2006/main" xmlns:r="http://schemas.openxmlformats.org/officeDocument/2006/relationships" xmlns:p="http://schemas.openxmlformats.org/presentationml/2006/main" embedTrueTypeFonts="1" saveSubsetFonts="1">
   <p:sldMasterIdLst>
     <p:sldMasterId id="2147483648" r:id="rId1"/>
   </p:sldMasterIdLst>
   <p:notesMasterIdLst>
-    <p:notesMasterId r:id="rId6"/>
+    <p:notesMasterId r:id="rId5"/>
   </p:notesMasterIdLst>
   <p:sldIdLst>
     <p:sldId id="610" r:id="rId2"/>
     <p:sldId id="621" r:id="rId3"/>
     <p:sldId id="622" r:id="rId4"/>
-    <p:sldId id="623" r:id="rId5"/>
   </p:sldIdLst>
   <p:sldSz cx="12192000" cy="6858000"/>
   <p:notesSz cx="6858000" cy="9144000"/>
@@ -110,11 +109,6 @@
       </a:defRPr>
     </a:lvl9pPr>
   </p:defaultTextStyle>
-  <p:extLst>
-    <p:ext uri="{EFAFB233-063F-42B5-8137-9DF3F51BA10A}">
-      <p15:sldGuideLst xmlns:p15="http://schemas.microsoft.com/office/powerpoint/2012/main"/>
-    </p:ext>
-  </p:extLst>
 </p:presentation>
 </file>
 
@@ -198,9 +192,9 @@
             </a:lvl1pPr>
           </a:lstStyle>
           <a:p>
-            <a:fld id="{E12D018B-8A23-4312-B28B-6340BA8214C1}" type="datetimeFigureOut">
+            <a:fld id="{8BA047FC-F2F2-4B28-B76C-DEA75FAA1BBF}" type="datetimeFigureOut">
               <a:rPr lang="de-DE" smtClean="0"/>
-              <a:t>17.10.2025</a:t>
+              <a:t>19.02.2026</a:t>
             </a:fld>
             <a:endParaRPr lang="de-DE"/>
           </a:p>
@@ -356,7 +350,7 @@
             </a:lvl1pPr>
           </a:lstStyle>
           <a:p>
-            <a:fld id="{4210E154-0611-4214-96E9-926D7C3E416D}" type="slidenum">
+            <a:fld id="{F38EE069-51CE-4666-ABB7-EF37398BAFB6}" type="slidenum">
               <a:rPr lang="de-DE" smtClean="0"/>
               <a:t>‹Nr.›</a:t>
             </a:fld>
@@ -367,7 +361,7 @@
     </p:spTree>
     <p:extLst>
       <p:ext uri="{BB962C8B-B14F-4D97-AF65-F5344CB8AC3E}">
-        <p14:creationId xmlns:p14="http://schemas.microsoft.com/office/powerpoint/2010/main" val="4060404153"/>
+        <p14:creationId xmlns:p14="http://schemas.microsoft.com/office/powerpoint/2010/main" val="2666646552"/>
       </p:ext>
     </p:extLst>
   </p:cSld>
@@ -603,7 +597,7 @@
           <p:cNvPr id="2" name="Titel 1">
             <a:extLst>
               <a:ext uri="{FF2B5EF4-FFF2-40B4-BE49-F238E27FC236}">
-                <a16:creationId xmlns:a16="http://schemas.microsoft.com/office/drawing/2014/main" id="{EA475952-E838-7D0E-D5D1-18B95B7BBE9C}"/>
+                <a16:creationId xmlns:a16="http://schemas.microsoft.com/office/drawing/2014/main" id="{FDC33DBD-30A7-E643-FCD2-DC470EF16E64}"/>
               </a:ext>
             </a:extLst>
           </p:cNvPr>
@@ -640,7 +634,7 @@
           <p:cNvPr id="3" name="Untertitel 2">
             <a:extLst>
               <a:ext uri="{FF2B5EF4-FFF2-40B4-BE49-F238E27FC236}">
-                <a16:creationId xmlns:a16="http://schemas.microsoft.com/office/drawing/2014/main" id="{D0685373-6986-6C8B-5DB8-C88DB9F02FC5}"/>
+                <a16:creationId xmlns:a16="http://schemas.microsoft.com/office/drawing/2014/main" id="{3C0F8063-35CE-1BB4-B609-6921326C3F28}"/>
               </a:ext>
             </a:extLst>
           </p:cNvPr>
@@ -710,7 +704,7 @@
           <p:cNvPr id="4" name="Datumsplatzhalter 3">
             <a:extLst>
               <a:ext uri="{FF2B5EF4-FFF2-40B4-BE49-F238E27FC236}">
-                <a16:creationId xmlns:a16="http://schemas.microsoft.com/office/drawing/2014/main" id="{47BE9AE0-F8FD-3F60-1321-C30402F30F99}"/>
+                <a16:creationId xmlns:a16="http://schemas.microsoft.com/office/drawing/2014/main" id="{98629BAB-A1EA-5D65-355A-5BC2835D674A}"/>
               </a:ext>
             </a:extLst>
           </p:cNvPr>
@@ -726,9 +720,9 @@
           <a:bodyPr/>
           <a:lstStyle/>
           <a:p>
-            <a:fld id="{ECCFC019-03F5-4F01-A944-8CA3CB0F4BCD}" type="datetimeFigureOut">
+            <a:fld id="{B0B8CC02-5EFB-42DA-BC90-4C89E884E644}" type="datetimeFigureOut">
               <a:rPr lang="de-DE" smtClean="0"/>
-              <a:t>17.10.2025</a:t>
+              <a:t>19.02.2026</a:t>
             </a:fld>
             <a:endParaRPr lang="de-DE"/>
           </a:p>
@@ -739,7 +733,7 @@
           <p:cNvPr id="5" name="Fußzeilenplatzhalter 4">
             <a:extLst>
               <a:ext uri="{FF2B5EF4-FFF2-40B4-BE49-F238E27FC236}">
-                <a16:creationId xmlns:a16="http://schemas.microsoft.com/office/drawing/2014/main" id="{7B28DF58-572D-2AEC-D60C-696B61FB25B9}"/>
+                <a16:creationId xmlns:a16="http://schemas.microsoft.com/office/drawing/2014/main" id="{085DC00B-E112-3FD1-7FBF-8ECDE121FC47}"/>
               </a:ext>
             </a:extLst>
           </p:cNvPr>
@@ -764,7 +758,7 @@
           <p:cNvPr id="6" name="Foliennummernplatzhalter 5">
             <a:extLst>
               <a:ext uri="{FF2B5EF4-FFF2-40B4-BE49-F238E27FC236}">
-                <a16:creationId xmlns:a16="http://schemas.microsoft.com/office/drawing/2014/main" id="{4DD00BD5-30E0-0872-CA64-1D20E14980EE}"/>
+                <a16:creationId xmlns:a16="http://schemas.microsoft.com/office/drawing/2014/main" id="{24B451CC-EBB0-67E6-240F-07BCF527D962}"/>
               </a:ext>
             </a:extLst>
           </p:cNvPr>
@@ -780,7 +774,7 @@
           <a:bodyPr/>
           <a:lstStyle/>
           <a:p>
-            <a:fld id="{F3308813-3B81-42DE-9B68-F54B97DDFA2F}" type="slidenum">
+            <a:fld id="{3FF79AF5-12F5-42C1-90BD-83AB414BD0DB}" type="slidenum">
               <a:rPr lang="de-DE" smtClean="0"/>
               <a:t>‹Nr.›</a:t>
             </a:fld>
@@ -791,7 +785,7 @@
     </p:spTree>
     <p:extLst>
       <p:ext uri="{BB962C8B-B14F-4D97-AF65-F5344CB8AC3E}">
-        <p14:creationId xmlns:p14="http://schemas.microsoft.com/office/powerpoint/2010/main" val="4214152739"/>
+        <p14:creationId xmlns:p14="http://schemas.microsoft.com/office/powerpoint/2010/main" val="3846062802"/>
       </p:ext>
     </p:extLst>
   </p:cSld>
@@ -823,7 +817,7 @@
           <p:cNvPr id="2" name="Titel 1">
             <a:extLst>
               <a:ext uri="{FF2B5EF4-FFF2-40B4-BE49-F238E27FC236}">
-                <a16:creationId xmlns:a16="http://schemas.microsoft.com/office/drawing/2014/main" id="{640B1163-B378-71B3-1C90-F7D562749F3B}"/>
+                <a16:creationId xmlns:a16="http://schemas.microsoft.com/office/drawing/2014/main" id="{23CA4984-9561-C7A4-7576-11F7B7728243}"/>
               </a:ext>
             </a:extLst>
           </p:cNvPr>
@@ -851,7 +845,7 @@
           <p:cNvPr id="3" name="Vertikaler Textplatzhalter 2">
             <a:extLst>
               <a:ext uri="{FF2B5EF4-FFF2-40B4-BE49-F238E27FC236}">
-                <a16:creationId xmlns:a16="http://schemas.microsoft.com/office/drawing/2014/main" id="{860FF6F8-0F7A-3928-4AEA-7ACCD9F47166}"/>
+                <a16:creationId xmlns:a16="http://schemas.microsoft.com/office/drawing/2014/main" id="{E2B2213E-EE7B-B601-CD39-7C40C31E44C1}"/>
               </a:ext>
             </a:extLst>
           </p:cNvPr>
@@ -908,7 +902,7 @@
           <p:cNvPr id="4" name="Datumsplatzhalter 3">
             <a:extLst>
               <a:ext uri="{FF2B5EF4-FFF2-40B4-BE49-F238E27FC236}">
-                <a16:creationId xmlns:a16="http://schemas.microsoft.com/office/drawing/2014/main" id="{13FACF2C-4C19-99B4-AE07-465B6AA18468}"/>
+                <a16:creationId xmlns:a16="http://schemas.microsoft.com/office/drawing/2014/main" id="{A752EB70-D52D-6418-CE80-89451E7BCA8F}"/>
               </a:ext>
             </a:extLst>
           </p:cNvPr>
@@ -924,9 +918,9 @@
           <a:bodyPr/>
           <a:lstStyle/>
           <a:p>
-            <a:fld id="{ECCFC019-03F5-4F01-A944-8CA3CB0F4BCD}" type="datetimeFigureOut">
+            <a:fld id="{B0B8CC02-5EFB-42DA-BC90-4C89E884E644}" type="datetimeFigureOut">
               <a:rPr lang="de-DE" smtClean="0"/>
-              <a:t>17.10.2025</a:t>
+              <a:t>19.02.2026</a:t>
             </a:fld>
             <a:endParaRPr lang="de-DE"/>
           </a:p>
@@ -937,7 +931,7 @@
           <p:cNvPr id="5" name="Fußzeilenplatzhalter 4">
             <a:extLst>
               <a:ext uri="{FF2B5EF4-FFF2-40B4-BE49-F238E27FC236}">
-                <a16:creationId xmlns:a16="http://schemas.microsoft.com/office/drawing/2014/main" id="{B5E47FC3-D7A4-201E-7AB6-46D749BB6C63}"/>
+                <a16:creationId xmlns:a16="http://schemas.microsoft.com/office/drawing/2014/main" id="{FE5B1D86-93AD-784D-4C8A-3F9071218A4F}"/>
               </a:ext>
             </a:extLst>
           </p:cNvPr>
@@ -962,7 +956,7 @@
           <p:cNvPr id="6" name="Foliennummernplatzhalter 5">
             <a:extLst>
               <a:ext uri="{FF2B5EF4-FFF2-40B4-BE49-F238E27FC236}">
-                <a16:creationId xmlns:a16="http://schemas.microsoft.com/office/drawing/2014/main" id="{D04FA0B8-9D1C-B9B2-5D2E-E1C4A8D2925B}"/>
+                <a16:creationId xmlns:a16="http://schemas.microsoft.com/office/drawing/2014/main" id="{F2D5AC94-DB99-7725-155C-35A600034D6A}"/>
               </a:ext>
             </a:extLst>
           </p:cNvPr>
@@ -978,7 +972,7 @@
           <a:bodyPr/>
           <a:lstStyle/>
           <a:p>
-            <a:fld id="{F3308813-3B81-42DE-9B68-F54B97DDFA2F}" type="slidenum">
+            <a:fld id="{3FF79AF5-12F5-42C1-90BD-83AB414BD0DB}" type="slidenum">
               <a:rPr lang="de-DE" smtClean="0"/>
               <a:t>‹Nr.›</a:t>
             </a:fld>
@@ -989,7 +983,7 @@
     </p:spTree>
     <p:extLst>
       <p:ext uri="{BB962C8B-B14F-4D97-AF65-F5344CB8AC3E}">
-        <p14:creationId xmlns:p14="http://schemas.microsoft.com/office/powerpoint/2010/main" val="4157614397"/>
+        <p14:creationId xmlns:p14="http://schemas.microsoft.com/office/powerpoint/2010/main" val="3924155476"/>
       </p:ext>
     </p:extLst>
   </p:cSld>
@@ -1021,7 +1015,7 @@
           <p:cNvPr id="2" name="Vertikaler Titel 1">
             <a:extLst>
               <a:ext uri="{FF2B5EF4-FFF2-40B4-BE49-F238E27FC236}">
-                <a16:creationId xmlns:a16="http://schemas.microsoft.com/office/drawing/2014/main" id="{EAF4CBEA-0822-4B17-906A-6B9458E5EC90}"/>
+                <a16:creationId xmlns:a16="http://schemas.microsoft.com/office/drawing/2014/main" id="{660B0C25-382F-DBFA-1477-DA2323E337B6}"/>
               </a:ext>
             </a:extLst>
           </p:cNvPr>
@@ -1054,7 +1048,7 @@
           <p:cNvPr id="3" name="Vertikaler Textplatzhalter 2">
             <a:extLst>
               <a:ext uri="{FF2B5EF4-FFF2-40B4-BE49-F238E27FC236}">
-                <a16:creationId xmlns:a16="http://schemas.microsoft.com/office/drawing/2014/main" id="{FFA0CC79-8776-1D9C-1C18-8B2314523253}"/>
+                <a16:creationId xmlns:a16="http://schemas.microsoft.com/office/drawing/2014/main" id="{B2158CB8-23AE-269D-7FA3-A4AB2050C7D6}"/>
               </a:ext>
             </a:extLst>
           </p:cNvPr>
@@ -1116,7 +1110,7 @@
           <p:cNvPr id="4" name="Datumsplatzhalter 3">
             <a:extLst>
               <a:ext uri="{FF2B5EF4-FFF2-40B4-BE49-F238E27FC236}">
-                <a16:creationId xmlns:a16="http://schemas.microsoft.com/office/drawing/2014/main" id="{4AB379DE-8131-EC35-9900-57D3B78D42CA}"/>
+                <a16:creationId xmlns:a16="http://schemas.microsoft.com/office/drawing/2014/main" id="{6814A69C-310F-D659-5353-C0CEAD731CB0}"/>
               </a:ext>
             </a:extLst>
           </p:cNvPr>
@@ -1132,9 +1126,9 @@
           <a:bodyPr/>
           <a:lstStyle/>
           <a:p>
-            <a:fld id="{ECCFC019-03F5-4F01-A944-8CA3CB0F4BCD}" type="datetimeFigureOut">
+            <a:fld id="{B0B8CC02-5EFB-42DA-BC90-4C89E884E644}" type="datetimeFigureOut">
               <a:rPr lang="de-DE" smtClean="0"/>
-              <a:t>17.10.2025</a:t>
+              <a:t>19.02.2026</a:t>
             </a:fld>
             <a:endParaRPr lang="de-DE"/>
           </a:p>
@@ -1145,7 +1139,7 @@
           <p:cNvPr id="5" name="Fußzeilenplatzhalter 4">
             <a:extLst>
               <a:ext uri="{FF2B5EF4-FFF2-40B4-BE49-F238E27FC236}">
-                <a16:creationId xmlns:a16="http://schemas.microsoft.com/office/drawing/2014/main" id="{4017C70F-18ED-2152-29DD-5D41B4B43384}"/>
+                <a16:creationId xmlns:a16="http://schemas.microsoft.com/office/drawing/2014/main" id="{3DBABECD-7EDA-B10B-7055-32F2F5BB736C}"/>
               </a:ext>
             </a:extLst>
           </p:cNvPr>
@@ -1170,7 +1164,7 @@
           <p:cNvPr id="6" name="Foliennummernplatzhalter 5">
             <a:extLst>
               <a:ext uri="{FF2B5EF4-FFF2-40B4-BE49-F238E27FC236}">
-                <a16:creationId xmlns:a16="http://schemas.microsoft.com/office/drawing/2014/main" id="{BA9F4DD0-2596-9277-D2C1-0D707BDFD2AC}"/>
+                <a16:creationId xmlns:a16="http://schemas.microsoft.com/office/drawing/2014/main" id="{C94CC821-245B-9443-E5E6-B30FF0297AB7}"/>
               </a:ext>
             </a:extLst>
           </p:cNvPr>
@@ -1186,7 +1180,7 @@
           <a:bodyPr/>
           <a:lstStyle/>
           <a:p>
-            <a:fld id="{F3308813-3B81-42DE-9B68-F54B97DDFA2F}" type="slidenum">
+            <a:fld id="{3FF79AF5-12F5-42C1-90BD-83AB414BD0DB}" type="slidenum">
               <a:rPr lang="de-DE" smtClean="0"/>
               <a:t>‹Nr.›</a:t>
             </a:fld>
@@ -1197,7 +1191,7 @@
     </p:spTree>
     <p:extLst>
       <p:ext uri="{BB962C8B-B14F-4D97-AF65-F5344CB8AC3E}">
-        <p14:creationId xmlns:p14="http://schemas.microsoft.com/office/powerpoint/2010/main" val="615387942"/>
+        <p14:creationId xmlns:p14="http://schemas.microsoft.com/office/powerpoint/2010/main" val="177901672"/>
       </p:ext>
     </p:extLst>
   </p:cSld>
@@ -1505,7 +1499,7 @@
     </p:spTree>
     <p:extLst>
       <p:ext uri="{BB962C8B-B14F-4D97-AF65-F5344CB8AC3E}">
-        <p14:creationId xmlns:p14="http://schemas.microsoft.com/office/powerpoint/2010/main" val="2085246255"/>
+        <p14:creationId xmlns:p14="http://schemas.microsoft.com/office/powerpoint/2010/main" val="2394584207"/>
       </p:ext>
     </p:extLst>
   </p:cSld>
@@ -1537,7 +1531,7 @@
           <p:cNvPr id="2" name="Titel 1">
             <a:extLst>
               <a:ext uri="{FF2B5EF4-FFF2-40B4-BE49-F238E27FC236}">
-                <a16:creationId xmlns:a16="http://schemas.microsoft.com/office/drawing/2014/main" id="{32C039EA-4F20-2317-5C44-7EDC98596D82}"/>
+                <a16:creationId xmlns:a16="http://schemas.microsoft.com/office/drawing/2014/main" id="{7C9F34E1-6DA7-ACDF-2EA3-A4B25689D30A}"/>
               </a:ext>
             </a:extLst>
           </p:cNvPr>
@@ -1565,7 +1559,7 @@
           <p:cNvPr id="3" name="Inhaltsplatzhalter 2">
             <a:extLst>
               <a:ext uri="{FF2B5EF4-FFF2-40B4-BE49-F238E27FC236}">
-                <a16:creationId xmlns:a16="http://schemas.microsoft.com/office/drawing/2014/main" id="{A9488EDE-E7D5-5BBC-3EC9-1F05D19CB4FB}"/>
+                <a16:creationId xmlns:a16="http://schemas.microsoft.com/office/drawing/2014/main" id="{D633E8D0-BACC-2B71-2728-728D58230C7C}"/>
               </a:ext>
             </a:extLst>
           </p:cNvPr>
@@ -1622,7 +1616,7 @@
           <p:cNvPr id="4" name="Datumsplatzhalter 3">
             <a:extLst>
               <a:ext uri="{FF2B5EF4-FFF2-40B4-BE49-F238E27FC236}">
-                <a16:creationId xmlns:a16="http://schemas.microsoft.com/office/drawing/2014/main" id="{FDF37AA5-0CA5-3D77-D883-3C1670AC0427}"/>
+                <a16:creationId xmlns:a16="http://schemas.microsoft.com/office/drawing/2014/main" id="{BB49BCD1-11F5-5AF0-3D72-B4AC18515E55}"/>
               </a:ext>
             </a:extLst>
           </p:cNvPr>
@@ -1638,9 +1632,9 @@
           <a:bodyPr/>
           <a:lstStyle/>
           <a:p>
-            <a:fld id="{ECCFC019-03F5-4F01-A944-8CA3CB0F4BCD}" type="datetimeFigureOut">
+            <a:fld id="{B0B8CC02-5EFB-42DA-BC90-4C89E884E644}" type="datetimeFigureOut">
               <a:rPr lang="de-DE" smtClean="0"/>
-              <a:t>17.10.2025</a:t>
+              <a:t>19.02.2026</a:t>
             </a:fld>
             <a:endParaRPr lang="de-DE"/>
           </a:p>
@@ -1651,7 +1645,7 @@
           <p:cNvPr id="5" name="Fußzeilenplatzhalter 4">
             <a:extLst>
               <a:ext uri="{FF2B5EF4-FFF2-40B4-BE49-F238E27FC236}">
-                <a16:creationId xmlns:a16="http://schemas.microsoft.com/office/drawing/2014/main" id="{7CAC0083-0577-AA2E-0023-5595803BD153}"/>
+                <a16:creationId xmlns:a16="http://schemas.microsoft.com/office/drawing/2014/main" id="{31B63DA8-ADAD-2D21-01A8-45A085C8A00F}"/>
               </a:ext>
             </a:extLst>
           </p:cNvPr>
@@ -1676,7 +1670,7 @@
           <p:cNvPr id="6" name="Foliennummernplatzhalter 5">
             <a:extLst>
               <a:ext uri="{FF2B5EF4-FFF2-40B4-BE49-F238E27FC236}">
-                <a16:creationId xmlns:a16="http://schemas.microsoft.com/office/drawing/2014/main" id="{815E92B3-F616-4C63-A6E2-C631A960F623}"/>
+                <a16:creationId xmlns:a16="http://schemas.microsoft.com/office/drawing/2014/main" id="{893DF8DA-9BA5-115D-AAF3-38F519BAC0E4}"/>
               </a:ext>
             </a:extLst>
           </p:cNvPr>
@@ -1692,7 +1686,7 @@
           <a:bodyPr/>
           <a:lstStyle/>
           <a:p>
-            <a:fld id="{F3308813-3B81-42DE-9B68-F54B97DDFA2F}" type="slidenum">
+            <a:fld id="{3FF79AF5-12F5-42C1-90BD-83AB414BD0DB}" type="slidenum">
               <a:rPr lang="de-DE" smtClean="0"/>
               <a:t>‹Nr.›</a:t>
             </a:fld>
@@ -1703,7 +1697,7 @@
     </p:spTree>
     <p:extLst>
       <p:ext uri="{BB962C8B-B14F-4D97-AF65-F5344CB8AC3E}">
-        <p14:creationId xmlns:p14="http://schemas.microsoft.com/office/powerpoint/2010/main" val="36724639"/>
+        <p14:creationId xmlns:p14="http://schemas.microsoft.com/office/powerpoint/2010/main" val="1629044020"/>
       </p:ext>
     </p:extLst>
   </p:cSld>
@@ -1735,7 +1729,7 @@
           <p:cNvPr id="2" name="Titel 1">
             <a:extLst>
               <a:ext uri="{FF2B5EF4-FFF2-40B4-BE49-F238E27FC236}">
-                <a16:creationId xmlns:a16="http://schemas.microsoft.com/office/drawing/2014/main" id="{6F53E1B9-9347-9BC9-E12B-CAD5FEC36017}"/>
+                <a16:creationId xmlns:a16="http://schemas.microsoft.com/office/drawing/2014/main" id="{55C4E29B-98BF-E15A-AD45-546E652C1B55}"/>
               </a:ext>
             </a:extLst>
           </p:cNvPr>
@@ -1772,7 +1766,7 @@
           <p:cNvPr id="3" name="Textplatzhalter 2">
             <a:extLst>
               <a:ext uri="{FF2B5EF4-FFF2-40B4-BE49-F238E27FC236}">
-                <a16:creationId xmlns:a16="http://schemas.microsoft.com/office/drawing/2014/main" id="{5E9F4E22-8043-A66F-6942-4D77F7C9C79C}"/>
+                <a16:creationId xmlns:a16="http://schemas.microsoft.com/office/drawing/2014/main" id="{594BA60D-DB6A-6DD7-7BFF-1697A7006151}"/>
               </a:ext>
             </a:extLst>
           </p:cNvPr>
@@ -1897,7 +1891,7 @@
           <p:cNvPr id="4" name="Datumsplatzhalter 3">
             <a:extLst>
               <a:ext uri="{FF2B5EF4-FFF2-40B4-BE49-F238E27FC236}">
-                <a16:creationId xmlns:a16="http://schemas.microsoft.com/office/drawing/2014/main" id="{2FD1B541-FA01-5022-8BBB-51FF01A689AF}"/>
+                <a16:creationId xmlns:a16="http://schemas.microsoft.com/office/drawing/2014/main" id="{2AB90189-8796-710C-0645-2C2DB1602891}"/>
               </a:ext>
             </a:extLst>
           </p:cNvPr>
@@ -1913,9 +1907,9 @@
           <a:bodyPr/>
           <a:lstStyle/>
           <a:p>
-            <a:fld id="{ECCFC019-03F5-4F01-A944-8CA3CB0F4BCD}" type="datetimeFigureOut">
+            <a:fld id="{B0B8CC02-5EFB-42DA-BC90-4C89E884E644}" type="datetimeFigureOut">
               <a:rPr lang="de-DE" smtClean="0"/>
-              <a:t>17.10.2025</a:t>
+              <a:t>19.02.2026</a:t>
             </a:fld>
             <a:endParaRPr lang="de-DE"/>
           </a:p>
@@ -1926,7 +1920,7 @@
           <p:cNvPr id="5" name="Fußzeilenplatzhalter 4">
             <a:extLst>
               <a:ext uri="{FF2B5EF4-FFF2-40B4-BE49-F238E27FC236}">
-                <a16:creationId xmlns:a16="http://schemas.microsoft.com/office/drawing/2014/main" id="{503095AF-290A-6908-6EF5-CE6648176FBD}"/>
+                <a16:creationId xmlns:a16="http://schemas.microsoft.com/office/drawing/2014/main" id="{4B86A46F-C75B-72CE-6602-3D3D94D768E8}"/>
               </a:ext>
             </a:extLst>
           </p:cNvPr>
@@ -1951,7 +1945,7 @@
           <p:cNvPr id="6" name="Foliennummernplatzhalter 5">
             <a:extLst>
               <a:ext uri="{FF2B5EF4-FFF2-40B4-BE49-F238E27FC236}">
-                <a16:creationId xmlns:a16="http://schemas.microsoft.com/office/drawing/2014/main" id="{38DB712F-5AB7-3985-F83C-472A5900D360}"/>
+                <a16:creationId xmlns:a16="http://schemas.microsoft.com/office/drawing/2014/main" id="{D75602BB-4699-D4D3-F73E-F8E3E7FB661C}"/>
               </a:ext>
             </a:extLst>
           </p:cNvPr>
@@ -1967,7 +1961,7 @@
           <a:bodyPr/>
           <a:lstStyle/>
           <a:p>
-            <a:fld id="{F3308813-3B81-42DE-9B68-F54B97DDFA2F}" type="slidenum">
+            <a:fld id="{3FF79AF5-12F5-42C1-90BD-83AB414BD0DB}" type="slidenum">
               <a:rPr lang="de-DE" smtClean="0"/>
               <a:t>‹Nr.›</a:t>
             </a:fld>
@@ -1978,7 +1972,7 @@
     </p:spTree>
     <p:extLst>
       <p:ext uri="{BB962C8B-B14F-4D97-AF65-F5344CB8AC3E}">
-        <p14:creationId xmlns:p14="http://schemas.microsoft.com/office/powerpoint/2010/main" val="2457328680"/>
+        <p14:creationId xmlns:p14="http://schemas.microsoft.com/office/powerpoint/2010/main" val="1971531821"/>
       </p:ext>
     </p:extLst>
   </p:cSld>
@@ -2010,7 +2004,7 @@
           <p:cNvPr id="2" name="Titel 1">
             <a:extLst>
               <a:ext uri="{FF2B5EF4-FFF2-40B4-BE49-F238E27FC236}">
-                <a16:creationId xmlns:a16="http://schemas.microsoft.com/office/drawing/2014/main" id="{D6C78A33-0066-5F3F-4028-5DB7C213EA72}"/>
+                <a16:creationId xmlns:a16="http://schemas.microsoft.com/office/drawing/2014/main" id="{60D2EC9A-3319-C498-347B-BFE6267CB476}"/>
               </a:ext>
             </a:extLst>
           </p:cNvPr>
@@ -2038,7 +2032,7 @@
           <p:cNvPr id="3" name="Inhaltsplatzhalter 2">
             <a:extLst>
               <a:ext uri="{FF2B5EF4-FFF2-40B4-BE49-F238E27FC236}">
-                <a16:creationId xmlns:a16="http://schemas.microsoft.com/office/drawing/2014/main" id="{01D8C434-AE47-B735-4F5E-6B9312CA0C45}"/>
+                <a16:creationId xmlns:a16="http://schemas.microsoft.com/office/drawing/2014/main" id="{A4049843-BC1E-D025-E2F8-77B14DE37101}"/>
               </a:ext>
             </a:extLst>
           </p:cNvPr>
@@ -2100,7 +2094,7 @@
           <p:cNvPr id="4" name="Inhaltsplatzhalter 3">
             <a:extLst>
               <a:ext uri="{FF2B5EF4-FFF2-40B4-BE49-F238E27FC236}">
-                <a16:creationId xmlns:a16="http://schemas.microsoft.com/office/drawing/2014/main" id="{561197B7-8FBF-4BCF-50B8-26FBDB9A471A}"/>
+                <a16:creationId xmlns:a16="http://schemas.microsoft.com/office/drawing/2014/main" id="{205F6AFB-E126-66E0-AE5E-2366A7C86DCB}"/>
               </a:ext>
             </a:extLst>
           </p:cNvPr>
@@ -2162,7 +2156,7 @@
           <p:cNvPr id="5" name="Datumsplatzhalter 4">
             <a:extLst>
               <a:ext uri="{FF2B5EF4-FFF2-40B4-BE49-F238E27FC236}">
-                <a16:creationId xmlns:a16="http://schemas.microsoft.com/office/drawing/2014/main" id="{0BBFFD93-A713-3C39-0C27-E38F7800A076}"/>
+                <a16:creationId xmlns:a16="http://schemas.microsoft.com/office/drawing/2014/main" id="{46E57DE9-BEA8-787C-5976-C900FD231089}"/>
               </a:ext>
             </a:extLst>
           </p:cNvPr>
@@ -2178,9 +2172,9 @@
           <a:bodyPr/>
           <a:lstStyle/>
           <a:p>
-            <a:fld id="{ECCFC019-03F5-4F01-A944-8CA3CB0F4BCD}" type="datetimeFigureOut">
+            <a:fld id="{B0B8CC02-5EFB-42DA-BC90-4C89E884E644}" type="datetimeFigureOut">
               <a:rPr lang="de-DE" smtClean="0"/>
-              <a:t>17.10.2025</a:t>
+              <a:t>19.02.2026</a:t>
             </a:fld>
             <a:endParaRPr lang="de-DE"/>
           </a:p>
@@ -2191,7 +2185,7 @@
           <p:cNvPr id="6" name="Fußzeilenplatzhalter 5">
             <a:extLst>
               <a:ext uri="{FF2B5EF4-FFF2-40B4-BE49-F238E27FC236}">
-                <a16:creationId xmlns:a16="http://schemas.microsoft.com/office/drawing/2014/main" id="{0AF9A4E8-467C-8E0D-00CC-D77DED6F4CFB}"/>
+                <a16:creationId xmlns:a16="http://schemas.microsoft.com/office/drawing/2014/main" id="{B6952411-1BF3-AD9E-AC01-6C9764F3AB15}"/>
               </a:ext>
             </a:extLst>
           </p:cNvPr>
@@ -2216,7 +2210,7 @@
           <p:cNvPr id="7" name="Foliennummernplatzhalter 6">
             <a:extLst>
               <a:ext uri="{FF2B5EF4-FFF2-40B4-BE49-F238E27FC236}">
-                <a16:creationId xmlns:a16="http://schemas.microsoft.com/office/drawing/2014/main" id="{63A20033-40F0-59EC-47F3-1B4EC455B7D4}"/>
+                <a16:creationId xmlns:a16="http://schemas.microsoft.com/office/drawing/2014/main" id="{887B04FE-8AE5-5948-9073-06CF80ECB662}"/>
               </a:ext>
             </a:extLst>
           </p:cNvPr>
@@ -2232,7 +2226,7 @@
           <a:bodyPr/>
           <a:lstStyle/>
           <a:p>
-            <a:fld id="{F3308813-3B81-42DE-9B68-F54B97DDFA2F}" type="slidenum">
+            <a:fld id="{3FF79AF5-12F5-42C1-90BD-83AB414BD0DB}" type="slidenum">
               <a:rPr lang="de-DE" smtClean="0"/>
               <a:t>‹Nr.›</a:t>
             </a:fld>
@@ -2243,7 +2237,7 @@
     </p:spTree>
     <p:extLst>
       <p:ext uri="{BB962C8B-B14F-4D97-AF65-F5344CB8AC3E}">
-        <p14:creationId xmlns:p14="http://schemas.microsoft.com/office/powerpoint/2010/main" val="2960644581"/>
+        <p14:creationId xmlns:p14="http://schemas.microsoft.com/office/powerpoint/2010/main" val="2187723537"/>
       </p:ext>
     </p:extLst>
   </p:cSld>
@@ -2275,7 +2269,7 @@
           <p:cNvPr id="2" name="Titel 1">
             <a:extLst>
               <a:ext uri="{FF2B5EF4-FFF2-40B4-BE49-F238E27FC236}">
-                <a16:creationId xmlns:a16="http://schemas.microsoft.com/office/drawing/2014/main" id="{21866849-DEDD-BE11-A1CE-EFB05AC9FF90}"/>
+                <a16:creationId xmlns:a16="http://schemas.microsoft.com/office/drawing/2014/main" id="{71187D15-E667-9991-6242-CB3A448F4E74}"/>
               </a:ext>
             </a:extLst>
           </p:cNvPr>
@@ -2308,7 +2302,7 @@
           <p:cNvPr id="3" name="Textplatzhalter 2">
             <a:extLst>
               <a:ext uri="{FF2B5EF4-FFF2-40B4-BE49-F238E27FC236}">
-                <a16:creationId xmlns:a16="http://schemas.microsoft.com/office/drawing/2014/main" id="{9974DE00-9093-A710-161F-5E12EDF84C08}"/>
+                <a16:creationId xmlns:a16="http://schemas.microsoft.com/office/drawing/2014/main" id="{DA9DED76-9DA0-E694-445D-E401F6559550}"/>
               </a:ext>
             </a:extLst>
           </p:cNvPr>
@@ -2379,7 +2373,7 @@
           <p:cNvPr id="4" name="Inhaltsplatzhalter 3">
             <a:extLst>
               <a:ext uri="{FF2B5EF4-FFF2-40B4-BE49-F238E27FC236}">
-                <a16:creationId xmlns:a16="http://schemas.microsoft.com/office/drawing/2014/main" id="{272565A2-F0EE-5DDA-CF69-73A1BE0399B4}"/>
+                <a16:creationId xmlns:a16="http://schemas.microsoft.com/office/drawing/2014/main" id="{EABC7AE8-046B-FDC9-752B-F60E69F186C5}"/>
               </a:ext>
             </a:extLst>
           </p:cNvPr>
@@ -2441,7 +2435,7 @@
           <p:cNvPr id="5" name="Textplatzhalter 4">
             <a:extLst>
               <a:ext uri="{FF2B5EF4-FFF2-40B4-BE49-F238E27FC236}">
-                <a16:creationId xmlns:a16="http://schemas.microsoft.com/office/drawing/2014/main" id="{750CF434-EF8F-2E45-02B1-5F10BFD4A329}"/>
+                <a16:creationId xmlns:a16="http://schemas.microsoft.com/office/drawing/2014/main" id="{4EBD53AE-3EA2-4E41-76C2-55008769A17D}"/>
               </a:ext>
             </a:extLst>
           </p:cNvPr>
@@ -2512,7 +2506,7 @@
           <p:cNvPr id="6" name="Inhaltsplatzhalter 5">
             <a:extLst>
               <a:ext uri="{FF2B5EF4-FFF2-40B4-BE49-F238E27FC236}">
-                <a16:creationId xmlns:a16="http://schemas.microsoft.com/office/drawing/2014/main" id="{14F31A6D-BBA3-8123-29FC-2D986D618E23}"/>
+                <a16:creationId xmlns:a16="http://schemas.microsoft.com/office/drawing/2014/main" id="{5D3EAB69-B1F5-A5B7-2ED0-79A3E72ACA92}"/>
               </a:ext>
             </a:extLst>
           </p:cNvPr>
@@ -2574,7 +2568,7 @@
           <p:cNvPr id="7" name="Datumsplatzhalter 6">
             <a:extLst>
               <a:ext uri="{FF2B5EF4-FFF2-40B4-BE49-F238E27FC236}">
-                <a16:creationId xmlns:a16="http://schemas.microsoft.com/office/drawing/2014/main" id="{47AA7ABB-0B7D-62F9-1075-55E49AD4EED3}"/>
+                <a16:creationId xmlns:a16="http://schemas.microsoft.com/office/drawing/2014/main" id="{53DC8008-8383-B633-7856-902B1AB12F94}"/>
               </a:ext>
             </a:extLst>
           </p:cNvPr>
@@ -2590,9 +2584,9 @@
           <a:bodyPr/>
           <a:lstStyle/>
           <a:p>
-            <a:fld id="{ECCFC019-03F5-4F01-A944-8CA3CB0F4BCD}" type="datetimeFigureOut">
+            <a:fld id="{B0B8CC02-5EFB-42DA-BC90-4C89E884E644}" type="datetimeFigureOut">
               <a:rPr lang="de-DE" smtClean="0"/>
-              <a:t>17.10.2025</a:t>
+              <a:t>19.02.2026</a:t>
             </a:fld>
             <a:endParaRPr lang="de-DE"/>
           </a:p>
@@ -2603,7 +2597,7 @@
           <p:cNvPr id="8" name="Fußzeilenplatzhalter 7">
             <a:extLst>
               <a:ext uri="{FF2B5EF4-FFF2-40B4-BE49-F238E27FC236}">
-                <a16:creationId xmlns:a16="http://schemas.microsoft.com/office/drawing/2014/main" id="{DF2F493F-5E86-250E-4EC2-C7E18D4AFAAC}"/>
+                <a16:creationId xmlns:a16="http://schemas.microsoft.com/office/drawing/2014/main" id="{B56D3EF6-F04E-DE27-2AF7-52C2EDAEBD7D}"/>
               </a:ext>
             </a:extLst>
           </p:cNvPr>
@@ -2628,7 +2622,7 @@
           <p:cNvPr id="9" name="Foliennummernplatzhalter 8">
             <a:extLst>
               <a:ext uri="{FF2B5EF4-FFF2-40B4-BE49-F238E27FC236}">
-                <a16:creationId xmlns:a16="http://schemas.microsoft.com/office/drawing/2014/main" id="{8ECC4492-D7A2-AC96-6A1A-A2DF406AC727}"/>
+                <a16:creationId xmlns:a16="http://schemas.microsoft.com/office/drawing/2014/main" id="{E32538CF-86D9-4C01-133B-35F707E3419D}"/>
               </a:ext>
             </a:extLst>
           </p:cNvPr>
@@ -2644,7 +2638,7 @@
           <a:bodyPr/>
           <a:lstStyle/>
           <a:p>
-            <a:fld id="{F3308813-3B81-42DE-9B68-F54B97DDFA2F}" type="slidenum">
+            <a:fld id="{3FF79AF5-12F5-42C1-90BD-83AB414BD0DB}" type="slidenum">
               <a:rPr lang="de-DE" smtClean="0"/>
               <a:t>‹Nr.›</a:t>
             </a:fld>
@@ -2655,7 +2649,7 @@
     </p:spTree>
     <p:extLst>
       <p:ext uri="{BB962C8B-B14F-4D97-AF65-F5344CB8AC3E}">
-        <p14:creationId xmlns:p14="http://schemas.microsoft.com/office/powerpoint/2010/main" val="3727223446"/>
+        <p14:creationId xmlns:p14="http://schemas.microsoft.com/office/powerpoint/2010/main" val="50722293"/>
       </p:ext>
     </p:extLst>
   </p:cSld>
@@ -2687,7 +2681,7 @@
           <p:cNvPr id="2" name="Titel 1">
             <a:extLst>
               <a:ext uri="{FF2B5EF4-FFF2-40B4-BE49-F238E27FC236}">
-                <a16:creationId xmlns:a16="http://schemas.microsoft.com/office/drawing/2014/main" id="{57C939E1-5238-7952-7EE2-4B6A3FEF1206}"/>
+                <a16:creationId xmlns:a16="http://schemas.microsoft.com/office/drawing/2014/main" id="{EEE7CC31-1CBB-CEB9-4BA3-F5B0664EFC0E}"/>
               </a:ext>
             </a:extLst>
           </p:cNvPr>
@@ -2715,7 +2709,7 @@
           <p:cNvPr id="3" name="Datumsplatzhalter 2">
             <a:extLst>
               <a:ext uri="{FF2B5EF4-FFF2-40B4-BE49-F238E27FC236}">
-                <a16:creationId xmlns:a16="http://schemas.microsoft.com/office/drawing/2014/main" id="{68EAB677-4661-95CB-DFB1-F78AC43A404E}"/>
+                <a16:creationId xmlns:a16="http://schemas.microsoft.com/office/drawing/2014/main" id="{23428463-95FD-CC3D-F671-4AEB24B444CF}"/>
               </a:ext>
             </a:extLst>
           </p:cNvPr>
@@ -2731,9 +2725,9 @@
           <a:bodyPr/>
           <a:lstStyle/>
           <a:p>
-            <a:fld id="{ECCFC019-03F5-4F01-A944-8CA3CB0F4BCD}" type="datetimeFigureOut">
+            <a:fld id="{B0B8CC02-5EFB-42DA-BC90-4C89E884E644}" type="datetimeFigureOut">
               <a:rPr lang="de-DE" smtClean="0"/>
-              <a:t>17.10.2025</a:t>
+              <a:t>19.02.2026</a:t>
             </a:fld>
             <a:endParaRPr lang="de-DE"/>
           </a:p>
@@ -2744,7 +2738,7 @@
           <p:cNvPr id="4" name="Fußzeilenplatzhalter 3">
             <a:extLst>
               <a:ext uri="{FF2B5EF4-FFF2-40B4-BE49-F238E27FC236}">
-                <a16:creationId xmlns:a16="http://schemas.microsoft.com/office/drawing/2014/main" id="{E95EDAD8-62B0-1D63-A1A2-D295FD0E16AC}"/>
+                <a16:creationId xmlns:a16="http://schemas.microsoft.com/office/drawing/2014/main" id="{A55CF9EA-DF25-56E1-1DD5-AC7AF7BA66A9}"/>
               </a:ext>
             </a:extLst>
           </p:cNvPr>
@@ -2769,7 +2763,7 @@
           <p:cNvPr id="5" name="Foliennummernplatzhalter 4">
             <a:extLst>
               <a:ext uri="{FF2B5EF4-FFF2-40B4-BE49-F238E27FC236}">
-                <a16:creationId xmlns:a16="http://schemas.microsoft.com/office/drawing/2014/main" id="{F83BD486-7C3B-4F58-8670-9C7009558A7C}"/>
+                <a16:creationId xmlns:a16="http://schemas.microsoft.com/office/drawing/2014/main" id="{5BCC2502-3DAC-9BCA-FDB1-BCB01E507A88}"/>
               </a:ext>
             </a:extLst>
           </p:cNvPr>
@@ -2785,7 +2779,7 @@
           <a:bodyPr/>
           <a:lstStyle/>
           <a:p>
-            <a:fld id="{F3308813-3B81-42DE-9B68-F54B97DDFA2F}" type="slidenum">
+            <a:fld id="{3FF79AF5-12F5-42C1-90BD-83AB414BD0DB}" type="slidenum">
               <a:rPr lang="de-DE" smtClean="0"/>
               <a:t>‹Nr.›</a:t>
             </a:fld>
@@ -2796,7 +2790,7 @@
     </p:spTree>
     <p:extLst>
       <p:ext uri="{BB962C8B-B14F-4D97-AF65-F5344CB8AC3E}">
-        <p14:creationId xmlns:p14="http://schemas.microsoft.com/office/powerpoint/2010/main" val="3490200078"/>
+        <p14:creationId xmlns:p14="http://schemas.microsoft.com/office/powerpoint/2010/main" val="1352347525"/>
       </p:ext>
     </p:extLst>
   </p:cSld>
@@ -2828,7 +2822,7 @@
           <p:cNvPr id="2" name="Datumsplatzhalter 1">
             <a:extLst>
               <a:ext uri="{FF2B5EF4-FFF2-40B4-BE49-F238E27FC236}">
-                <a16:creationId xmlns:a16="http://schemas.microsoft.com/office/drawing/2014/main" id="{77540CCE-AA60-A732-3991-2089AEF932F6}"/>
+                <a16:creationId xmlns:a16="http://schemas.microsoft.com/office/drawing/2014/main" id="{97743AE6-3064-9D03-1840-F472B9F9827F}"/>
               </a:ext>
             </a:extLst>
           </p:cNvPr>
@@ -2844,9 +2838,9 @@
           <a:bodyPr/>
           <a:lstStyle/>
           <a:p>
-            <a:fld id="{ECCFC019-03F5-4F01-A944-8CA3CB0F4BCD}" type="datetimeFigureOut">
+            <a:fld id="{B0B8CC02-5EFB-42DA-BC90-4C89E884E644}" type="datetimeFigureOut">
               <a:rPr lang="de-DE" smtClean="0"/>
-              <a:t>17.10.2025</a:t>
+              <a:t>19.02.2026</a:t>
             </a:fld>
             <a:endParaRPr lang="de-DE"/>
           </a:p>
@@ -2857,7 +2851,7 @@
           <p:cNvPr id="3" name="Fußzeilenplatzhalter 2">
             <a:extLst>
               <a:ext uri="{FF2B5EF4-FFF2-40B4-BE49-F238E27FC236}">
-                <a16:creationId xmlns:a16="http://schemas.microsoft.com/office/drawing/2014/main" id="{08C1E252-75CF-41A3-1AFF-0B73F9F8EFD6}"/>
+                <a16:creationId xmlns:a16="http://schemas.microsoft.com/office/drawing/2014/main" id="{F7B94C23-0CB9-AA21-9A91-05B3847FA0B7}"/>
               </a:ext>
             </a:extLst>
           </p:cNvPr>
@@ -2882,7 +2876,7 @@
           <p:cNvPr id="4" name="Foliennummernplatzhalter 3">
             <a:extLst>
               <a:ext uri="{FF2B5EF4-FFF2-40B4-BE49-F238E27FC236}">
-                <a16:creationId xmlns:a16="http://schemas.microsoft.com/office/drawing/2014/main" id="{25EB0A7C-3E5B-8F64-C1BF-FAF7A8427464}"/>
+                <a16:creationId xmlns:a16="http://schemas.microsoft.com/office/drawing/2014/main" id="{53DD1ADB-1490-8A88-615B-95A5675784F6}"/>
               </a:ext>
             </a:extLst>
           </p:cNvPr>
@@ -2898,7 +2892,7 @@
           <a:bodyPr/>
           <a:lstStyle/>
           <a:p>
-            <a:fld id="{F3308813-3B81-42DE-9B68-F54B97DDFA2F}" type="slidenum">
+            <a:fld id="{3FF79AF5-12F5-42C1-90BD-83AB414BD0DB}" type="slidenum">
               <a:rPr lang="de-DE" smtClean="0"/>
               <a:t>‹Nr.›</a:t>
             </a:fld>
@@ -2909,7 +2903,7 @@
     </p:spTree>
     <p:extLst>
       <p:ext uri="{BB962C8B-B14F-4D97-AF65-F5344CB8AC3E}">
-        <p14:creationId xmlns:p14="http://schemas.microsoft.com/office/powerpoint/2010/main" val="3187155445"/>
+        <p14:creationId xmlns:p14="http://schemas.microsoft.com/office/powerpoint/2010/main" val="1024460025"/>
       </p:ext>
     </p:extLst>
   </p:cSld>
@@ -2941,7 +2935,7 @@
           <p:cNvPr id="2" name="Titel 1">
             <a:extLst>
               <a:ext uri="{FF2B5EF4-FFF2-40B4-BE49-F238E27FC236}">
-                <a16:creationId xmlns:a16="http://schemas.microsoft.com/office/drawing/2014/main" id="{68F82721-CFCC-B8FF-F5BE-BAFEF7FF9C33}"/>
+                <a16:creationId xmlns:a16="http://schemas.microsoft.com/office/drawing/2014/main" id="{E7C451CD-98A4-3B9B-003C-AE285ABE404D}"/>
               </a:ext>
             </a:extLst>
           </p:cNvPr>
@@ -2978,7 +2972,7 @@
           <p:cNvPr id="3" name="Inhaltsplatzhalter 2">
             <a:extLst>
               <a:ext uri="{FF2B5EF4-FFF2-40B4-BE49-F238E27FC236}">
-                <a16:creationId xmlns:a16="http://schemas.microsoft.com/office/drawing/2014/main" id="{513F000C-45DA-B940-CB40-2A0FC07D4FF8}"/>
+                <a16:creationId xmlns:a16="http://schemas.microsoft.com/office/drawing/2014/main" id="{AADBD4CD-0834-0BB8-8005-6C80DC8DE51C}"/>
               </a:ext>
             </a:extLst>
           </p:cNvPr>
@@ -3068,7 +3062,7 @@
           <p:cNvPr id="4" name="Textplatzhalter 3">
             <a:extLst>
               <a:ext uri="{FF2B5EF4-FFF2-40B4-BE49-F238E27FC236}">
-                <a16:creationId xmlns:a16="http://schemas.microsoft.com/office/drawing/2014/main" id="{CB202C18-36C7-2B1C-23C6-572E08F21278}"/>
+                <a16:creationId xmlns:a16="http://schemas.microsoft.com/office/drawing/2014/main" id="{7B765767-D79A-D5C1-9335-63185C0D66D3}"/>
               </a:ext>
             </a:extLst>
           </p:cNvPr>
@@ -3139,7 +3133,7 @@
           <p:cNvPr id="5" name="Datumsplatzhalter 4">
             <a:extLst>
               <a:ext uri="{FF2B5EF4-FFF2-40B4-BE49-F238E27FC236}">
-                <a16:creationId xmlns:a16="http://schemas.microsoft.com/office/drawing/2014/main" id="{774FE8C4-60A6-9B50-0E50-9FFE361072E7}"/>
+                <a16:creationId xmlns:a16="http://schemas.microsoft.com/office/drawing/2014/main" id="{3F8A6BEB-A1C4-972F-5E6A-BD945E86A31A}"/>
               </a:ext>
             </a:extLst>
           </p:cNvPr>
@@ -3155,9 +3149,9 @@
           <a:bodyPr/>
           <a:lstStyle/>
           <a:p>
-            <a:fld id="{ECCFC019-03F5-4F01-A944-8CA3CB0F4BCD}" type="datetimeFigureOut">
+            <a:fld id="{B0B8CC02-5EFB-42DA-BC90-4C89E884E644}" type="datetimeFigureOut">
               <a:rPr lang="de-DE" smtClean="0"/>
-              <a:t>17.10.2025</a:t>
+              <a:t>19.02.2026</a:t>
             </a:fld>
             <a:endParaRPr lang="de-DE"/>
           </a:p>
@@ -3168,7 +3162,7 @@
           <p:cNvPr id="6" name="Fußzeilenplatzhalter 5">
             <a:extLst>
               <a:ext uri="{FF2B5EF4-FFF2-40B4-BE49-F238E27FC236}">
-                <a16:creationId xmlns:a16="http://schemas.microsoft.com/office/drawing/2014/main" id="{5ABDFF15-0ACE-E21E-3F24-5AEF2BA177E1}"/>
+                <a16:creationId xmlns:a16="http://schemas.microsoft.com/office/drawing/2014/main" id="{20D32E46-4D3A-B726-88F9-3471BBEF374F}"/>
               </a:ext>
             </a:extLst>
           </p:cNvPr>
@@ -3193,7 +3187,7 @@
           <p:cNvPr id="7" name="Foliennummernplatzhalter 6">
             <a:extLst>
               <a:ext uri="{FF2B5EF4-FFF2-40B4-BE49-F238E27FC236}">
-                <a16:creationId xmlns:a16="http://schemas.microsoft.com/office/drawing/2014/main" id="{FC4EE803-F6D7-92BE-CEE8-6DB486F7DF20}"/>
+                <a16:creationId xmlns:a16="http://schemas.microsoft.com/office/drawing/2014/main" id="{8DC5195F-9029-A553-9596-8E1B9DCA9C1D}"/>
               </a:ext>
             </a:extLst>
           </p:cNvPr>
@@ -3209,7 +3203,7 @@
           <a:bodyPr/>
           <a:lstStyle/>
           <a:p>
-            <a:fld id="{F3308813-3B81-42DE-9B68-F54B97DDFA2F}" type="slidenum">
+            <a:fld id="{3FF79AF5-12F5-42C1-90BD-83AB414BD0DB}" type="slidenum">
               <a:rPr lang="de-DE" smtClean="0"/>
               <a:t>‹Nr.›</a:t>
             </a:fld>
@@ -3220,7 +3214,7 @@
     </p:spTree>
     <p:extLst>
       <p:ext uri="{BB962C8B-B14F-4D97-AF65-F5344CB8AC3E}">
-        <p14:creationId xmlns:p14="http://schemas.microsoft.com/office/powerpoint/2010/main" val="3736604818"/>
+        <p14:creationId xmlns:p14="http://schemas.microsoft.com/office/powerpoint/2010/main" val="4176586491"/>
       </p:ext>
     </p:extLst>
   </p:cSld>
@@ -3252,7 +3246,7 @@
           <p:cNvPr id="2" name="Titel 1">
             <a:extLst>
               <a:ext uri="{FF2B5EF4-FFF2-40B4-BE49-F238E27FC236}">
-                <a16:creationId xmlns:a16="http://schemas.microsoft.com/office/drawing/2014/main" id="{EDC91F7F-A89E-D545-B0B5-7EBAD9C425A5}"/>
+                <a16:creationId xmlns:a16="http://schemas.microsoft.com/office/drawing/2014/main" id="{5C2CBD3A-1D1F-2452-C2FC-FFB4E4D99A91}"/>
               </a:ext>
             </a:extLst>
           </p:cNvPr>
@@ -3289,7 +3283,7 @@
           <p:cNvPr id="3" name="Bildplatzhalter 2">
             <a:extLst>
               <a:ext uri="{FF2B5EF4-FFF2-40B4-BE49-F238E27FC236}">
-                <a16:creationId xmlns:a16="http://schemas.microsoft.com/office/drawing/2014/main" id="{59F4424B-79F9-1D0A-63FE-8EDEB8DB188C}"/>
+                <a16:creationId xmlns:a16="http://schemas.microsoft.com/office/drawing/2014/main" id="{FC899642-3179-C44D-0376-B3C22F9B2F1F}"/>
               </a:ext>
             </a:extLst>
           </p:cNvPr>
@@ -3356,7 +3350,7 @@
           <p:cNvPr id="4" name="Textplatzhalter 3">
             <a:extLst>
               <a:ext uri="{FF2B5EF4-FFF2-40B4-BE49-F238E27FC236}">
-                <a16:creationId xmlns:a16="http://schemas.microsoft.com/office/drawing/2014/main" id="{2BEA2AEE-FEEC-DDF5-194C-757907397659}"/>
+                <a16:creationId xmlns:a16="http://schemas.microsoft.com/office/drawing/2014/main" id="{36FEB103-E994-2E8C-4168-CC261BEDC2B4}"/>
               </a:ext>
             </a:extLst>
           </p:cNvPr>
@@ -3427,7 +3421,7 @@
           <p:cNvPr id="5" name="Datumsplatzhalter 4">
             <a:extLst>
               <a:ext uri="{FF2B5EF4-FFF2-40B4-BE49-F238E27FC236}">
-                <a16:creationId xmlns:a16="http://schemas.microsoft.com/office/drawing/2014/main" id="{39935CA1-7F58-056C-9C26-410B77758CF2}"/>
+                <a16:creationId xmlns:a16="http://schemas.microsoft.com/office/drawing/2014/main" id="{DE45A45E-D97F-01B1-81AB-D361C7278DC1}"/>
               </a:ext>
             </a:extLst>
           </p:cNvPr>
@@ -3443,9 +3437,9 @@
           <a:bodyPr/>
           <a:lstStyle/>
           <a:p>
-            <a:fld id="{ECCFC019-03F5-4F01-A944-8CA3CB0F4BCD}" type="datetimeFigureOut">
+            <a:fld id="{B0B8CC02-5EFB-42DA-BC90-4C89E884E644}" type="datetimeFigureOut">
               <a:rPr lang="de-DE" smtClean="0"/>
-              <a:t>17.10.2025</a:t>
+              <a:t>19.02.2026</a:t>
             </a:fld>
             <a:endParaRPr lang="de-DE"/>
           </a:p>
@@ -3456,7 +3450,7 @@
           <p:cNvPr id="6" name="Fußzeilenplatzhalter 5">
             <a:extLst>
               <a:ext uri="{FF2B5EF4-FFF2-40B4-BE49-F238E27FC236}">
-                <a16:creationId xmlns:a16="http://schemas.microsoft.com/office/drawing/2014/main" id="{0B24E972-BDD9-7B02-E375-1BEB9DE0AA29}"/>
+                <a16:creationId xmlns:a16="http://schemas.microsoft.com/office/drawing/2014/main" id="{F8766214-C586-6F6A-F784-FB63036A996B}"/>
               </a:ext>
             </a:extLst>
           </p:cNvPr>
@@ -3481,7 +3475,7 @@
           <p:cNvPr id="7" name="Foliennummernplatzhalter 6">
             <a:extLst>
               <a:ext uri="{FF2B5EF4-FFF2-40B4-BE49-F238E27FC236}">
-                <a16:creationId xmlns:a16="http://schemas.microsoft.com/office/drawing/2014/main" id="{ED9358C2-A3DD-AEA1-EEB8-8E93C6DFC54B}"/>
+                <a16:creationId xmlns:a16="http://schemas.microsoft.com/office/drawing/2014/main" id="{36063AD3-4F75-38A6-2637-3C26ACF41613}"/>
               </a:ext>
             </a:extLst>
           </p:cNvPr>
@@ -3497,7 +3491,7 @@
           <a:bodyPr/>
           <a:lstStyle/>
           <a:p>
-            <a:fld id="{F3308813-3B81-42DE-9B68-F54B97DDFA2F}" type="slidenum">
+            <a:fld id="{3FF79AF5-12F5-42C1-90BD-83AB414BD0DB}" type="slidenum">
               <a:rPr lang="de-DE" smtClean="0"/>
               <a:t>‹Nr.›</a:t>
             </a:fld>
@@ -3508,7 +3502,7 @@
     </p:spTree>
     <p:extLst>
       <p:ext uri="{BB962C8B-B14F-4D97-AF65-F5344CB8AC3E}">
-        <p14:creationId xmlns:p14="http://schemas.microsoft.com/office/powerpoint/2010/main" val="2031487170"/>
+        <p14:creationId xmlns:p14="http://schemas.microsoft.com/office/powerpoint/2010/main" val="759229647"/>
       </p:ext>
     </p:extLst>
   </p:cSld>
@@ -3545,7 +3539,7 @@
           <p:cNvPr id="2" name="Titelplatzhalter 1">
             <a:extLst>
               <a:ext uri="{FF2B5EF4-FFF2-40B4-BE49-F238E27FC236}">
-                <a16:creationId xmlns:a16="http://schemas.microsoft.com/office/drawing/2014/main" id="{E3C47FC8-5790-E18C-E1C5-67569580B8B4}"/>
+                <a16:creationId xmlns:a16="http://schemas.microsoft.com/office/drawing/2014/main" id="{EBD2D1D3-3C07-AC5B-8AAE-C5806F59D1C7}"/>
               </a:ext>
             </a:extLst>
           </p:cNvPr>
@@ -3583,7 +3577,7 @@
           <p:cNvPr id="3" name="Textplatzhalter 2">
             <a:extLst>
               <a:ext uri="{FF2B5EF4-FFF2-40B4-BE49-F238E27FC236}">
-                <a16:creationId xmlns:a16="http://schemas.microsoft.com/office/drawing/2014/main" id="{A5B52C56-933A-9551-D22D-1F2A608CD803}"/>
+                <a16:creationId xmlns:a16="http://schemas.microsoft.com/office/drawing/2014/main" id="{6CC0C4F2-B4B2-A5DB-2D9B-4781CDAB295F}"/>
               </a:ext>
             </a:extLst>
           </p:cNvPr>
@@ -3650,7 +3644,7 @@
           <p:cNvPr id="4" name="Datumsplatzhalter 3">
             <a:extLst>
               <a:ext uri="{FF2B5EF4-FFF2-40B4-BE49-F238E27FC236}">
-                <a16:creationId xmlns:a16="http://schemas.microsoft.com/office/drawing/2014/main" id="{63FA4C75-5C42-6A3A-0839-9ED0F38BE512}"/>
+                <a16:creationId xmlns:a16="http://schemas.microsoft.com/office/drawing/2014/main" id="{71B62660-0102-49A1-A658-433EDE37B488}"/>
               </a:ext>
             </a:extLst>
           </p:cNvPr>
@@ -3684,9 +3678,9 @@
             </a:lvl1pPr>
           </a:lstStyle>
           <a:p>
-            <a:fld id="{ECCFC019-03F5-4F01-A944-8CA3CB0F4BCD}" type="datetimeFigureOut">
+            <a:fld id="{B0B8CC02-5EFB-42DA-BC90-4C89E884E644}" type="datetimeFigureOut">
               <a:rPr lang="de-DE" smtClean="0"/>
-              <a:t>17.10.2025</a:t>
+              <a:t>19.02.2026</a:t>
             </a:fld>
             <a:endParaRPr lang="de-DE"/>
           </a:p>
@@ -3697,7 +3691,7 @@
           <p:cNvPr id="5" name="Fußzeilenplatzhalter 4">
             <a:extLst>
               <a:ext uri="{FF2B5EF4-FFF2-40B4-BE49-F238E27FC236}">
-                <a16:creationId xmlns:a16="http://schemas.microsoft.com/office/drawing/2014/main" id="{E6E3E8C0-9076-2273-9F0A-9F7B6D35299C}"/>
+                <a16:creationId xmlns:a16="http://schemas.microsoft.com/office/drawing/2014/main" id="{F36CCA3C-AAB3-8C20-4864-AC8F44750ED5}"/>
               </a:ext>
             </a:extLst>
           </p:cNvPr>
@@ -3740,7 +3734,7 @@
           <p:cNvPr id="6" name="Foliennummernplatzhalter 5">
             <a:extLst>
               <a:ext uri="{FF2B5EF4-FFF2-40B4-BE49-F238E27FC236}">
-                <a16:creationId xmlns:a16="http://schemas.microsoft.com/office/drawing/2014/main" id="{6866511D-95FB-C114-A4E4-07BF6164DA82}"/>
+                <a16:creationId xmlns:a16="http://schemas.microsoft.com/office/drawing/2014/main" id="{B6052ACD-B2C1-736C-6A8C-649E3EB82506}"/>
               </a:ext>
             </a:extLst>
           </p:cNvPr>
@@ -3774,7 +3768,7 @@
             </a:lvl1pPr>
           </a:lstStyle>
           <a:p>
-            <a:fld id="{F3308813-3B81-42DE-9B68-F54B97DDFA2F}" type="slidenum">
+            <a:fld id="{3FF79AF5-12F5-42C1-90BD-83AB414BD0DB}" type="slidenum">
               <a:rPr lang="de-DE" smtClean="0"/>
               <a:t>‹Nr.›</a:t>
             </a:fld>
@@ -3785,7 +3779,7 @@
     </p:spTree>
     <p:extLst>
       <p:ext uri="{BB962C8B-B14F-4D97-AF65-F5344CB8AC3E}">
-        <p14:creationId xmlns:p14="http://schemas.microsoft.com/office/powerpoint/2010/main" val="3657524727"/>
+        <p14:creationId xmlns:p14="http://schemas.microsoft.com/office/powerpoint/2010/main" val="199385338"/>
       </p:ext>
     </p:extLst>
   </p:cSld>
@@ -12716,13 +12710,7 @@
           <p:cNvGraphicFramePr>
             <a:graphicFrameLocks noGrp="1"/>
           </p:cNvGraphicFramePr>
-          <p:nvPr>
-            <p:extLst>
-              <p:ext uri="{D42A27DB-BD31-4B8C-83A1-F6EECF244321}">
-                <p14:modId xmlns:p14="http://schemas.microsoft.com/office/powerpoint/2010/main" val="709658653"/>
-              </p:ext>
-            </p:extLst>
-          </p:nvPr>
+          <p:nvPr/>
         </p:nvGraphicFramePr>
         <p:xfrm>
           <a:off x="-812777" y="5868550"/>
@@ -14650,2667 +14638,6 @@
 </p:sld>
 </file>
 
-<file path=ppt/slides/slide4.xml><?xml version="1.0" encoding="utf-8"?>
-<p:sld xmlns:a="http://schemas.openxmlformats.org/drawingml/2006/main" xmlns:r="http://schemas.openxmlformats.org/officeDocument/2006/relationships" xmlns:p="http://schemas.openxmlformats.org/presentationml/2006/main">
-  <p:cSld>
-    <p:spTree>
-      <p:nvGrpSpPr>
-        <p:cNvPr id="1" name=""/>
-        <p:cNvGrpSpPr/>
-        <p:nvPr/>
-      </p:nvGrpSpPr>
-      <p:grpSpPr>
-        <a:xfrm>
-          <a:off x="0" y="0"/>
-          <a:ext cx="0" cy="0"/>
-          <a:chOff x="0" y="0"/>
-          <a:chExt cx="0" cy="0"/>
-        </a:xfrm>
-      </p:grpSpPr>
-      <p:grpSp>
-        <p:nvGrpSpPr>
-          <p:cNvPr id="20" name="Gruppieren 19">
-            <a:extLst>
-              <a:ext uri="{FF2B5EF4-FFF2-40B4-BE49-F238E27FC236}">
-                <a16:creationId xmlns:a16="http://schemas.microsoft.com/office/drawing/2014/main" id="{0A7F573B-5D58-6D4A-CAE6-F3DF817EE3FE}"/>
-              </a:ext>
-            </a:extLst>
-          </p:cNvPr>
-          <p:cNvGrpSpPr/>
-          <p:nvPr/>
-        </p:nvGrpSpPr>
-        <p:grpSpPr>
-          <a:xfrm>
-            <a:off x="2483184" y="-37044"/>
-            <a:ext cx="8865352" cy="1190204"/>
-            <a:chOff x="3138510" y="2672645"/>
-            <a:chExt cx="8865352" cy="1190204"/>
-          </a:xfrm>
-        </p:grpSpPr>
-        <p:pic>
-          <p:nvPicPr>
-            <p:cNvPr id="8" name="Graphic 23">
-              <a:extLst>
-                <a:ext uri="{FF2B5EF4-FFF2-40B4-BE49-F238E27FC236}">
-                  <a16:creationId xmlns:a16="http://schemas.microsoft.com/office/drawing/2014/main" id="{EE305270-615B-9F13-EA6B-C642DD2B9DD7}"/>
-                </a:ext>
-              </a:extLst>
-            </p:cNvPr>
-            <p:cNvPicPr>
-              <a:picLocks noChangeAspect="1"/>
-            </p:cNvPicPr>
-            <p:nvPr/>
-          </p:nvPicPr>
-          <p:blipFill>
-            <a:blip r:embed="rId2">
-              <a:extLst>
-                <a:ext uri="{96DAC541-7B7A-43D3-8B79-37D633B846F1}">
-                  <asvg:svgBlip xmlns:asvg="http://schemas.microsoft.com/office/drawing/2016/SVG/main" r:embed="rId3"/>
-                </a:ext>
-              </a:extLst>
-            </a:blip>
-            <a:stretch>
-              <a:fillRect/>
-            </a:stretch>
-          </p:blipFill>
-          <p:spPr>
-            <a:xfrm>
-              <a:off x="3138510" y="2672645"/>
-              <a:ext cx="8865352" cy="1190204"/>
-            </a:xfrm>
-            <a:prstGeom prst="rect">
-              <a:avLst/>
-            </a:prstGeom>
-          </p:spPr>
-        </p:pic>
-        <p:sp>
-          <p:nvSpPr>
-            <p:cNvPr id="10" name="Rechteck 9">
-              <a:extLst>
-                <a:ext uri="{FF2B5EF4-FFF2-40B4-BE49-F238E27FC236}">
-                  <a16:creationId xmlns:a16="http://schemas.microsoft.com/office/drawing/2014/main" id="{0BB64A9C-DAE0-38B6-AFC6-8B62DE70A516}"/>
-                </a:ext>
-              </a:extLst>
-            </p:cNvPr>
-            <p:cNvSpPr/>
-            <p:nvPr/>
-          </p:nvSpPr>
-          <p:spPr>
-            <a:xfrm>
-              <a:off x="5335781" y="2690449"/>
-              <a:ext cx="6668081" cy="1109391"/>
-            </a:xfrm>
-            <a:prstGeom prst="rect">
-              <a:avLst/>
-            </a:prstGeom>
-            <a:solidFill>
-              <a:schemeClr val="bg1"/>
-            </a:solidFill>
-            <a:ln>
-              <a:solidFill>
-                <a:schemeClr val="bg1"/>
-              </a:solidFill>
-            </a:ln>
-          </p:spPr>
-          <p:style>
-            <a:lnRef idx="2">
-              <a:schemeClr val="accent1">
-                <a:shade val="15000"/>
-              </a:schemeClr>
-            </a:lnRef>
-            <a:fillRef idx="1">
-              <a:schemeClr val="accent1"/>
-            </a:fillRef>
-            <a:effectRef idx="0">
-              <a:schemeClr val="accent1"/>
-            </a:effectRef>
-            <a:fontRef idx="minor">
-              <a:schemeClr val="lt1"/>
-            </a:fontRef>
-          </p:style>
-          <p:txBody>
-            <a:bodyPr rtlCol="0" anchor="ctr"/>
-            <a:lstStyle/>
-            <a:p>
-              <a:pPr algn="ctr"/>
-              <a:endParaRPr lang="de-DE">
-                <a:latin typeface="Times New Roman" panose="02020603050405020304" pitchFamily="18" charset="0"/>
-                <a:cs typeface="Times New Roman" panose="02020603050405020304" pitchFamily="18" charset="0"/>
-              </a:endParaRPr>
-            </a:p>
-          </p:txBody>
-        </p:sp>
-      </p:grpSp>
-      <p:pic>
-        <p:nvPicPr>
-          <p:cNvPr id="11" name="Grafik 10">
-            <a:extLst>
-              <a:ext uri="{FF2B5EF4-FFF2-40B4-BE49-F238E27FC236}">
-                <a16:creationId xmlns:a16="http://schemas.microsoft.com/office/drawing/2014/main" id="{5A632AA8-8BBF-B4B9-2D8E-09F1DDC87A13}"/>
-              </a:ext>
-            </a:extLst>
-          </p:cNvPr>
-          <p:cNvPicPr>
-            <a:picLocks noChangeAspect="1"/>
-          </p:cNvPicPr>
-          <p:nvPr/>
-        </p:nvPicPr>
-        <p:blipFill>
-          <a:blip r:embed="rId4">
-            <a:extLst>
-              <a:ext uri="{96DAC541-7B7A-43D3-8B79-37D633B846F1}">
-                <asvg:svgBlip xmlns:asvg="http://schemas.microsoft.com/office/drawing/2016/SVG/main" r:embed="rId5"/>
-              </a:ext>
-            </a:extLst>
-          </a:blip>
-          <a:stretch>
-            <a:fillRect/>
-          </a:stretch>
-        </p:blipFill>
-        <p:spPr>
-          <a:xfrm>
-            <a:off x="30186" y="343549"/>
-            <a:ext cx="1905958" cy="946496"/>
-          </a:xfrm>
-          <a:prstGeom prst="rect">
-            <a:avLst/>
-          </a:prstGeom>
-        </p:spPr>
-      </p:pic>
-      <p:sp>
-        <p:nvSpPr>
-          <p:cNvPr id="12" name="Freihandform: Form 11">
-            <a:extLst>
-              <a:ext uri="{FF2B5EF4-FFF2-40B4-BE49-F238E27FC236}">
-                <a16:creationId xmlns:a16="http://schemas.microsoft.com/office/drawing/2014/main" id="{68BAE12E-7D0A-091E-FC4F-513C04117D8E}"/>
-              </a:ext>
-            </a:extLst>
-          </p:cNvPr>
-          <p:cNvSpPr/>
-          <p:nvPr/>
-        </p:nvSpPr>
-        <p:spPr>
-          <a:xfrm>
-            <a:off x="229354" y="341886"/>
-            <a:ext cx="1575352" cy="470519"/>
-          </a:xfrm>
-          <a:custGeom>
-            <a:avLst/>
-            <a:gdLst>
-              <a:gd name="connsiteX0" fmla="*/ 0 w 1575352"/>
-              <a:gd name="connsiteY0" fmla="*/ 296585 h 470519"/>
-              <a:gd name="connsiteX1" fmla="*/ 303144 w 1575352"/>
-              <a:gd name="connsiteY1" fmla="*/ 8350 h 470519"/>
-              <a:gd name="connsiteX2" fmla="*/ 1192696 w 1575352"/>
-              <a:gd name="connsiteY2" fmla="*/ 112711 h 470519"/>
-              <a:gd name="connsiteX3" fmla="*/ 1575352 w 1575352"/>
-              <a:gd name="connsiteY3" fmla="*/ 470519 h 470519"/>
-            </a:gdLst>
-            <a:ahLst/>
-            <a:cxnLst>
-              <a:cxn ang="0">
-                <a:pos x="connsiteX0" y="connsiteY0"/>
-              </a:cxn>
-              <a:cxn ang="0">
-                <a:pos x="connsiteX1" y="connsiteY1"/>
-              </a:cxn>
-              <a:cxn ang="0">
-                <a:pos x="connsiteX2" y="connsiteY2"/>
-              </a:cxn>
-              <a:cxn ang="0">
-                <a:pos x="connsiteX3" y="connsiteY3"/>
-              </a:cxn>
-            </a:cxnLst>
-            <a:rect l="l" t="t" r="r" b="b"/>
-            <a:pathLst>
-              <a:path w="1575352" h="470519">
-                <a:moveTo>
-                  <a:pt x="0" y="296585"/>
-                </a:moveTo>
-                <a:cubicBezTo>
-                  <a:pt x="52180" y="167790"/>
-                  <a:pt x="104361" y="38996"/>
-                  <a:pt x="303144" y="8350"/>
-                </a:cubicBezTo>
-                <a:cubicBezTo>
-                  <a:pt x="501927" y="-22296"/>
-                  <a:pt x="980661" y="35683"/>
-                  <a:pt x="1192696" y="112711"/>
-                </a:cubicBezTo>
-                <a:cubicBezTo>
-                  <a:pt x="1404731" y="189739"/>
-                  <a:pt x="1490041" y="330129"/>
-                  <a:pt x="1575352" y="470519"/>
-                </a:cubicBezTo>
-              </a:path>
-            </a:pathLst>
-          </a:custGeom>
-          <a:ln w="15875">
-            <a:solidFill>
-              <a:schemeClr val="accent1"/>
-            </a:solidFill>
-            <a:tailEnd type="arrow"/>
-          </a:ln>
-        </p:spPr>
-        <p:style>
-          <a:lnRef idx="1">
-            <a:schemeClr val="accent1"/>
-          </a:lnRef>
-          <a:fillRef idx="0">
-            <a:schemeClr val="accent1"/>
-          </a:fillRef>
-          <a:effectRef idx="0">
-            <a:schemeClr val="accent1"/>
-          </a:effectRef>
-          <a:fontRef idx="minor">
-            <a:schemeClr val="tx1"/>
-          </a:fontRef>
-        </p:style>
-        <p:txBody>
-          <a:bodyPr rtlCol="0" anchor="ctr"/>
-          <a:lstStyle/>
-          <a:p>
-            <a:pPr algn="ctr"/>
-            <a:endParaRPr lang="de-DE">
-              <a:solidFill>
-                <a:schemeClr val="accent1"/>
-              </a:solidFill>
-              <a:latin typeface="Times New Roman" panose="02020603050405020304" pitchFamily="18" charset="0"/>
-              <a:cs typeface="Times New Roman" panose="02020603050405020304" pitchFamily="18" charset="0"/>
-            </a:endParaRPr>
-          </a:p>
-        </p:txBody>
-      </p:sp>
-      <p:sp>
-        <p:nvSpPr>
-          <p:cNvPr id="13" name="Freihandform: Form 12">
-            <a:extLst>
-              <a:ext uri="{FF2B5EF4-FFF2-40B4-BE49-F238E27FC236}">
-                <a16:creationId xmlns:a16="http://schemas.microsoft.com/office/drawing/2014/main" id="{9CB35E04-4302-B8D8-A16B-65C378D066A0}"/>
-              </a:ext>
-            </a:extLst>
-          </p:cNvPr>
-          <p:cNvSpPr/>
-          <p:nvPr/>
-        </p:nvSpPr>
-        <p:spPr>
-          <a:xfrm>
-            <a:off x="244263" y="991310"/>
-            <a:ext cx="1570382" cy="318921"/>
-          </a:xfrm>
-          <a:custGeom>
-            <a:avLst/>
-            <a:gdLst>
-              <a:gd name="connsiteX0" fmla="*/ 0 w 1570382"/>
-              <a:gd name="connsiteY0" fmla="*/ 173934 h 318921"/>
-              <a:gd name="connsiteX1" fmla="*/ 790161 w 1570382"/>
-              <a:gd name="connsiteY1" fmla="*/ 313082 h 318921"/>
-              <a:gd name="connsiteX2" fmla="*/ 1570382 w 1570382"/>
-              <a:gd name="connsiteY2" fmla="*/ 0 h 318921"/>
-            </a:gdLst>
-            <a:ahLst/>
-            <a:cxnLst>
-              <a:cxn ang="0">
-                <a:pos x="connsiteX0" y="connsiteY0"/>
-              </a:cxn>
-              <a:cxn ang="0">
-                <a:pos x="connsiteX1" y="connsiteY1"/>
-              </a:cxn>
-              <a:cxn ang="0">
-                <a:pos x="connsiteX2" y="connsiteY2"/>
-              </a:cxn>
-            </a:cxnLst>
-            <a:rect l="l" t="t" r="r" b="b"/>
-            <a:pathLst>
-              <a:path w="1570382" h="318921">
-                <a:moveTo>
-                  <a:pt x="0" y="173934"/>
-                </a:moveTo>
-                <a:cubicBezTo>
-                  <a:pt x="264215" y="258002"/>
-                  <a:pt x="528431" y="342071"/>
-                  <a:pt x="790161" y="313082"/>
-                </a:cubicBezTo>
-                <a:cubicBezTo>
-                  <a:pt x="1051891" y="284093"/>
-                  <a:pt x="1311136" y="142046"/>
-                  <a:pt x="1570382" y="0"/>
-                </a:cubicBezTo>
-              </a:path>
-            </a:pathLst>
-          </a:custGeom>
-          <a:ln w="15875">
-            <a:solidFill>
-              <a:schemeClr val="accent1"/>
-            </a:solidFill>
-            <a:tailEnd type="arrow"/>
-          </a:ln>
-        </p:spPr>
-        <p:style>
-          <a:lnRef idx="1">
-            <a:schemeClr val="accent1"/>
-          </a:lnRef>
-          <a:fillRef idx="0">
-            <a:schemeClr val="accent1"/>
-          </a:fillRef>
-          <a:effectRef idx="0">
-            <a:schemeClr val="accent1"/>
-          </a:effectRef>
-          <a:fontRef idx="minor">
-            <a:schemeClr val="tx1"/>
-          </a:fontRef>
-        </p:style>
-        <p:txBody>
-          <a:bodyPr rtlCol="0" anchor="ctr"/>
-          <a:lstStyle/>
-          <a:p>
-            <a:pPr algn="ctr"/>
-            <a:endParaRPr lang="de-DE">
-              <a:solidFill>
-                <a:schemeClr val="accent1"/>
-              </a:solidFill>
-              <a:latin typeface="Times New Roman" panose="02020603050405020304" pitchFamily="18" charset="0"/>
-              <a:cs typeface="Times New Roman" panose="02020603050405020304" pitchFamily="18" charset="0"/>
-            </a:endParaRPr>
-          </a:p>
-        </p:txBody>
-      </p:sp>
-      <p:sp>
-        <p:nvSpPr>
-          <p:cNvPr id="14" name="Textfeld 8">
-            <a:extLst>
-              <a:ext uri="{FF2B5EF4-FFF2-40B4-BE49-F238E27FC236}">
-                <a16:creationId xmlns:a16="http://schemas.microsoft.com/office/drawing/2014/main" id="{EAA899EA-31DE-DB69-35CC-BA9D6CE4B9CB}"/>
-              </a:ext>
-            </a:extLst>
-          </p:cNvPr>
-          <p:cNvSpPr txBox="1"/>
-          <p:nvPr/>
-        </p:nvSpPr>
-        <p:spPr>
-          <a:xfrm>
-            <a:off x="1426735" y="269368"/>
-            <a:ext cx="387910" cy="307777"/>
-          </a:xfrm>
-          <a:prstGeom prst="rect">
-            <a:avLst/>
-          </a:prstGeom>
-          <a:noFill/>
-          <a:ln>
-            <a:noFill/>
-          </a:ln>
-        </p:spPr>
-        <p:txBody>
-          <a:bodyPr wrap="square" rtlCol="0">
-            <a:spAutoFit/>
-          </a:bodyPr>
-          <a:lstStyle/>
-          <a:p>
-            <a:r>
-              <a:rPr lang="de-DE" sz="1400" i="1" dirty="0" err="1">
-                <a:solidFill>
-                  <a:schemeClr val="accent1"/>
-                </a:solidFill>
-                <a:latin typeface="Times New Roman" panose="02020603050405020304" pitchFamily="18" charset="0"/>
-                <a:cs typeface="Times New Roman" panose="02020603050405020304" pitchFamily="18" charset="0"/>
-              </a:rPr>
-              <a:t>v</a:t>
-            </a:r>
-            <a:r>
-              <a:rPr lang="de-DE" sz="1400" baseline="-25000" dirty="0" err="1">
-                <a:solidFill>
-                  <a:schemeClr val="accent1"/>
-                </a:solidFill>
-                <a:latin typeface="Times New Roman" panose="02020603050405020304" pitchFamily="18" charset="0"/>
-                <a:cs typeface="Times New Roman" panose="02020603050405020304" pitchFamily="18" charset="0"/>
-              </a:rPr>
-              <a:t>a</a:t>
-            </a:r>
-            <a:endParaRPr lang="en-US" sz="1400" baseline="-25000" dirty="0">
-              <a:solidFill>
-                <a:schemeClr val="accent1"/>
-              </a:solidFill>
-              <a:latin typeface="Times New Roman" panose="02020603050405020304" pitchFamily="18" charset="0"/>
-              <a:cs typeface="Times New Roman" panose="02020603050405020304" pitchFamily="18" charset="0"/>
-            </a:endParaRPr>
-          </a:p>
-        </p:txBody>
-      </p:sp>
-      <p:sp>
-        <p:nvSpPr>
-          <p:cNvPr id="15" name="Textfeld 8">
-            <a:extLst>
-              <a:ext uri="{FF2B5EF4-FFF2-40B4-BE49-F238E27FC236}">
-                <a16:creationId xmlns:a16="http://schemas.microsoft.com/office/drawing/2014/main" id="{82EC0255-0948-C165-C475-8477BE90421A}"/>
-              </a:ext>
-            </a:extLst>
-          </p:cNvPr>
-          <p:cNvSpPr txBox="1"/>
-          <p:nvPr/>
-        </p:nvSpPr>
-        <p:spPr>
-          <a:xfrm>
-            <a:off x="1380937" y="1072681"/>
-            <a:ext cx="387910" cy="307777"/>
-          </a:xfrm>
-          <a:prstGeom prst="rect">
-            <a:avLst/>
-          </a:prstGeom>
-          <a:noFill/>
-          <a:ln>
-            <a:noFill/>
-          </a:ln>
-        </p:spPr>
-        <p:txBody>
-          <a:bodyPr wrap="square" rtlCol="0">
-            <a:spAutoFit/>
-          </a:bodyPr>
-          <a:lstStyle/>
-          <a:p>
-            <a:r>
-              <a:rPr lang="de-DE" sz="1400" i="1" dirty="0" err="1">
-                <a:solidFill>
-                  <a:schemeClr val="accent1"/>
-                </a:solidFill>
-                <a:latin typeface="Times New Roman" panose="02020603050405020304" pitchFamily="18" charset="0"/>
-                <a:cs typeface="Times New Roman" panose="02020603050405020304" pitchFamily="18" charset="0"/>
-              </a:rPr>
-              <a:t>v</a:t>
-            </a:r>
-            <a:r>
-              <a:rPr lang="de-DE" sz="1400" baseline="-25000" dirty="0" err="1">
-                <a:solidFill>
-                  <a:schemeClr val="accent1"/>
-                </a:solidFill>
-                <a:latin typeface="Times New Roman" panose="02020603050405020304" pitchFamily="18" charset="0"/>
-                <a:cs typeface="Times New Roman" panose="02020603050405020304" pitchFamily="18" charset="0"/>
-              </a:rPr>
-              <a:t>b</a:t>
-            </a:r>
-            <a:endParaRPr lang="en-US" sz="1400" baseline="-25000" dirty="0">
-              <a:solidFill>
-                <a:schemeClr val="accent1"/>
-              </a:solidFill>
-              <a:latin typeface="Times New Roman" panose="02020603050405020304" pitchFamily="18" charset="0"/>
-              <a:cs typeface="Times New Roman" panose="02020603050405020304" pitchFamily="18" charset="0"/>
-            </a:endParaRPr>
-          </a:p>
-        </p:txBody>
-      </p:sp>
-      <p:cxnSp>
-        <p:nvCxnSpPr>
-          <p:cNvPr id="16" name="Straight Arrow Connector 25">
-            <a:extLst>
-              <a:ext uri="{FF2B5EF4-FFF2-40B4-BE49-F238E27FC236}">
-                <a16:creationId xmlns:a16="http://schemas.microsoft.com/office/drawing/2014/main" id="{238DB196-52FD-E1D3-C998-8FB85EBDD90B}"/>
-              </a:ext>
-            </a:extLst>
-          </p:cNvPr>
-          <p:cNvCxnSpPr>
-            <a:cxnSpLocks/>
-          </p:cNvCxnSpPr>
-          <p:nvPr/>
-        </p:nvCxnSpPr>
-        <p:spPr>
-          <a:xfrm>
-            <a:off x="339197" y="727478"/>
-            <a:ext cx="52181" cy="0"/>
-          </a:xfrm>
-          <a:prstGeom prst="straightConnector1">
-            <a:avLst/>
-          </a:prstGeom>
-          <a:ln w="15875">
-            <a:solidFill>
-              <a:schemeClr val="accent1"/>
-            </a:solidFill>
-            <a:headEnd type="none"/>
-            <a:tailEnd type="arrow"/>
-          </a:ln>
-        </p:spPr>
-        <p:style>
-          <a:lnRef idx="1">
-            <a:schemeClr val="accent1"/>
-          </a:lnRef>
-          <a:fillRef idx="0">
-            <a:schemeClr val="accent1"/>
-          </a:fillRef>
-          <a:effectRef idx="0">
-            <a:schemeClr val="accent1"/>
-          </a:effectRef>
-          <a:fontRef idx="minor">
-            <a:schemeClr val="tx1"/>
-          </a:fontRef>
-        </p:style>
-      </p:cxnSp>
-      <p:sp>
-        <p:nvSpPr>
-          <p:cNvPr id="17" name="Textfeld 8">
-            <a:extLst>
-              <a:ext uri="{FF2B5EF4-FFF2-40B4-BE49-F238E27FC236}">
-                <a16:creationId xmlns:a16="http://schemas.microsoft.com/office/drawing/2014/main" id="{43F160E3-F5EB-81CA-10BE-13A37D4703EC}"/>
-              </a:ext>
-            </a:extLst>
-          </p:cNvPr>
-          <p:cNvSpPr txBox="1"/>
-          <p:nvPr/>
-        </p:nvSpPr>
-        <p:spPr>
-          <a:xfrm>
-            <a:off x="-44776" y="577146"/>
-            <a:ext cx="329051" cy="307777"/>
-          </a:xfrm>
-          <a:prstGeom prst="rect">
-            <a:avLst/>
-          </a:prstGeom>
-          <a:noFill/>
-          <a:ln>
-            <a:noFill/>
-          </a:ln>
-        </p:spPr>
-        <p:txBody>
-          <a:bodyPr wrap="square" rtlCol="0">
-            <a:spAutoFit/>
-          </a:bodyPr>
-          <a:lstStyle/>
-          <a:p>
-            <a:r>
-              <a:rPr lang="de-DE" sz="1400" i="1" dirty="0">
-                <a:solidFill>
-                  <a:schemeClr val="accent1"/>
-                </a:solidFill>
-                <a:latin typeface="Times New Roman" panose="02020603050405020304" pitchFamily="18" charset="0"/>
-                <a:cs typeface="Times New Roman" panose="02020603050405020304" pitchFamily="18" charset="0"/>
-              </a:rPr>
-              <a:t>i</a:t>
-            </a:r>
-            <a:r>
-              <a:rPr lang="de-DE" sz="1400" baseline="-25000" dirty="0">
-                <a:solidFill>
-                  <a:schemeClr val="accent1"/>
-                </a:solidFill>
-                <a:latin typeface="Times New Roman" panose="02020603050405020304" pitchFamily="18" charset="0"/>
-                <a:cs typeface="Times New Roman" panose="02020603050405020304" pitchFamily="18" charset="0"/>
-              </a:rPr>
-              <a:t>1</a:t>
-            </a:r>
-            <a:endParaRPr lang="en-US" sz="1400" baseline="-25000" dirty="0">
-              <a:solidFill>
-                <a:schemeClr val="accent1"/>
-              </a:solidFill>
-              <a:latin typeface="Times New Roman" panose="02020603050405020304" pitchFamily="18" charset="0"/>
-              <a:cs typeface="Times New Roman" panose="02020603050405020304" pitchFamily="18" charset="0"/>
-            </a:endParaRPr>
-          </a:p>
-        </p:txBody>
-      </p:sp>
-      <p:cxnSp>
-        <p:nvCxnSpPr>
-          <p:cNvPr id="18" name="Straight Arrow Connector 25">
-            <a:extLst>
-              <a:ext uri="{FF2B5EF4-FFF2-40B4-BE49-F238E27FC236}">
-                <a16:creationId xmlns:a16="http://schemas.microsoft.com/office/drawing/2014/main" id="{7E6BE357-0C8C-D4F8-D7FF-482B3665823F}"/>
-              </a:ext>
-            </a:extLst>
-          </p:cNvPr>
-          <p:cNvCxnSpPr>
-            <a:cxnSpLocks/>
-          </p:cNvCxnSpPr>
-          <p:nvPr/>
-        </p:nvCxnSpPr>
-        <p:spPr>
-          <a:xfrm>
-            <a:off x="331433" y="1074193"/>
-            <a:ext cx="52181" cy="0"/>
-          </a:xfrm>
-          <a:prstGeom prst="straightConnector1">
-            <a:avLst/>
-          </a:prstGeom>
-          <a:ln w="15875">
-            <a:solidFill>
-              <a:schemeClr val="accent1"/>
-            </a:solidFill>
-            <a:headEnd type="none"/>
-            <a:tailEnd type="arrow"/>
-          </a:ln>
-        </p:spPr>
-        <p:style>
-          <a:lnRef idx="1">
-            <a:schemeClr val="accent1"/>
-          </a:lnRef>
-          <a:fillRef idx="0">
-            <a:schemeClr val="accent1"/>
-          </a:fillRef>
-          <a:effectRef idx="0">
-            <a:schemeClr val="accent1"/>
-          </a:effectRef>
-          <a:fontRef idx="minor">
-            <a:schemeClr val="tx1"/>
-          </a:fontRef>
-        </p:style>
-      </p:cxnSp>
-      <p:sp>
-        <p:nvSpPr>
-          <p:cNvPr id="19" name="Textfeld 8">
-            <a:extLst>
-              <a:ext uri="{FF2B5EF4-FFF2-40B4-BE49-F238E27FC236}">
-                <a16:creationId xmlns:a16="http://schemas.microsoft.com/office/drawing/2014/main" id="{DCE8C7E1-350F-84E2-FC44-966FE05033FA}"/>
-              </a:ext>
-            </a:extLst>
-          </p:cNvPr>
-          <p:cNvSpPr txBox="1"/>
-          <p:nvPr/>
-        </p:nvSpPr>
-        <p:spPr>
-          <a:xfrm>
-            <a:off x="-38665" y="913487"/>
-            <a:ext cx="329051" cy="307777"/>
-          </a:xfrm>
-          <a:prstGeom prst="rect">
-            <a:avLst/>
-          </a:prstGeom>
-          <a:noFill/>
-          <a:ln>
-            <a:noFill/>
-          </a:ln>
-        </p:spPr>
-        <p:txBody>
-          <a:bodyPr wrap="square" rtlCol="0">
-            <a:spAutoFit/>
-          </a:bodyPr>
-          <a:lstStyle/>
-          <a:p>
-            <a:r>
-              <a:rPr lang="de-DE" sz="1400" i="1" dirty="0">
-                <a:solidFill>
-                  <a:schemeClr val="accent1"/>
-                </a:solidFill>
-                <a:latin typeface="Times New Roman" panose="02020603050405020304" pitchFamily="18" charset="0"/>
-                <a:cs typeface="Times New Roman" panose="02020603050405020304" pitchFamily="18" charset="0"/>
-              </a:rPr>
-              <a:t>i</a:t>
-            </a:r>
-            <a:r>
-              <a:rPr lang="de-DE" sz="1400" baseline="-25000" dirty="0">
-                <a:solidFill>
-                  <a:schemeClr val="accent1"/>
-                </a:solidFill>
-                <a:latin typeface="Times New Roman" panose="02020603050405020304" pitchFamily="18" charset="0"/>
-                <a:cs typeface="Times New Roman" panose="02020603050405020304" pitchFamily="18" charset="0"/>
-              </a:rPr>
-              <a:t>2</a:t>
-            </a:r>
-            <a:endParaRPr lang="en-US" sz="1400" baseline="-25000" dirty="0">
-              <a:solidFill>
-                <a:schemeClr val="accent1"/>
-              </a:solidFill>
-              <a:latin typeface="Times New Roman" panose="02020603050405020304" pitchFamily="18" charset="0"/>
-              <a:cs typeface="Times New Roman" panose="02020603050405020304" pitchFamily="18" charset="0"/>
-            </a:endParaRPr>
-          </a:p>
-        </p:txBody>
-      </p:sp>
-      <p:sp>
-        <p:nvSpPr>
-          <p:cNvPr id="28" name="Freihandform: Form 27">
-            <a:extLst>
-              <a:ext uri="{FF2B5EF4-FFF2-40B4-BE49-F238E27FC236}">
-                <a16:creationId xmlns:a16="http://schemas.microsoft.com/office/drawing/2014/main" id="{FCB15C5C-8A66-F79E-0A42-D05414BED3B0}"/>
-              </a:ext>
-            </a:extLst>
-          </p:cNvPr>
-          <p:cNvSpPr/>
-          <p:nvPr/>
-        </p:nvSpPr>
-        <p:spPr>
-          <a:xfrm rot="526914">
-            <a:off x="2403521" y="575731"/>
-            <a:ext cx="57742" cy="670560"/>
-          </a:xfrm>
-          <a:custGeom>
-            <a:avLst/>
-            <a:gdLst>
-              <a:gd name="connsiteX0" fmla="*/ 142333 w 142333"/>
-              <a:gd name="connsiteY0" fmla="*/ 0 h 670560"/>
-              <a:gd name="connsiteX1" fmla="*/ 93 w 142333"/>
-              <a:gd name="connsiteY1" fmla="*/ 311573 h 670560"/>
-              <a:gd name="connsiteX2" fmla="*/ 122013 w 142333"/>
-              <a:gd name="connsiteY2" fmla="*/ 670560 h 670560"/>
-            </a:gdLst>
-            <a:ahLst/>
-            <a:cxnLst>
-              <a:cxn ang="0">
-                <a:pos x="connsiteX0" y="connsiteY0"/>
-              </a:cxn>
-              <a:cxn ang="0">
-                <a:pos x="connsiteX1" y="connsiteY1"/>
-              </a:cxn>
-              <a:cxn ang="0">
-                <a:pos x="connsiteX2" y="connsiteY2"/>
-              </a:cxn>
-            </a:cxnLst>
-            <a:rect l="l" t="t" r="r" b="b"/>
-            <a:pathLst>
-              <a:path w="142333" h="670560">
-                <a:moveTo>
-                  <a:pt x="142333" y="0"/>
-                </a:moveTo>
-                <a:cubicBezTo>
-                  <a:pt x="72906" y="99906"/>
-                  <a:pt x="3480" y="199813"/>
-                  <a:pt x="93" y="311573"/>
-                </a:cubicBezTo>
-                <a:cubicBezTo>
-                  <a:pt x="-3294" y="423333"/>
-                  <a:pt x="85888" y="585893"/>
-                  <a:pt x="122013" y="670560"/>
-                </a:cubicBezTo>
-              </a:path>
-            </a:pathLst>
-          </a:custGeom>
-          <a:noFill/>
-          <a:ln>
-            <a:solidFill>
-              <a:schemeClr val="accent1"/>
-            </a:solidFill>
-            <a:tailEnd type="arrow"/>
-          </a:ln>
-        </p:spPr>
-        <p:style>
-          <a:lnRef idx="2">
-            <a:schemeClr val="accent1">
-              <a:shade val="15000"/>
-            </a:schemeClr>
-          </a:lnRef>
-          <a:fillRef idx="1">
-            <a:schemeClr val="accent1"/>
-          </a:fillRef>
-          <a:effectRef idx="0">
-            <a:schemeClr val="accent1"/>
-          </a:effectRef>
-          <a:fontRef idx="minor">
-            <a:schemeClr val="lt1"/>
-          </a:fontRef>
-        </p:style>
-        <p:txBody>
-          <a:bodyPr rtlCol="0" anchor="ctr"/>
-          <a:lstStyle/>
-          <a:p>
-            <a:pPr algn="ctr"/>
-            <a:endParaRPr lang="de-DE">
-              <a:latin typeface="Times New Roman" panose="02020603050405020304" pitchFamily="18" charset="0"/>
-              <a:cs typeface="Times New Roman" panose="02020603050405020304" pitchFamily="18" charset="0"/>
-            </a:endParaRPr>
-          </a:p>
-        </p:txBody>
-      </p:sp>
-      <p:cxnSp>
-        <p:nvCxnSpPr>
-          <p:cNvPr id="30" name="Gerade Verbindung mit Pfeil 29">
-            <a:extLst>
-              <a:ext uri="{FF2B5EF4-FFF2-40B4-BE49-F238E27FC236}">
-                <a16:creationId xmlns:a16="http://schemas.microsoft.com/office/drawing/2014/main" id="{9247E760-B6F0-09CE-13D8-2B58D882988F}"/>
-              </a:ext>
-            </a:extLst>
-          </p:cNvPr>
-          <p:cNvCxnSpPr/>
-          <p:nvPr/>
-        </p:nvCxnSpPr>
-        <p:spPr>
-          <a:xfrm>
-            <a:off x="2539205" y="894080"/>
-            <a:ext cx="0" cy="352689"/>
-          </a:xfrm>
-          <a:prstGeom prst="straightConnector1">
-            <a:avLst/>
-          </a:prstGeom>
-          <a:ln>
-            <a:tailEnd type="arrow"/>
-          </a:ln>
-        </p:spPr>
-        <p:style>
-          <a:lnRef idx="2">
-            <a:schemeClr val="accent1"/>
-          </a:lnRef>
-          <a:fillRef idx="0">
-            <a:schemeClr val="accent1"/>
-          </a:fillRef>
-          <a:effectRef idx="1">
-            <a:schemeClr val="accent1"/>
-          </a:effectRef>
-          <a:fontRef idx="minor">
-            <a:schemeClr val="tx1"/>
-          </a:fontRef>
-        </p:style>
-      </p:cxnSp>
-      <p:cxnSp>
-        <p:nvCxnSpPr>
-          <p:cNvPr id="32" name="Gerader Verbinder 31">
-            <a:extLst>
-              <a:ext uri="{FF2B5EF4-FFF2-40B4-BE49-F238E27FC236}">
-                <a16:creationId xmlns:a16="http://schemas.microsoft.com/office/drawing/2014/main" id="{AC36F658-1888-0CF6-B25C-E652F13664C1}"/>
-              </a:ext>
-            </a:extLst>
-          </p:cNvPr>
-          <p:cNvCxnSpPr/>
-          <p:nvPr/>
-        </p:nvCxnSpPr>
-        <p:spPr>
-          <a:xfrm>
-            <a:off x="3384884" y="1322969"/>
-            <a:ext cx="0" cy="189178"/>
-          </a:xfrm>
-          <a:prstGeom prst="line">
-            <a:avLst/>
-          </a:prstGeom>
-          <a:ln>
-            <a:solidFill>
-              <a:schemeClr val="tx1"/>
-            </a:solidFill>
-          </a:ln>
-        </p:spPr>
-        <p:style>
-          <a:lnRef idx="2">
-            <a:schemeClr val="accent1"/>
-          </a:lnRef>
-          <a:fillRef idx="0">
-            <a:schemeClr val="accent1"/>
-          </a:fillRef>
-          <a:effectRef idx="1">
-            <a:schemeClr val="accent1"/>
-          </a:effectRef>
-          <a:fontRef idx="minor">
-            <a:schemeClr val="tx1"/>
-          </a:fontRef>
-        </p:style>
-      </p:cxnSp>
-      <p:cxnSp>
-        <p:nvCxnSpPr>
-          <p:cNvPr id="33" name="Gerader Verbinder 32">
-            <a:extLst>
-              <a:ext uri="{FF2B5EF4-FFF2-40B4-BE49-F238E27FC236}">
-                <a16:creationId xmlns:a16="http://schemas.microsoft.com/office/drawing/2014/main" id="{958B53ED-0139-DF54-7846-8011CCFF5E15}"/>
-              </a:ext>
-            </a:extLst>
-          </p:cNvPr>
-          <p:cNvCxnSpPr>
-            <a:cxnSpLocks/>
-          </p:cNvCxnSpPr>
-          <p:nvPr/>
-        </p:nvCxnSpPr>
-        <p:spPr>
-          <a:xfrm>
-            <a:off x="3281527" y="1512147"/>
-            <a:ext cx="206713" cy="0"/>
-          </a:xfrm>
-          <a:prstGeom prst="line">
-            <a:avLst/>
-          </a:prstGeom>
-          <a:ln>
-            <a:solidFill>
-              <a:schemeClr val="tx1"/>
-            </a:solidFill>
-          </a:ln>
-        </p:spPr>
-        <p:style>
-          <a:lnRef idx="2">
-            <a:schemeClr val="accent1"/>
-          </a:lnRef>
-          <a:fillRef idx="0">
-            <a:schemeClr val="accent1"/>
-          </a:fillRef>
-          <a:effectRef idx="1">
-            <a:schemeClr val="accent1"/>
-          </a:effectRef>
-          <a:fontRef idx="minor">
-            <a:schemeClr val="tx1"/>
-          </a:fontRef>
-        </p:style>
-      </p:cxnSp>
-      <p:cxnSp>
-        <p:nvCxnSpPr>
-          <p:cNvPr id="35" name="Gerader Verbinder 34">
-            <a:extLst>
-              <a:ext uri="{FF2B5EF4-FFF2-40B4-BE49-F238E27FC236}">
-                <a16:creationId xmlns:a16="http://schemas.microsoft.com/office/drawing/2014/main" id="{97D3A087-8F0E-E897-8664-26F1BD531A03}"/>
-              </a:ext>
-            </a:extLst>
-          </p:cNvPr>
-          <p:cNvCxnSpPr>
-            <a:cxnSpLocks/>
-          </p:cNvCxnSpPr>
-          <p:nvPr/>
-        </p:nvCxnSpPr>
-        <p:spPr>
-          <a:xfrm>
-            <a:off x="3316516" y="1559772"/>
-            <a:ext cx="142541" cy="0"/>
-          </a:xfrm>
-          <a:prstGeom prst="line">
-            <a:avLst/>
-          </a:prstGeom>
-          <a:ln>
-            <a:solidFill>
-              <a:schemeClr val="tx1"/>
-            </a:solidFill>
-          </a:ln>
-        </p:spPr>
-        <p:style>
-          <a:lnRef idx="2">
-            <a:schemeClr val="accent1"/>
-          </a:lnRef>
-          <a:fillRef idx="0">
-            <a:schemeClr val="accent1"/>
-          </a:fillRef>
-          <a:effectRef idx="1">
-            <a:schemeClr val="accent1"/>
-          </a:effectRef>
-          <a:fontRef idx="minor">
-            <a:schemeClr val="tx1"/>
-          </a:fontRef>
-        </p:style>
-      </p:cxnSp>
-      <p:cxnSp>
-        <p:nvCxnSpPr>
-          <p:cNvPr id="38" name="Gerader Verbinder 37">
-            <a:extLst>
-              <a:ext uri="{FF2B5EF4-FFF2-40B4-BE49-F238E27FC236}">
-                <a16:creationId xmlns:a16="http://schemas.microsoft.com/office/drawing/2014/main" id="{B4AB382B-892B-ED80-5D43-1FA3804C05EC}"/>
-              </a:ext>
-            </a:extLst>
-          </p:cNvPr>
-          <p:cNvCxnSpPr>
-            <a:cxnSpLocks/>
-          </p:cNvCxnSpPr>
-          <p:nvPr/>
-        </p:nvCxnSpPr>
-        <p:spPr>
-          <a:xfrm>
-            <a:off x="3346103" y="1602634"/>
-            <a:ext cx="74853" cy="0"/>
-          </a:xfrm>
-          <a:prstGeom prst="line">
-            <a:avLst/>
-          </a:prstGeom>
-          <a:ln>
-            <a:solidFill>
-              <a:schemeClr val="tx1"/>
-            </a:solidFill>
-          </a:ln>
-        </p:spPr>
-        <p:style>
-          <a:lnRef idx="2">
-            <a:schemeClr val="accent1"/>
-          </a:lnRef>
-          <a:fillRef idx="0">
-            <a:schemeClr val="accent1"/>
-          </a:fillRef>
-          <a:effectRef idx="1">
-            <a:schemeClr val="accent1"/>
-          </a:effectRef>
-          <a:fontRef idx="minor">
-            <a:schemeClr val="tx1"/>
-          </a:fontRef>
-        </p:style>
-      </p:cxnSp>
-      <p:cxnSp>
-        <p:nvCxnSpPr>
-          <p:cNvPr id="41" name="Gerade Verbindung mit Pfeil 40">
-            <a:extLst>
-              <a:ext uri="{FF2B5EF4-FFF2-40B4-BE49-F238E27FC236}">
-                <a16:creationId xmlns:a16="http://schemas.microsoft.com/office/drawing/2014/main" id="{D5F94F6D-AEF7-3606-1B60-225249CC6190}"/>
-              </a:ext>
-            </a:extLst>
-          </p:cNvPr>
-          <p:cNvCxnSpPr>
-            <a:cxnSpLocks/>
-          </p:cNvCxnSpPr>
-          <p:nvPr/>
-        </p:nvCxnSpPr>
-        <p:spPr>
-          <a:xfrm>
-            <a:off x="4545805" y="745041"/>
-            <a:ext cx="0" cy="501728"/>
-          </a:xfrm>
-          <a:prstGeom prst="straightConnector1">
-            <a:avLst/>
-          </a:prstGeom>
-          <a:ln>
-            <a:tailEnd type="arrow"/>
-          </a:ln>
-        </p:spPr>
-        <p:style>
-          <a:lnRef idx="2">
-            <a:schemeClr val="accent1"/>
-          </a:lnRef>
-          <a:fillRef idx="0">
-            <a:schemeClr val="accent1"/>
-          </a:fillRef>
-          <a:effectRef idx="1">
-            <a:schemeClr val="accent1"/>
-          </a:effectRef>
-          <a:fontRef idx="minor">
-            <a:schemeClr val="tx1"/>
-          </a:fontRef>
-        </p:style>
-      </p:cxnSp>
-      <p:cxnSp>
-        <p:nvCxnSpPr>
-          <p:cNvPr id="43" name="Gerader Verbinder 42">
-            <a:extLst>
-              <a:ext uri="{FF2B5EF4-FFF2-40B4-BE49-F238E27FC236}">
-                <a16:creationId xmlns:a16="http://schemas.microsoft.com/office/drawing/2014/main" id="{D6D76B29-259B-D14E-2D2B-79699A5E9140}"/>
-              </a:ext>
-            </a:extLst>
-          </p:cNvPr>
-          <p:cNvCxnSpPr>
-            <a:cxnSpLocks/>
-          </p:cNvCxnSpPr>
-          <p:nvPr/>
-        </p:nvCxnSpPr>
-        <p:spPr>
-          <a:xfrm>
-            <a:off x="2539205" y="1322969"/>
-            <a:ext cx="2006600" cy="0"/>
-          </a:xfrm>
-          <a:prstGeom prst="line">
-            <a:avLst/>
-          </a:prstGeom>
-          <a:ln>
-            <a:solidFill>
-              <a:schemeClr val="tx1"/>
-            </a:solidFill>
-          </a:ln>
-        </p:spPr>
-        <p:style>
-          <a:lnRef idx="2">
-            <a:schemeClr val="accent1"/>
-          </a:lnRef>
-          <a:fillRef idx="0">
-            <a:schemeClr val="accent1"/>
-          </a:fillRef>
-          <a:effectRef idx="1">
-            <a:schemeClr val="accent1"/>
-          </a:effectRef>
-          <a:fontRef idx="minor">
-            <a:schemeClr val="tx1"/>
-          </a:fontRef>
-        </p:style>
-      </p:cxnSp>
-      <p:sp>
-        <p:nvSpPr>
-          <p:cNvPr id="47" name="Ellipse 46">
-            <a:extLst>
-              <a:ext uri="{FF2B5EF4-FFF2-40B4-BE49-F238E27FC236}">
-                <a16:creationId xmlns:a16="http://schemas.microsoft.com/office/drawing/2014/main" id="{97C89EF8-9135-3B6E-4033-60B570AA1242}"/>
-              </a:ext>
-            </a:extLst>
-          </p:cNvPr>
-          <p:cNvSpPr/>
-          <p:nvPr/>
-        </p:nvSpPr>
-        <p:spPr>
-          <a:xfrm>
-            <a:off x="2518186" y="1292426"/>
-            <a:ext cx="54000" cy="54000"/>
-          </a:xfrm>
-          <a:prstGeom prst="ellipse">
-            <a:avLst/>
-          </a:prstGeom>
-          <a:solidFill>
-            <a:srgbClr val="C0C0C0"/>
-          </a:solidFill>
-          <a:ln w="12700">
-            <a:solidFill>
-              <a:schemeClr val="tx1"/>
-            </a:solidFill>
-          </a:ln>
-        </p:spPr>
-        <p:style>
-          <a:lnRef idx="2">
-            <a:schemeClr val="accent1">
-              <a:shade val="15000"/>
-            </a:schemeClr>
-          </a:lnRef>
-          <a:fillRef idx="1">
-            <a:schemeClr val="accent1"/>
-          </a:fillRef>
-          <a:effectRef idx="0">
-            <a:schemeClr val="accent1"/>
-          </a:effectRef>
-          <a:fontRef idx="minor">
-            <a:schemeClr val="lt1"/>
-          </a:fontRef>
-        </p:style>
-        <p:txBody>
-          <a:bodyPr rtlCol="0" anchor="ctr"/>
-          <a:lstStyle/>
-          <a:p>
-            <a:pPr algn="ctr"/>
-            <a:endParaRPr lang="de-DE">
-              <a:ln>
-                <a:solidFill>
-                  <a:schemeClr val="tx1"/>
-                </a:solidFill>
-              </a:ln>
-              <a:solidFill>
-                <a:srgbClr val="C0C0C0"/>
-              </a:solidFill>
-              <a:latin typeface="Times New Roman" panose="02020603050405020304" pitchFamily="18" charset="0"/>
-              <a:cs typeface="Times New Roman" panose="02020603050405020304" pitchFamily="18" charset="0"/>
-            </a:endParaRPr>
-          </a:p>
-        </p:txBody>
-      </p:sp>
-      <p:sp>
-        <p:nvSpPr>
-          <p:cNvPr id="48" name="Ellipse 47">
-            <a:extLst>
-              <a:ext uri="{FF2B5EF4-FFF2-40B4-BE49-F238E27FC236}">
-                <a16:creationId xmlns:a16="http://schemas.microsoft.com/office/drawing/2014/main" id="{13993B0E-B7CA-EEC6-E464-FF49A5153953}"/>
-              </a:ext>
-            </a:extLst>
-          </p:cNvPr>
-          <p:cNvSpPr/>
-          <p:nvPr/>
-        </p:nvSpPr>
-        <p:spPr>
-          <a:xfrm>
-            <a:off x="4518805" y="1292426"/>
-            <a:ext cx="54000" cy="54000"/>
-          </a:xfrm>
-          <a:prstGeom prst="ellipse">
-            <a:avLst/>
-          </a:prstGeom>
-          <a:solidFill>
-            <a:srgbClr val="C0C0C0"/>
-          </a:solidFill>
-          <a:ln w="12700">
-            <a:solidFill>
-              <a:schemeClr val="tx1"/>
-            </a:solidFill>
-          </a:ln>
-        </p:spPr>
-        <p:style>
-          <a:lnRef idx="2">
-            <a:schemeClr val="accent1">
-              <a:shade val="15000"/>
-            </a:schemeClr>
-          </a:lnRef>
-          <a:fillRef idx="1">
-            <a:schemeClr val="accent1"/>
-          </a:fillRef>
-          <a:effectRef idx="0">
-            <a:schemeClr val="accent1"/>
-          </a:effectRef>
-          <a:fontRef idx="minor">
-            <a:schemeClr val="lt1"/>
-          </a:fontRef>
-        </p:style>
-        <p:txBody>
-          <a:bodyPr rtlCol="0" anchor="ctr"/>
-          <a:lstStyle/>
-          <a:p>
-            <a:pPr algn="ctr"/>
-            <a:endParaRPr lang="de-DE">
-              <a:ln>
-                <a:solidFill>
-                  <a:schemeClr val="tx1"/>
-                </a:solidFill>
-              </a:ln>
-              <a:solidFill>
-                <a:srgbClr val="C0C0C0"/>
-              </a:solidFill>
-              <a:latin typeface="Times New Roman" panose="02020603050405020304" pitchFamily="18" charset="0"/>
-              <a:cs typeface="Times New Roman" panose="02020603050405020304" pitchFamily="18" charset="0"/>
-            </a:endParaRPr>
-          </a:p>
-        </p:txBody>
-      </p:sp>
-      <p:sp>
-        <p:nvSpPr>
-          <p:cNvPr id="50" name="Textfeld 8">
-            <a:extLst>
-              <a:ext uri="{FF2B5EF4-FFF2-40B4-BE49-F238E27FC236}">
-                <a16:creationId xmlns:a16="http://schemas.microsoft.com/office/drawing/2014/main" id="{31C31C6B-5F00-ADB7-DD80-C6889DF6BBA1}"/>
-              </a:ext>
-            </a:extLst>
-          </p:cNvPr>
-          <p:cNvSpPr txBox="1"/>
-          <p:nvPr/>
-        </p:nvSpPr>
-        <p:spPr>
-          <a:xfrm>
-            <a:off x="2147507" y="697214"/>
-            <a:ext cx="387910" cy="307777"/>
-          </a:xfrm>
-          <a:prstGeom prst="rect">
-            <a:avLst/>
-          </a:prstGeom>
-          <a:noFill/>
-          <a:ln>
-            <a:noFill/>
-          </a:ln>
-        </p:spPr>
-        <p:txBody>
-          <a:bodyPr wrap="square" rtlCol="0">
-            <a:spAutoFit/>
-          </a:bodyPr>
-          <a:lstStyle/>
-          <a:p>
-            <a:r>
-              <a:rPr lang="de-DE" sz="1400" i="1" dirty="0">
-                <a:solidFill>
-                  <a:schemeClr val="accent1"/>
-                </a:solidFill>
-                <a:latin typeface="Times New Roman" panose="02020603050405020304" pitchFamily="18" charset="0"/>
-                <a:cs typeface="Times New Roman" panose="02020603050405020304" pitchFamily="18" charset="0"/>
-              </a:rPr>
-              <a:t>v</a:t>
-            </a:r>
-            <a:r>
-              <a:rPr lang="de-DE" sz="1400" baseline="-25000" dirty="0">
-                <a:solidFill>
-                  <a:schemeClr val="accent1"/>
-                </a:solidFill>
-                <a:latin typeface="Times New Roman" panose="02020603050405020304" pitchFamily="18" charset="0"/>
-                <a:cs typeface="Times New Roman" panose="02020603050405020304" pitchFamily="18" charset="0"/>
-              </a:rPr>
-              <a:t>1</a:t>
-            </a:r>
-            <a:endParaRPr lang="en-US" sz="1400" baseline="-25000" dirty="0">
-              <a:solidFill>
-                <a:schemeClr val="accent1"/>
-              </a:solidFill>
-              <a:latin typeface="Times New Roman" panose="02020603050405020304" pitchFamily="18" charset="0"/>
-              <a:cs typeface="Times New Roman" panose="02020603050405020304" pitchFamily="18" charset="0"/>
-            </a:endParaRPr>
-          </a:p>
-        </p:txBody>
-      </p:sp>
-      <p:sp>
-        <p:nvSpPr>
-          <p:cNvPr id="51" name="Textfeld 8">
-            <a:extLst>
-              <a:ext uri="{FF2B5EF4-FFF2-40B4-BE49-F238E27FC236}">
-                <a16:creationId xmlns:a16="http://schemas.microsoft.com/office/drawing/2014/main" id="{39297B90-4D8E-3B83-E983-4AB63C1BF26B}"/>
-              </a:ext>
-            </a:extLst>
-          </p:cNvPr>
-          <p:cNvSpPr txBox="1"/>
-          <p:nvPr/>
-        </p:nvSpPr>
-        <p:spPr>
-          <a:xfrm>
-            <a:off x="2486777" y="868747"/>
-            <a:ext cx="387910" cy="307777"/>
-          </a:xfrm>
-          <a:prstGeom prst="rect">
-            <a:avLst/>
-          </a:prstGeom>
-          <a:noFill/>
-          <a:ln>
-            <a:noFill/>
-          </a:ln>
-        </p:spPr>
-        <p:txBody>
-          <a:bodyPr wrap="square" rtlCol="0">
-            <a:spAutoFit/>
-          </a:bodyPr>
-          <a:lstStyle/>
-          <a:p>
-            <a:r>
-              <a:rPr lang="de-DE" sz="1400" i="1" dirty="0">
-                <a:solidFill>
-                  <a:schemeClr val="accent1"/>
-                </a:solidFill>
-                <a:latin typeface="Times New Roman" panose="02020603050405020304" pitchFamily="18" charset="0"/>
-                <a:cs typeface="Times New Roman" panose="02020603050405020304" pitchFamily="18" charset="0"/>
-              </a:rPr>
-              <a:t>v</a:t>
-            </a:r>
-            <a:r>
-              <a:rPr lang="de-DE" sz="1400" baseline="-25000" dirty="0">
-                <a:solidFill>
-                  <a:schemeClr val="accent1"/>
-                </a:solidFill>
-                <a:latin typeface="Times New Roman" panose="02020603050405020304" pitchFamily="18" charset="0"/>
-                <a:cs typeface="Times New Roman" panose="02020603050405020304" pitchFamily="18" charset="0"/>
-              </a:rPr>
-              <a:t>2</a:t>
-            </a:r>
-            <a:endParaRPr lang="en-US" sz="1400" baseline="-25000" dirty="0">
-              <a:solidFill>
-                <a:schemeClr val="accent1"/>
-              </a:solidFill>
-              <a:latin typeface="Times New Roman" panose="02020603050405020304" pitchFamily="18" charset="0"/>
-              <a:cs typeface="Times New Roman" panose="02020603050405020304" pitchFamily="18" charset="0"/>
-            </a:endParaRPr>
-          </a:p>
-        </p:txBody>
-      </p:sp>
-      <p:sp>
-        <p:nvSpPr>
-          <p:cNvPr id="52" name="Textfeld 8">
-            <a:extLst>
-              <a:ext uri="{FF2B5EF4-FFF2-40B4-BE49-F238E27FC236}">
-                <a16:creationId xmlns:a16="http://schemas.microsoft.com/office/drawing/2014/main" id="{1BC45A2C-4704-8744-E83D-2D4DA00C9239}"/>
-              </a:ext>
-            </a:extLst>
-          </p:cNvPr>
-          <p:cNvSpPr txBox="1"/>
-          <p:nvPr/>
-        </p:nvSpPr>
-        <p:spPr>
-          <a:xfrm>
-            <a:off x="4509803" y="786083"/>
-            <a:ext cx="533225" cy="307777"/>
-          </a:xfrm>
-          <a:prstGeom prst="rect">
-            <a:avLst/>
-          </a:prstGeom>
-          <a:noFill/>
-          <a:ln>
-            <a:noFill/>
-          </a:ln>
-        </p:spPr>
-        <p:txBody>
-          <a:bodyPr wrap="square" rtlCol="0">
-            <a:spAutoFit/>
-          </a:bodyPr>
-          <a:lstStyle/>
-          <a:p>
-            <a:r>
-              <a:rPr lang="de-DE" sz="1400" i="1" dirty="0" err="1">
-                <a:solidFill>
-                  <a:schemeClr val="accent1"/>
-                </a:solidFill>
-                <a:latin typeface="Times New Roman" panose="02020603050405020304" pitchFamily="18" charset="0"/>
-                <a:cs typeface="Times New Roman" panose="02020603050405020304" pitchFamily="18" charset="0"/>
-              </a:rPr>
-              <a:t>v</a:t>
-            </a:r>
-            <a:r>
-              <a:rPr lang="de-DE" sz="1400" baseline="-25000" dirty="0" err="1">
-                <a:solidFill>
-                  <a:schemeClr val="accent1"/>
-                </a:solidFill>
-                <a:latin typeface="Times New Roman" panose="02020603050405020304" pitchFamily="18" charset="0"/>
-                <a:cs typeface="Times New Roman" panose="02020603050405020304" pitchFamily="18" charset="0"/>
-              </a:rPr>
-              <a:t>out</a:t>
-            </a:r>
-            <a:endParaRPr lang="en-US" sz="1400" baseline="-25000" dirty="0">
-              <a:solidFill>
-                <a:schemeClr val="accent1"/>
-              </a:solidFill>
-              <a:latin typeface="Times New Roman" panose="02020603050405020304" pitchFamily="18" charset="0"/>
-              <a:cs typeface="Times New Roman" panose="02020603050405020304" pitchFamily="18" charset="0"/>
-            </a:endParaRPr>
-          </a:p>
-        </p:txBody>
-      </p:sp>
-      <p:cxnSp>
-        <p:nvCxnSpPr>
-          <p:cNvPr id="53" name="Gerade Verbindung mit Pfeil 52">
-            <a:extLst>
-              <a:ext uri="{FF2B5EF4-FFF2-40B4-BE49-F238E27FC236}">
-                <a16:creationId xmlns:a16="http://schemas.microsoft.com/office/drawing/2014/main" id="{25E2EB37-5F3F-10B4-6311-3DB03E3CA697}"/>
-              </a:ext>
-            </a:extLst>
-          </p:cNvPr>
-          <p:cNvCxnSpPr>
-            <a:cxnSpLocks/>
-          </p:cNvCxnSpPr>
-          <p:nvPr/>
-        </p:nvCxnSpPr>
-        <p:spPr>
-          <a:xfrm>
-            <a:off x="3667917" y="851102"/>
-            <a:ext cx="0" cy="441324"/>
-          </a:xfrm>
-          <a:prstGeom prst="straightConnector1">
-            <a:avLst/>
-          </a:prstGeom>
-          <a:ln>
-            <a:tailEnd type="arrow"/>
-          </a:ln>
-        </p:spPr>
-        <p:style>
-          <a:lnRef idx="2">
-            <a:schemeClr val="accent1"/>
-          </a:lnRef>
-          <a:fillRef idx="0">
-            <a:schemeClr val="accent1"/>
-          </a:fillRef>
-          <a:effectRef idx="1">
-            <a:schemeClr val="accent1"/>
-          </a:effectRef>
-          <a:fontRef idx="minor">
-            <a:schemeClr val="tx1"/>
-          </a:fontRef>
-        </p:style>
-      </p:cxnSp>
-      <p:sp>
-        <p:nvSpPr>
-          <p:cNvPr id="56" name="Textfeld 8">
-            <a:extLst>
-              <a:ext uri="{FF2B5EF4-FFF2-40B4-BE49-F238E27FC236}">
-                <a16:creationId xmlns:a16="http://schemas.microsoft.com/office/drawing/2014/main" id="{39061103-F2C6-3929-8EB7-351204A2783E}"/>
-              </a:ext>
-            </a:extLst>
-          </p:cNvPr>
-          <p:cNvSpPr txBox="1"/>
-          <p:nvPr/>
-        </p:nvSpPr>
-        <p:spPr>
-          <a:xfrm>
-            <a:off x="3635656" y="757648"/>
-            <a:ext cx="850843" cy="451406"/>
-          </a:xfrm>
-          <a:prstGeom prst="rect">
-            <a:avLst/>
-          </a:prstGeom>
-          <a:noFill/>
-          <a:ln>
-            <a:noFill/>
-          </a:ln>
-        </p:spPr>
-        <p:txBody>
-          <a:bodyPr wrap="square" rtlCol="0">
-            <a:spAutoFit/>
-          </a:bodyPr>
-          <a:lstStyle/>
-          <a:p>
-            <a:r>
-              <a:rPr lang="de-DE" sz="1400" i="1" dirty="0">
-                <a:solidFill>
-                  <a:schemeClr val="accent1"/>
-                </a:solidFill>
-                <a:latin typeface="Times New Roman" panose="02020603050405020304" pitchFamily="18" charset="0"/>
-                <a:cs typeface="Times New Roman" panose="02020603050405020304" pitchFamily="18" charset="0"/>
-              </a:rPr>
-              <a:t>v</a:t>
-            </a:r>
-            <a:r>
-              <a:rPr lang="de-DE" sz="1400" baseline="-25000" dirty="0">
-                <a:solidFill>
-                  <a:schemeClr val="accent1"/>
-                </a:solidFill>
-                <a:latin typeface="Times New Roman" panose="02020603050405020304" pitchFamily="18" charset="0"/>
-                <a:cs typeface="Times New Roman" panose="02020603050405020304" pitchFamily="18" charset="0"/>
-              </a:rPr>
-              <a:t>1</a:t>
-            </a:r>
-            <a:r>
-              <a:rPr lang="de-DE" sz="1400" i="1" dirty="0">
-                <a:solidFill>
-                  <a:schemeClr val="accent1"/>
-                </a:solidFill>
-                <a:latin typeface="Times New Roman" panose="02020603050405020304" pitchFamily="18" charset="0"/>
-                <a:cs typeface="Times New Roman" panose="02020603050405020304" pitchFamily="18" charset="0"/>
-              </a:rPr>
-              <a:t>+v</a:t>
-            </a:r>
-            <a:r>
-              <a:rPr lang="de-DE" sz="1400" baseline="-25000" dirty="0">
-                <a:solidFill>
-                  <a:schemeClr val="accent1"/>
-                </a:solidFill>
-                <a:latin typeface="Times New Roman" panose="02020603050405020304" pitchFamily="18" charset="0"/>
-                <a:cs typeface="Times New Roman" panose="02020603050405020304" pitchFamily="18" charset="0"/>
-              </a:rPr>
-              <a:t>2</a:t>
-            </a:r>
-            <a:endParaRPr lang="en-US" sz="1400" baseline="-25000" dirty="0">
-              <a:solidFill>
-                <a:schemeClr val="accent1"/>
-              </a:solidFill>
-              <a:latin typeface="Times New Roman" panose="02020603050405020304" pitchFamily="18" charset="0"/>
-              <a:cs typeface="Times New Roman" panose="02020603050405020304" pitchFamily="18" charset="0"/>
-            </a:endParaRPr>
-          </a:p>
-          <a:p>
-            <a:r>
-              <a:rPr lang="de-DE" sz="1400" baseline="-25000" dirty="0">
-                <a:solidFill>
-                  <a:schemeClr val="accent1"/>
-                </a:solidFill>
-                <a:latin typeface="Times New Roman" panose="02020603050405020304" pitchFamily="18" charset="0"/>
-                <a:cs typeface="Times New Roman" panose="02020603050405020304" pitchFamily="18" charset="0"/>
-              </a:rPr>
-              <a:t> </a:t>
-            </a:r>
-            <a:endParaRPr lang="en-US" sz="1400" baseline="-25000" dirty="0">
-              <a:solidFill>
-                <a:schemeClr val="accent1"/>
-              </a:solidFill>
-              <a:latin typeface="Times New Roman" panose="02020603050405020304" pitchFamily="18" charset="0"/>
-              <a:cs typeface="Times New Roman" panose="02020603050405020304" pitchFamily="18" charset="0"/>
-            </a:endParaRPr>
-          </a:p>
-        </p:txBody>
-      </p:sp>
-      <p:cxnSp>
-        <p:nvCxnSpPr>
-          <p:cNvPr id="58" name="Gerader Verbinder 57">
-            <a:extLst>
-              <a:ext uri="{FF2B5EF4-FFF2-40B4-BE49-F238E27FC236}">
-                <a16:creationId xmlns:a16="http://schemas.microsoft.com/office/drawing/2014/main" id="{4FCFAEEC-1F27-FDAC-3D9E-BA60A16BFA6F}"/>
-              </a:ext>
-            </a:extLst>
-          </p:cNvPr>
-          <p:cNvCxnSpPr>
-            <a:cxnSpLocks/>
-          </p:cNvCxnSpPr>
-          <p:nvPr/>
-        </p:nvCxnSpPr>
-        <p:spPr>
-          <a:xfrm>
-            <a:off x="3730624" y="1041687"/>
-            <a:ext cx="385538" cy="4470"/>
-          </a:xfrm>
-          <a:prstGeom prst="line">
-            <a:avLst/>
-          </a:prstGeom>
-          <a:ln w="9525"/>
-        </p:spPr>
-        <p:style>
-          <a:lnRef idx="2">
-            <a:schemeClr val="accent1"/>
-          </a:lnRef>
-          <a:fillRef idx="0">
-            <a:schemeClr val="accent1"/>
-          </a:fillRef>
-          <a:effectRef idx="1">
-            <a:schemeClr val="accent1"/>
-          </a:effectRef>
-          <a:fontRef idx="minor">
-            <a:schemeClr val="tx1"/>
-          </a:fontRef>
-        </p:style>
-      </p:cxnSp>
-      <p:sp>
-        <p:nvSpPr>
-          <p:cNvPr id="61" name="Textfeld 8">
-            <a:extLst>
-              <a:ext uri="{FF2B5EF4-FFF2-40B4-BE49-F238E27FC236}">
-                <a16:creationId xmlns:a16="http://schemas.microsoft.com/office/drawing/2014/main" id="{D573E6B5-121D-D373-3610-2B6EECEC652E}"/>
-              </a:ext>
-            </a:extLst>
-          </p:cNvPr>
-          <p:cNvSpPr txBox="1"/>
-          <p:nvPr/>
-        </p:nvSpPr>
-        <p:spPr>
-          <a:xfrm>
-            <a:off x="3786744" y="1004991"/>
-            <a:ext cx="215342" cy="307777"/>
-          </a:xfrm>
-          <a:prstGeom prst="rect">
-            <a:avLst/>
-          </a:prstGeom>
-          <a:noFill/>
-          <a:ln>
-            <a:noFill/>
-          </a:ln>
-        </p:spPr>
-        <p:txBody>
-          <a:bodyPr wrap="square" rtlCol="0">
-            <a:spAutoFit/>
-          </a:bodyPr>
-          <a:lstStyle/>
-          <a:p>
-            <a:r>
-              <a:rPr lang="de-DE" sz="1400" dirty="0">
-                <a:solidFill>
-                  <a:schemeClr val="accent1"/>
-                </a:solidFill>
-                <a:latin typeface="Times New Roman" panose="02020603050405020304" pitchFamily="18" charset="0"/>
-                <a:cs typeface="Times New Roman" panose="02020603050405020304" pitchFamily="18" charset="0"/>
-              </a:rPr>
-              <a:t>2</a:t>
-            </a:r>
-            <a:endParaRPr lang="en-US" sz="1400" baseline="-25000" dirty="0">
-              <a:solidFill>
-                <a:schemeClr val="accent1"/>
-              </a:solidFill>
-              <a:latin typeface="Times New Roman" panose="02020603050405020304" pitchFamily="18" charset="0"/>
-              <a:cs typeface="Times New Roman" panose="02020603050405020304" pitchFamily="18" charset="0"/>
-            </a:endParaRPr>
-          </a:p>
-        </p:txBody>
-      </p:sp>
-      <p:sp>
-        <p:nvSpPr>
-          <p:cNvPr id="62" name="Textfeld 61">
-            <a:extLst>
-              <a:ext uri="{FF2B5EF4-FFF2-40B4-BE49-F238E27FC236}">
-                <a16:creationId xmlns:a16="http://schemas.microsoft.com/office/drawing/2014/main" id="{75C66BFE-5D03-BFD1-79AB-D4FC03D80452}"/>
-              </a:ext>
-            </a:extLst>
-          </p:cNvPr>
-          <p:cNvSpPr txBox="1"/>
-          <p:nvPr/>
-        </p:nvSpPr>
-        <p:spPr>
-          <a:xfrm>
-            <a:off x="-49803" y="1664616"/>
-            <a:ext cx="1985947" cy="323165"/>
-          </a:xfrm>
-          <a:prstGeom prst="rect">
-            <a:avLst/>
-          </a:prstGeom>
-          <a:noFill/>
-        </p:spPr>
-        <p:txBody>
-          <a:bodyPr wrap="square" rtlCol="0">
-            <a:spAutoFit/>
-          </a:bodyPr>
-          <a:lstStyle/>
-          <a:p>
-            <a:pPr algn="ctr"/>
-            <a:r>
-              <a:rPr lang="de-DE" sz="1500" dirty="0">
-                <a:latin typeface="Times New Roman" panose="02020603050405020304" pitchFamily="18" charset="0"/>
-                <a:cs typeface="Times New Roman" panose="02020603050405020304" pitchFamily="18" charset="0"/>
-              </a:rPr>
-              <a:t>(a) </a:t>
-            </a:r>
-            <a:r>
-              <a:rPr lang="de-DE" sz="1500" dirty="0" err="1">
-                <a:latin typeface="Times New Roman" panose="02020603050405020304" pitchFamily="18" charset="0"/>
-                <a:cs typeface="Times New Roman" panose="02020603050405020304" pitchFamily="18" charset="0"/>
-              </a:rPr>
-              <a:t>Coupled</a:t>
-            </a:r>
-            <a:r>
-              <a:rPr lang="de-DE" sz="1500" dirty="0">
-                <a:latin typeface="Times New Roman" panose="02020603050405020304" pitchFamily="18" charset="0"/>
-                <a:cs typeface="Times New Roman" panose="02020603050405020304" pitchFamily="18" charset="0"/>
-              </a:rPr>
-              <a:t> </a:t>
-            </a:r>
-            <a:r>
-              <a:rPr lang="de-DE" sz="1500" dirty="0" err="1">
-                <a:latin typeface="Times New Roman" panose="02020603050405020304" pitchFamily="18" charset="0"/>
-                <a:cs typeface="Times New Roman" panose="02020603050405020304" pitchFamily="18" charset="0"/>
-              </a:rPr>
-              <a:t>Inductor</a:t>
-            </a:r>
-            <a:endParaRPr lang="de-DE" sz="1500" dirty="0">
-              <a:latin typeface="Times New Roman" panose="02020603050405020304" pitchFamily="18" charset="0"/>
-              <a:cs typeface="Times New Roman" panose="02020603050405020304" pitchFamily="18" charset="0"/>
-            </a:endParaRPr>
-          </a:p>
-        </p:txBody>
-      </p:sp>
-      <p:sp>
-        <p:nvSpPr>
-          <p:cNvPr id="63" name="Textfeld 62">
-            <a:extLst>
-              <a:ext uri="{FF2B5EF4-FFF2-40B4-BE49-F238E27FC236}">
-                <a16:creationId xmlns:a16="http://schemas.microsoft.com/office/drawing/2014/main" id="{AB2FB67B-1989-D727-1704-A34EB8C35562}"/>
-              </a:ext>
-            </a:extLst>
-          </p:cNvPr>
-          <p:cNvSpPr txBox="1"/>
-          <p:nvPr/>
-        </p:nvSpPr>
-        <p:spPr>
-          <a:xfrm>
-            <a:off x="2201507" y="1664617"/>
-            <a:ext cx="2677833" cy="323165"/>
-          </a:xfrm>
-          <a:prstGeom prst="rect">
-            <a:avLst/>
-          </a:prstGeom>
-          <a:noFill/>
-        </p:spPr>
-        <p:txBody>
-          <a:bodyPr wrap="square" rtlCol="0">
-            <a:spAutoFit/>
-          </a:bodyPr>
-          <a:lstStyle/>
-          <a:p>
-            <a:pPr algn="ctr"/>
-            <a:r>
-              <a:rPr lang="de-DE" sz="1500" dirty="0">
-                <a:latin typeface="Times New Roman" panose="02020603050405020304" pitchFamily="18" charset="0"/>
-                <a:cs typeface="Times New Roman" panose="02020603050405020304" pitchFamily="18" charset="0"/>
-              </a:rPr>
-              <a:t>(b) Transformer Model</a:t>
-            </a:r>
-          </a:p>
-        </p:txBody>
-      </p:sp>
-      <p:sp>
-        <p:nvSpPr>
-          <p:cNvPr id="1025" name="Rechteck 1024">
-            <a:extLst>
-              <a:ext uri="{FF2B5EF4-FFF2-40B4-BE49-F238E27FC236}">
-                <a16:creationId xmlns:a16="http://schemas.microsoft.com/office/drawing/2014/main" id="{5071C965-C069-8088-87D2-E42B717CCA67}"/>
-              </a:ext>
-            </a:extLst>
-          </p:cNvPr>
-          <p:cNvSpPr/>
-          <p:nvPr/>
-        </p:nvSpPr>
-        <p:spPr>
-          <a:xfrm>
-            <a:off x="3363050" y="1298999"/>
-            <a:ext cx="45719" cy="45719"/>
-          </a:xfrm>
-          <a:prstGeom prst="rect">
-            <a:avLst/>
-          </a:prstGeom>
-          <a:solidFill>
-            <a:schemeClr val="tx1"/>
-          </a:solidFill>
-          <a:ln>
-            <a:noFill/>
-          </a:ln>
-        </p:spPr>
-        <p:style>
-          <a:lnRef idx="2">
-            <a:schemeClr val="accent1">
-              <a:shade val="15000"/>
-            </a:schemeClr>
-          </a:lnRef>
-          <a:fillRef idx="1">
-            <a:schemeClr val="accent1"/>
-          </a:fillRef>
-          <a:effectRef idx="0">
-            <a:schemeClr val="accent1"/>
-          </a:effectRef>
-          <a:fontRef idx="minor">
-            <a:schemeClr val="lt1"/>
-          </a:fontRef>
-        </p:style>
-        <p:txBody>
-          <a:bodyPr rtlCol="0" anchor="ctr"/>
-          <a:lstStyle/>
-          <a:p>
-            <a:pPr algn="ctr"/>
-            <a:endParaRPr lang="de-DE"/>
-          </a:p>
-        </p:txBody>
-      </p:sp>
-      <p:sp>
-        <p:nvSpPr>
-          <p:cNvPr id="1030" name="Rechteck 1029">
-            <a:extLst>
-              <a:ext uri="{FF2B5EF4-FFF2-40B4-BE49-F238E27FC236}">
-                <a16:creationId xmlns:a16="http://schemas.microsoft.com/office/drawing/2014/main" id="{C51151B1-C622-ECFE-0C22-8743CF1C757D}"/>
-              </a:ext>
-            </a:extLst>
-          </p:cNvPr>
-          <p:cNvSpPr/>
-          <p:nvPr/>
-        </p:nvSpPr>
-        <p:spPr>
-          <a:xfrm>
-            <a:off x="3293433" y="238126"/>
-            <a:ext cx="103356" cy="121442"/>
-          </a:xfrm>
-          <a:prstGeom prst="rect">
-            <a:avLst/>
-          </a:prstGeom>
-          <a:solidFill>
-            <a:schemeClr val="bg1"/>
-          </a:solidFill>
-          <a:ln>
-            <a:noFill/>
-          </a:ln>
-        </p:spPr>
-        <p:style>
-          <a:lnRef idx="2">
-            <a:schemeClr val="accent1">
-              <a:shade val="15000"/>
-            </a:schemeClr>
-          </a:lnRef>
-          <a:fillRef idx="1">
-            <a:schemeClr val="accent1"/>
-          </a:fillRef>
-          <a:effectRef idx="0">
-            <a:schemeClr val="accent1"/>
-          </a:effectRef>
-          <a:fontRef idx="minor">
-            <a:schemeClr val="lt1"/>
-          </a:fontRef>
-        </p:style>
-        <p:txBody>
-          <a:bodyPr rtlCol="0" anchor="ctr"/>
-          <a:lstStyle/>
-          <a:p>
-            <a:pPr algn="ctr"/>
-            <a:endParaRPr lang="de-DE"/>
-          </a:p>
-        </p:txBody>
-      </p:sp>
-      <p:cxnSp>
-        <p:nvCxnSpPr>
-          <p:cNvPr id="1032" name="Gerader Verbinder 1031">
-            <a:extLst>
-              <a:ext uri="{FF2B5EF4-FFF2-40B4-BE49-F238E27FC236}">
-                <a16:creationId xmlns:a16="http://schemas.microsoft.com/office/drawing/2014/main" id="{7BB800B6-084F-C75D-BC77-A3D4E673554C}"/>
-              </a:ext>
-            </a:extLst>
-          </p:cNvPr>
-          <p:cNvCxnSpPr>
-            <a:cxnSpLocks/>
-          </p:cNvCxnSpPr>
-          <p:nvPr/>
-        </p:nvCxnSpPr>
-        <p:spPr>
-          <a:xfrm flipV="1">
-            <a:off x="3281527" y="294883"/>
-            <a:ext cx="139429" cy="2381"/>
-          </a:xfrm>
-          <a:prstGeom prst="line">
-            <a:avLst/>
-          </a:prstGeom>
-          <a:ln w="15240"/>
-        </p:spPr>
-        <p:style>
-          <a:lnRef idx="2">
-            <a:schemeClr val="dk1"/>
-          </a:lnRef>
-          <a:fillRef idx="0">
-            <a:schemeClr val="dk1"/>
-          </a:fillRef>
-          <a:effectRef idx="1">
-            <a:schemeClr val="dk1"/>
-          </a:effectRef>
-          <a:fontRef idx="minor">
-            <a:schemeClr val="tx1"/>
-          </a:fontRef>
-        </p:style>
-      </p:cxnSp>
-      <p:cxnSp>
-        <p:nvCxnSpPr>
-          <p:cNvPr id="1029" name="Straight Arrow Connector 25">
-            <a:extLst>
-              <a:ext uri="{FF2B5EF4-FFF2-40B4-BE49-F238E27FC236}">
-                <a16:creationId xmlns:a16="http://schemas.microsoft.com/office/drawing/2014/main" id="{695590D6-3CA3-40C2-FE4D-77120866948A}"/>
-              </a:ext>
-            </a:extLst>
-          </p:cNvPr>
-          <p:cNvCxnSpPr>
-            <a:cxnSpLocks/>
-          </p:cNvCxnSpPr>
-          <p:nvPr/>
-        </p:nvCxnSpPr>
-        <p:spPr>
-          <a:xfrm>
-            <a:off x="3352271" y="294883"/>
-            <a:ext cx="52181" cy="0"/>
-          </a:xfrm>
-          <a:prstGeom prst="straightConnector1">
-            <a:avLst/>
-          </a:prstGeom>
-          <a:ln w="15875">
-            <a:solidFill>
-              <a:schemeClr val="accent1"/>
-            </a:solidFill>
-            <a:headEnd type="none"/>
-            <a:tailEnd type="arrow"/>
-          </a:ln>
-        </p:spPr>
-        <p:style>
-          <a:lnRef idx="1">
-            <a:schemeClr val="accent1"/>
-          </a:lnRef>
-          <a:fillRef idx="0">
-            <a:schemeClr val="accent1"/>
-          </a:fillRef>
-          <a:effectRef idx="0">
-            <a:schemeClr val="accent1"/>
-          </a:effectRef>
-          <a:fontRef idx="minor">
-            <a:schemeClr val="tx1"/>
-          </a:fontRef>
-        </p:style>
-      </p:cxnSp>
-      <p:sp>
-        <p:nvSpPr>
-          <p:cNvPr id="1034" name="Rechteck 1033">
-            <a:extLst>
-              <a:ext uri="{FF2B5EF4-FFF2-40B4-BE49-F238E27FC236}">
-                <a16:creationId xmlns:a16="http://schemas.microsoft.com/office/drawing/2014/main" id="{F99001BB-64C7-E68A-D9E6-3EDF3AD304D6}"/>
-              </a:ext>
-            </a:extLst>
-          </p:cNvPr>
-          <p:cNvSpPr/>
-          <p:nvPr/>
-        </p:nvSpPr>
-        <p:spPr>
-          <a:xfrm>
-            <a:off x="4324521" y="608634"/>
-            <a:ext cx="103356" cy="121442"/>
-          </a:xfrm>
-          <a:prstGeom prst="rect">
-            <a:avLst/>
-          </a:prstGeom>
-          <a:solidFill>
-            <a:schemeClr val="bg1"/>
-          </a:solidFill>
-          <a:ln>
-            <a:noFill/>
-          </a:ln>
-        </p:spPr>
-        <p:style>
-          <a:lnRef idx="2">
-            <a:schemeClr val="accent1">
-              <a:shade val="15000"/>
-            </a:schemeClr>
-          </a:lnRef>
-          <a:fillRef idx="1">
-            <a:schemeClr val="accent1"/>
-          </a:fillRef>
-          <a:effectRef idx="0">
-            <a:schemeClr val="accent1"/>
-          </a:effectRef>
-          <a:fontRef idx="minor">
-            <a:schemeClr val="lt1"/>
-          </a:fontRef>
-        </p:style>
-        <p:txBody>
-          <a:bodyPr rtlCol="0" anchor="ctr"/>
-          <a:lstStyle/>
-          <a:p>
-            <a:pPr algn="ctr"/>
-            <a:endParaRPr lang="de-DE"/>
-          </a:p>
-        </p:txBody>
-      </p:sp>
-      <p:cxnSp>
-        <p:nvCxnSpPr>
-          <p:cNvPr id="1035" name="Gerader Verbinder 1034">
-            <a:extLst>
-              <a:ext uri="{FF2B5EF4-FFF2-40B4-BE49-F238E27FC236}">
-                <a16:creationId xmlns:a16="http://schemas.microsoft.com/office/drawing/2014/main" id="{3EA68FB2-5F01-D407-C68A-D9E4E008CA41}"/>
-              </a:ext>
-            </a:extLst>
-          </p:cNvPr>
-          <p:cNvCxnSpPr>
-            <a:cxnSpLocks/>
-          </p:cNvCxnSpPr>
-          <p:nvPr/>
-        </p:nvCxnSpPr>
-        <p:spPr>
-          <a:xfrm flipV="1">
-            <a:off x="4312615" y="665391"/>
-            <a:ext cx="139429" cy="2381"/>
-          </a:xfrm>
-          <a:prstGeom prst="line">
-            <a:avLst/>
-          </a:prstGeom>
-          <a:ln w="15240"/>
-        </p:spPr>
-        <p:style>
-          <a:lnRef idx="2">
-            <a:schemeClr val="dk1"/>
-          </a:lnRef>
-          <a:fillRef idx="0">
-            <a:schemeClr val="dk1"/>
-          </a:fillRef>
-          <a:effectRef idx="1">
-            <a:schemeClr val="dk1"/>
-          </a:effectRef>
-          <a:fontRef idx="minor">
-            <a:schemeClr val="tx1"/>
-          </a:fontRef>
-        </p:style>
-      </p:cxnSp>
-      <p:cxnSp>
-        <p:nvCxnSpPr>
-          <p:cNvPr id="1036" name="Straight Arrow Connector 25">
-            <a:extLst>
-              <a:ext uri="{FF2B5EF4-FFF2-40B4-BE49-F238E27FC236}">
-                <a16:creationId xmlns:a16="http://schemas.microsoft.com/office/drawing/2014/main" id="{237B2AEE-0DB6-FF2E-B460-F1FCE8B83D32}"/>
-              </a:ext>
-            </a:extLst>
-          </p:cNvPr>
-          <p:cNvCxnSpPr>
-            <a:cxnSpLocks/>
-          </p:cNvCxnSpPr>
-          <p:nvPr/>
-        </p:nvCxnSpPr>
-        <p:spPr>
-          <a:xfrm>
-            <a:off x="4383359" y="665391"/>
-            <a:ext cx="52181" cy="0"/>
-          </a:xfrm>
-          <a:prstGeom prst="straightConnector1">
-            <a:avLst/>
-          </a:prstGeom>
-          <a:ln w="15875">
-            <a:solidFill>
-              <a:schemeClr val="accent1"/>
-            </a:solidFill>
-            <a:headEnd type="none"/>
-            <a:tailEnd type="arrow"/>
-          </a:ln>
-        </p:spPr>
-        <p:style>
-          <a:lnRef idx="1">
-            <a:schemeClr val="accent1"/>
-          </a:lnRef>
-          <a:fillRef idx="0">
-            <a:schemeClr val="accent1"/>
-          </a:fillRef>
-          <a:effectRef idx="0">
-            <a:schemeClr val="accent1"/>
-          </a:effectRef>
-          <a:fontRef idx="minor">
-            <a:schemeClr val="tx1"/>
-          </a:fontRef>
-        </p:style>
-      </p:cxnSp>
-      <p:sp>
-        <p:nvSpPr>
-          <p:cNvPr id="1037" name="Textfeld 8">
-            <a:extLst>
-              <a:ext uri="{FF2B5EF4-FFF2-40B4-BE49-F238E27FC236}">
-                <a16:creationId xmlns:a16="http://schemas.microsoft.com/office/drawing/2014/main" id="{537F3E8D-F49A-5391-1A15-CD81EFEF53AB}"/>
-              </a:ext>
-            </a:extLst>
-          </p:cNvPr>
-          <p:cNvSpPr txBox="1"/>
-          <p:nvPr/>
-        </p:nvSpPr>
-        <p:spPr>
-          <a:xfrm>
-            <a:off x="3197383" y="-25370"/>
-            <a:ext cx="329051" cy="307777"/>
-          </a:xfrm>
-          <a:prstGeom prst="rect">
-            <a:avLst/>
-          </a:prstGeom>
-          <a:noFill/>
-          <a:ln>
-            <a:noFill/>
-          </a:ln>
-        </p:spPr>
-        <p:txBody>
-          <a:bodyPr wrap="square" rtlCol="0">
-            <a:spAutoFit/>
-          </a:bodyPr>
-          <a:lstStyle/>
-          <a:p>
-            <a:r>
-              <a:rPr lang="de-DE" sz="1400" i="1" dirty="0">
-                <a:solidFill>
-                  <a:schemeClr val="accent1"/>
-                </a:solidFill>
-                <a:latin typeface="Times New Roman" panose="02020603050405020304" pitchFamily="18" charset="0"/>
-                <a:cs typeface="Times New Roman" panose="02020603050405020304" pitchFamily="18" charset="0"/>
-              </a:rPr>
-              <a:t>i</a:t>
-            </a:r>
-            <a:r>
-              <a:rPr lang="de-DE" sz="1400" baseline="-25000" dirty="0">
-                <a:solidFill>
-                  <a:schemeClr val="accent1"/>
-                </a:solidFill>
-                <a:latin typeface="Times New Roman" panose="02020603050405020304" pitchFamily="18" charset="0"/>
-                <a:cs typeface="Times New Roman" panose="02020603050405020304" pitchFamily="18" charset="0"/>
-              </a:rPr>
-              <a:t>m</a:t>
-            </a:r>
-            <a:endParaRPr lang="en-US" sz="1400" baseline="-25000" dirty="0">
-              <a:solidFill>
-                <a:schemeClr val="accent1"/>
-              </a:solidFill>
-              <a:latin typeface="Times New Roman" panose="02020603050405020304" pitchFamily="18" charset="0"/>
-              <a:cs typeface="Times New Roman" panose="02020603050405020304" pitchFamily="18" charset="0"/>
-            </a:endParaRPr>
-          </a:p>
-        </p:txBody>
-      </p:sp>
-      <p:sp>
-        <p:nvSpPr>
-          <p:cNvPr id="1038" name="Textfeld 8">
-            <a:extLst>
-              <a:ext uri="{FF2B5EF4-FFF2-40B4-BE49-F238E27FC236}">
-                <a16:creationId xmlns:a16="http://schemas.microsoft.com/office/drawing/2014/main" id="{99F92ED6-4802-007E-B7B0-EF4A30DAF98A}"/>
-              </a:ext>
-            </a:extLst>
-          </p:cNvPr>
-          <p:cNvSpPr txBox="1"/>
-          <p:nvPr/>
-        </p:nvSpPr>
-        <p:spPr>
-          <a:xfrm>
-            <a:off x="4222008" y="337440"/>
-            <a:ext cx="461622" cy="307777"/>
-          </a:xfrm>
-          <a:prstGeom prst="rect">
-            <a:avLst/>
-          </a:prstGeom>
-          <a:noFill/>
-          <a:ln>
-            <a:noFill/>
-          </a:ln>
-        </p:spPr>
-        <p:txBody>
-          <a:bodyPr wrap="square" rtlCol="0">
-            <a:spAutoFit/>
-          </a:bodyPr>
-          <a:lstStyle/>
-          <a:p>
-            <a:r>
-              <a:rPr lang="de-DE" sz="1400" i="1" dirty="0" err="1">
-                <a:solidFill>
-                  <a:schemeClr val="accent1"/>
-                </a:solidFill>
-                <a:latin typeface="Times New Roman" panose="02020603050405020304" pitchFamily="18" charset="0"/>
-                <a:cs typeface="Times New Roman" panose="02020603050405020304" pitchFamily="18" charset="0"/>
-              </a:rPr>
-              <a:t>i</a:t>
-            </a:r>
-            <a:r>
-              <a:rPr lang="de-DE" sz="1400" baseline="-25000" dirty="0" err="1">
-                <a:solidFill>
-                  <a:schemeClr val="accent1"/>
-                </a:solidFill>
-                <a:latin typeface="Times New Roman" panose="02020603050405020304" pitchFamily="18" charset="0"/>
-                <a:cs typeface="Times New Roman" panose="02020603050405020304" pitchFamily="18" charset="0"/>
-              </a:rPr>
-              <a:t>out</a:t>
-            </a:r>
-            <a:endParaRPr lang="en-US" sz="1400" baseline="-25000" dirty="0">
-              <a:solidFill>
-                <a:schemeClr val="accent1"/>
-              </a:solidFill>
-              <a:latin typeface="Times New Roman" panose="02020603050405020304" pitchFamily="18" charset="0"/>
-              <a:cs typeface="Times New Roman" panose="02020603050405020304" pitchFamily="18" charset="0"/>
-            </a:endParaRPr>
-          </a:p>
-        </p:txBody>
-      </p:sp>
-    </p:spTree>
-    <p:extLst>
-      <p:ext uri="{BB962C8B-B14F-4D97-AF65-F5344CB8AC3E}">
-        <p14:creationId xmlns:p14="http://schemas.microsoft.com/office/powerpoint/2010/main" val="399720738"/>
-      </p:ext>
-    </p:extLst>
-  </p:cSld>
-  <p:clrMapOvr>
-    <a:masterClrMapping/>
-  </p:clrMapOvr>
-  <p:timing>
-    <p:tnLst>
-      <p:par>
-        <p:cTn id="1" dur="indefinite" restart="never" nodeType="tmRoot">
-          <p:childTnLst>
-            <p:seq concurrent="1" nextAc="seek">
-              <p:cTn id="2" dur="indefinite" nodeType="mainSeq">
-                <p:childTnLst>
-                  <p:par>
-                    <p:cTn id="3" fill="hold">
-                      <p:stCondLst>
-                        <p:cond delay="indefinite"/>
-                        <p:cond evt="onBegin" delay="0">
-                          <p:tn val="2"/>
-                        </p:cond>
-                      </p:stCondLst>
-                      <p:childTnLst>
-                        <p:par>
-                          <p:cTn id="4" fill="hold">
-                            <p:stCondLst>
-                              <p:cond delay="0"/>
-                            </p:stCondLst>
-                            <p:childTnLst>
-                              <p:par>
-                                <p:cTn id="5" presetID="1" presetClass="entr" presetSubtype="0" fill="hold" grpId="0" nodeType="withEffect">
-                                  <p:stCondLst>
-                                    <p:cond delay="0"/>
-                                  </p:stCondLst>
-                                  <p:childTnLst>
-                                    <p:set>
-                                      <p:cBhvr>
-                                        <p:cTn id="6" dur="1" fill="hold">
-                                          <p:stCondLst>
-                                            <p:cond delay="0"/>
-                                          </p:stCondLst>
-                                        </p:cTn>
-                                        <p:tgtEl>
-                                          <p:spTgt spid="14"/>
-                                        </p:tgtEl>
-                                        <p:attrNameLst>
-                                          <p:attrName>style.visibility</p:attrName>
-                                        </p:attrNameLst>
-                                      </p:cBhvr>
-                                      <p:to>
-                                        <p:strVal val="visible"/>
-                                      </p:to>
-                                    </p:set>
-                                  </p:childTnLst>
-                                </p:cTn>
-                              </p:par>
-                              <p:par>
-                                <p:cTn id="7" presetID="1" presetClass="entr" presetSubtype="0" fill="hold" grpId="0" nodeType="withEffect">
-                                  <p:stCondLst>
-                                    <p:cond delay="0"/>
-                                  </p:stCondLst>
-                                  <p:childTnLst>
-                                    <p:set>
-                                      <p:cBhvr>
-                                        <p:cTn id="8" dur="1" fill="hold">
-                                          <p:stCondLst>
-                                            <p:cond delay="0"/>
-                                          </p:stCondLst>
-                                        </p:cTn>
-                                        <p:tgtEl>
-                                          <p:spTgt spid="15"/>
-                                        </p:tgtEl>
-                                        <p:attrNameLst>
-                                          <p:attrName>style.visibility</p:attrName>
-                                        </p:attrNameLst>
-                                      </p:cBhvr>
-                                      <p:to>
-                                        <p:strVal val="visible"/>
-                                      </p:to>
-                                    </p:set>
-                                  </p:childTnLst>
-                                </p:cTn>
-                              </p:par>
-                              <p:par>
-                                <p:cTn id="9" presetID="1" presetClass="entr" presetSubtype="0" fill="hold" nodeType="withEffect">
-                                  <p:stCondLst>
-                                    <p:cond delay="0"/>
-                                  </p:stCondLst>
-                                  <p:childTnLst>
-                                    <p:set>
-                                      <p:cBhvr>
-                                        <p:cTn id="10" dur="1" fill="hold">
-                                          <p:stCondLst>
-                                            <p:cond delay="0"/>
-                                          </p:stCondLst>
-                                        </p:cTn>
-                                        <p:tgtEl>
-                                          <p:spTgt spid="16"/>
-                                        </p:tgtEl>
-                                        <p:attrNameLst>
-                                          <p:attrName>style.visibility</p:attrName>
-                                        </p:attrNameLst>
-                                      </p:cBhvr>
-                                      <p:to>
-                                        <p:strVal val="visible"/>
-                                      </p:to>
-                                    </p:set>
-                                  </p:childTnLst>
-                                </p:cTn>
-                              </p:par>
-                              <p:par>
-                                <p:cTn id="11" presetID="1" presetClass="entr" presetSubtype="0" fill="hold" grpId="0" nodeType="withEffect">
-                                  <p:stCondLst>
-                                    <p:cond delay="0"/>
-                                  </p:stCondLst>
-                                  <p:childTnLst>
-                                    <p:set>
-                                      <p:cBhvr>
-                                        <p:cTn id="12" dur="1" fill="hold">
-                                          <p:stCondLst>
-                                            <p:cond delay="0"/>
-                                          </p:stCondLst>
-                                        </p:cTn>
-                                        <p:tgtEl>
-                                          <p:spTgt spid="17"/>
-                                        </p:tgtEl>
-                                        <p:attrNameLst>
-                                          <p:attrName>style.visibility</p:attrName>
-                                        </p:attrNameLst>
-                                      </p:cBhvr>
-                                      <p:to>
-                                        <p:strVal val="visible"/>
-                                      </p:to>
-                                    </p:set>
-                                  </p:childTnLst>
-                                </p:cTn>
-                              </p:par>
-                              <p:par>
-                                <p:cTn id="13" presetID="1" presetClass="entr" presetSubtype="0" fill="hold" nodeType="withEffect">
-                                  <p:stCondLst>
-                                    <p:cond delay="0"/>
-                                  </p:stCondLst>
-                                  <p:childTnLst>
-                                    <p:set>
-                                      <p:cBhvr>
-                                        <p:cTn id="14" dur="1" fill="hold">
-                                          <p:stCondLst>
-                                            <p:cond delay="0"/>
-                                          </p:stCondLst>
-                                        </p:cTn>
-                                        <p:tgtEl>
-                                          <p:spTgt spid="18"/>
-                                        </p:tgtEl>
-                                        <p:attrNameLst>
-                                          <p:attrName>style.visibility</p:attrName>
-                                        </p:attrNameLst>
-                                      </p:cBhvr>
-                                      <p:to>
-                                        <p:strVal val="visible"/>
-                                      </p:to>
-                                    </p:set>
-                                  </p:childTnLst>
-                                </p:cTn>
-                              </p:par>
-                              <p:par>
-                                <p:cTn id="15" presetID="1" presetClass="entr" presetSubtype="0" fill="hold" grpId="0" nodeType="withEffect">
-                                  <p:stCondLst>
-                                    <p:cond delay="0"/>
-                                  </p:stCondLst>
-                                  <p:childTnLst>
-                                    <p:set>
-                                      <p:cBhvr>
-                                        <p:cTn id="16" dur="1" fill="hold">
-                                          <p:stCondLst>
-                                            <p:cond delay="0"/>
-                                          </p:stCondLst>
-                                        </p:cTn>
-                                        <p:tgtEl>
-                                          <p:spTgt spid="19"/>
-                                        </p:tgtEl>
-                                        <p:attrNameLst>
-                                          <p:attrName>style.visibility</p:attrName>
-                                        </p:attrNameLst>
-                                      </p:cBhvr>
-                                      <p:to>
-                                        <p:strVal val="visible"/>
-                                      </p:to>
-                                    </p:set>
-                                  </p:childTnLst>
-                                </p:cTn>
-                              </p:par>
-                              <p:par>
-                                <p:cTn id="17" presetID="1" presetClass="entr" presetSubtype="0" fill="hold" grpId="0" nodeType="withEffect">
-                                  <p:stCondLst>
-                                    <p:cond delay="0"/>
-                                  </p:stCondLst>
-                                  <p:childTnLst>
-                                    <p:set>
-                                      <p:cBhvr>
-                                        <p:cTn id="18" dur="1" fill="hold">
-                                          <p:stCondLst>
-                                            <p:cond delay="0"/>
-                                          </p:stCondLst>
-                                        </p:cTn>
-                                        <p:tgtEl>
-                                          <p:spTgt spid="50"/>
-                                        </p:tgtEl>
-                                        <p:attrNameLst>
-                                          <p:attrName>style.visibility</p:attrName>
-                                        </p:attrNameLst>
-                                      </p:cBhvr>
-                                      <p:to>
-                                        <p:strVal val="visible"/>
-                                      </p:to>
-                                    </p:set>
-                                  </p:childTnLst>
-                                </p:cTn>
-                              </p:par>
-                              <p:par>
-                                <p:cTn id="19" presetID="1" presetClass="entr" presetSubtype="0" fill="hold" grpId="0" nodeType="withEffect">
-                                  <p:stCondLst>
-                                    <p:cond delay="0"/>
-                                  </p:stCondLst>
-                                  <p:childTnLst>
-                                    <p:set>
-                                      <p:cBhvr>
-                                        <p:cTn id="20" dur="1" fill="hold">
-                                          <p:stCondLst>
-                                            <p:cond delay="0"/>
-                                          </p:stCondLst>
-                                        </p:cTn>
-                                        <p:tgtEl>
-                                          <p:spTgt spid="51"/>
-                                        </p:tgtEl>
-                                        <p:attrNameLst>
-                                          <p:attrName>style.visibility</p:attrName>
-                                        </p:attrNameLst>
-                                      </p:cBhvr>
-                                      <p:to>
-                                        <p:strVal val="visible"/>
-                                      </p:to>
-                                    </p:set>
-                                  </p:childTnLst>
-                                </p:cTn>
-                              </p:par>
-                              <p:par>
-                                <p:cTn id="21" presetID="1" presetClass="entr" presetSubtype="0" fill="hold" grpId="0" nodeType="withEffect">
-                                  <p:stCondLst>
-                                    <p:cond delay="0"/>
-                                  </p:stCondLst>
-                                  <p:childTnLst>
-                                    <p:set>
-                                      <p:cBhvr>
-                                        <p:cTn id="22" dur="1" fill="hold">
-                                          <p:stCondLst>
-                                            <p:cond delay="0"/>
-                                          </p:stCondLst>
-                                        </p:cTn>
-                                        <p:tgtEl>
-                                          <p:spTgt spid="52"/>
-                                        </p:tgtEl>
-                                        <p:attrNameLst>
-                                          <p:attrName>style.visibility</p:attrName>
-                                        </p:attrNameLst>
-                                      </p:cBhvr>
-                                      <p:to>
-                                        <p:strVal val="visible"/>
-                                      </p:to>
-                                    </p:set>
-                                  </p:childTnLst>
-                                </p:cTn>
-                              </p:par>
-                              <p:par>
-                                <p:cTn id="23" presetID="1" presetClass="entr" presetSubtype="0" fill="hold" grpId="0" nodeType="withEffect">
-                                  <p:stCondLst>
-                                    <p:cond delay="0"/>
-                                  </p:stCondLst>
-                                  <p:childTnLst>
-                                    <p:set>
-                                      <p:cBhvr>
-                                        <p:cTn id="24" dur="1" fill="hold">
-                                          <p:stCondLst>
-                                            <p:cond delay="0"/>
-                                          </p:stCondLst>
-                                        </p:cTn>
-                                        <p:tgtEl>
-                                          <p:spTgt spid="56"/>
-                                        </p:tgtEl>
-                                        <p:attrNameLst>
-                                          <p:attrName>style.visibility</p:attrName>
-                                        </p:attrNameLst>
-                                      </p:cBhvr>
-                                      <p:to>
-                                        <p:strVal val="visible"/>
-                                      </p:to>
-                                    </p:set>
-                                  </p:childTnLst>
-                                </p:cTn>
-                              </p:par>
-                              <p:par>
-                                <p:cTn id="25" presetID="1" presetClass="entr" presetSubtype="0" fill="hold" grpId="0" nodeType="withEffect">
-                                  <p:stCondLst>
-                                    <p:cond delay="0"/>
-                                  </p:stCondLst>
-                                  <p:childTnLst>
-                                    <p:set>
-                                      <p:cBhvr>
-                                        <p:cTn id="26" dur="1" fill="hold">
-                                          <p:stCondLst>
-                                            <p:cond delay="0"/>
-                                          </p:stCondLst>
-                                        </p:cTn>
-                                        <p:tgtEl>
-                                          <p:spTgt spid="61"/>
-                                        </p:tgtEl>
-                                        <p:attrNameLst>
-                                          <p:attrName>style.visibility</p:attrName>
-                                        </p:attrNameLst>
-                                      </p:cBhvr>
-                                      <p:to>
-                                        <p:strVal val="visible"/>
-                                      </p:to>
-                                    </p:set>
-                                  </p:childTnLst>
-                                </p:cTn>
-                              </p:par>
-                              <p:par>
-                                <p:cTn id="27" presetID="1" presetClass="entr" presetSubtype="0" fill="hold" nodeType="withEffect">
-                                  <p:stCondLst>
-                                    <p:cond delay="0"/>
-                                  </p:stCondLst>
-                                  <p:childTnLst>
-                                    <p:set>
-                                      <p:cBhvr>
-                                        <p:cTn id="28" dur="1" fill="hold">
-                                          <p:stCondLst>
-                                            <p:cond delay="0"/>
-                                          </p:stCondLst>
-                                        </p:cTn>
-                                        <p:tgtEl>
-                                          <p:spTgt spid="1029"/>
-                                        </p:tgtEl>
-                                        <p:attrNameLst>
-                                          <p:attrName>style.visibility</p:attrName>
-                                        </p:attrNameLst>
-                                      </p:cBhvr>
-                                      <p:to>
-                                        <p:strVal val="visible"/>
-                                      </p:to>
-                                    </p:set>
-                                  </p:childTnLst>
-                                </p:cTn>
-                              </p:par>
-                              <p:par>
-                                <p:cTn id="29" presetID="1" presetClass="entr" presetSubtype="0" fill="hold" nodeType="withEffect">
-                                  <p:stCondLst>
-                                    <p:cond delay="0"/>
-                                  </p:stCondLst>
-                                  <p:childTnLst>
-                                    <p:set>
-                                      <p:cBhvr>
-                                        <p:cTn id="30" dur="1" fill="hold">
-                                          <p:stCondLst>
-                                            <p:cond delay="0"/>
-                                          </p:stCondLst>
-                                        </p:cTn>
-                                        <p:tgtEl>
-                                          <p:spTgt spid="1036"/>
-                                        </p:tgtEl>
-                                        <p:attrNameLst>
-                                          <p:attrName>style.visibility</p:attrName>
-                                        </p:attrNameLst>
-                                      </p:cBhvr>
-                                      <p:to>
-                                        <p:strVal val="visible"/>
-                                      </p:to>
-                                    </p:set>
-                                  </p:childTnLst>
-                                </p:cTn>
-                              </p:par>
-                              <p:par>
-                                <p:cTn id="31" presetID="1" presetClass="entr" presetSubtype="0" fill="hold" grpId="0" nodeType="withEffect">
-                                  <p:stCondLst>
-                                    <p:cond delay="0"/>
-                                  </p:stCondLst>
-                                  <p:childTnLst>
-                                    <p:set>
-                                      <p:cBhvr>
-                                        <p:cTn id="32" dur="1" fill="hold">
-                                          <p:stCondLst>
-                                            <p:cond delay="0"/>
-                                          </p:stCondLst>
-                                        </p:cTn>
-                                        <p:tgtEl>
-                                          <p:spTgt spid="1037"/>
-                                        </p:tgtEl>
-                                        <p:attrNameLst>
-                                          <p:attrName>style.visibility</p:attrName>
-                                        </p:attrNameLst>
-                                      </p:cBhvr>
-                                      <p:to>
-                                        <p:strVal val="visible"/>
-                                      </p:to>
-                                    </p:set>
-                                  </p:childTnLst>
-                                </p:cTn>
-                              </p:par>
-                              <p:par>
-                                <p:cTn id="33" presetID="1" presetClass="entr" presetSubtype="0" fill="hold" grpId="0" nodeType="withEffect">
-                                  <p:stCondLst>
-                                    <p:cond delay="0"/>
-                                  </p:stCondLst>
-                                  <p:childTnLst>
-                                    <p:set>
-                                      <p:cBhvr>
-                                        <p:cTn id="34" dur="1" fill="hold">
-                                          <p:stCondLst>
-                                            <p:cond delay="0"/>
-                                          </p:stCondLst>
-                                        </p:cTn>
-                                        <p:tgtEl>
-                                          <p:spTgt spid="1038"/>
-                                        </p:tgtEl>
-                                        <p:attrNameLst>
-                                          <p:attrName>style.visibility</p:attrName>
-                                        </p:attrNameLst>
-                                      </p:cBhvr>
-                                      <p:to>
-                                        <p:strVal val="visible"/>
-                                      </p:to>
-                                    </p:set>
-                                  </p:childTnLst>
-                                </p:cTn>
-                              </p:par>
-                            </p:childTnLst>
-                          </p:cTn>
-                        </p:par>
-                      </p:childTnLst>
-                    </p:cTn>
-                  </p:par>
-                </p:childTnLst>
-              </p:cTn>
-              <p:prevCondLst>
-                <p:cond evt="onPrev" delay="0">
-                  <p:tgtEl>
-                    <p:sldTgt/>
-                  </p:tgtEl>
-                </p:cond>
-              </p:prevCondLst>
-              <p:nextCondLst>
-                <p:cond evt="onNext" delay="0">
-                  <p:tgtEl>
-                    <p:sldTgt/>
-                  </p:tgtEl>
-                </p:cond>
-              </p:nextCondLst>
-            </p:seq>
-          </p:childTnLst>
-        </p:cTn>
-      </p:par>
-    </p:tnLst>
-    <p:bldLst>
-      <p:bldP spid="14" grpId="0" animBg="1"/>
-      <p:bldP spid="15" grpId="0" animBg="1"/>
-      <p:bldP spid="17" grpId="0"/>
-      <p:bldP spid="19" grpId="0" animBg="1"/>
-      <p:bldP spid="50" grpId="0" animBg="1"/>
-      <p:bldP spid="51" grpId="0" animBg="1"/>
-      <p:bldP spid="52" grpId="0" animBg="1"/>
-      <p:bldP spid="56" grpId="0" animBg="1"/>
-      <p:bldP spid="61" grpId="0" animBg="1"/>
-      <p:bldP spid="1037" grpId="0"/>
-      <p:bldP spid="1038" grpId="0"/>
-    </p:bldLst>
-  </p:timing>
-</p:sld>
-</file>
-
 <file path=ppt/theme/theme1.xml><?xml version="1.0" encoding="utf-8"?>
 <a:theme xmlns:a="http://schemas.openxmlformats.org/drawingml/2006/main" name="Office">
   <a:themeElements>

--- a/figures/IPEC_Figures_PowerPoint.pptx
+++ b/figures/IPEC_Figures_PowerPoint.pptx
@@ -5,12 +5,13 @@
     <p:sldMasterId id="2147483648" r:id="rId1"/>
   </p:sldMasterIdLst>
   <p:notesMasterIdLst>
-    <p:notesMasterId r:id="rId5"/>
+    <p:notesMasterId r:id="rId6"/>
   </p:notesMasterIdLst>
   <p:sldIdLst>
     <p:sldId id="610" r:id="rId2"/>
     <p:sldId id="621" r:id="rId3"/>
     <p:sldId id="622" r:id="rId4"/>
+    <p:sldId id="623" r:id="rId5"/>
   </p:sldIdLst>
   <p:sldSz cx="12192000" cy="6858000"/>
   <p:notesSz cx="6858000" cy="9144000"/>
@@ -109,6 +110,11 @@
       </a:defRPr>
     </a:lvl9pPr>
   </p:defaultTextStyle>
+  <p:extLst>
+    <p:ext uri="{EFAFB233-063F-42B5-8137-9DF3F51BA10A}">
+      <p15:sldGuideLst xmlns:p15="http://schemas.microsoft.com/office/powerpoint/2012/main"/>
+    </p:ext>
+  </p:extLst>
 </p:presentation>
 </file>
 
@@ -194,7 +200,7 @@
           <a:p>
             <a:fld id="{8BA047FC-F2F2-4B28-B76C-DEA75FAA1BBF}" type="datetimeFigureOut">
               <a:rPr lang="de-DE" smtClean="0"/>
-              <a:t>19.02.2026</a:t>
+              <a:t>15.03.2026</a:t>
             </a:fld>
             <a:endParaRPr lang="de-DE"/>
           </a:p>
@@ -722,7 +728,7 @@
           <a:p>
             <a:fld id="{B0B8CC02-5EFB-42DA-BC90-4C89E884E644}" type="datetimeFigureOut">
               <a:rPr lang="de-DE" smtClean="0"/>
-              <a:t>19.02.2026</a:t>
+              <a:t>15.03.2026</a:t>
             </a:fld>
             <a:endParaRPr lang="de-DE"/>
           </a:p>
@@ -920,7 +926,7 @@
           <a:p>
             <a:fld id="{B0B8CC02-5EFB-42DA-BC90-4C89E884E644}" type="datetimeFigureOut">
               <a:rPr lang="de-DE" smtClean="0"/>
-              <a:t>19.02.2026</a:t>
+              <a:t>15.03.2026</a:t>
             </a:fld>
             <a:endParaRPr lang="de-DE"/>
           </a:p>
@@ -1128,7 +1134,7 @@
           <a:p>
             <a:fld id="{B0B8CC02-5EFB-42DA-BC90-4C89E884E644}" type="datetimeFigureOut">
               <a:rPr lang="de-DE" smtClean="0"/>
-              <a:t>19.02.2026</a:t>
+              <a:t>15.03.2026</a:t>
             </a:fld>
             <a:endParaRPr lang="de-DE"/>
           </a:p>
@@ -1634,7 +1640,7 @@
           <a:p>
             <a:fld id="{B0B8CC02-5EFB-42DA-BC90-4C89E884E644}" type="datetimeFigureOut">
               <a:rPr lang="de-DE" smtClean="0"/>
-              <a:t>19.02.2026</a:t>
+              <a:t>15.03.2026</a:t>
             </a:fld>
             <a:endParaRPr lang="de-DE"/>
           </a:p>
@@ -1909,7 +1915,7 @@
           <a:p>
             <a:fld id="{B0B8CC02-5EFB-42DA-BC90-4C89E884E644}" type="datetimeFigureOut">
               <a:rPr lang="de-DE" smtClean="0"/>
-              <a:t>19.02.2026</a:t>
+              <a:t>15.03.2026</a:t>
             </a:fld>
             <a:endParaRPr lang="de-DE"/>
           </a:p>
@@ -2174,7 +2180,7 @@
           <a:p>
             <a:fld id="{B0B8CC02-5EFB-42DA-BC90-4C89E884E644}" type="datetimeFigureOut">
               <a:rPr lang="de-DE" smtClean="0"/>
-              <a:t>19.02.2026</a:t>
+              <a:t>15.03.2026</a:t>
             </a:fld>
             <a:endParaRPr lang="de-DE"/>
           </a:p>
@@ -2586,7 +2592,7 @@
           <a:p>
             <a:fld id="{B0B8CC02-5EFB-42DA-BC90-4C89E884E644}" type="datetimeFigureOut">
               <a:rPr lang="de-DE" smtClean="0"/>
-              <a:t>19.02.2026</a:t>
+              <a:t>15.03.2026</a:t>
             </a:fld>
             <a:endParaRPr lang="de-DE"/>
           </a:p>
@@ -2727,7 +2733,7 @@
           <a:p>
             <a:fld id="{B0B8CC02-5EFB-42DA-BC90-4C89E884E644}" type="datetimeFigureOut">
               <a:rPr lang="de-DE" smtClean="0"/>
-              <a:t>19.02.2026</a:t>
+              <a:t>15.03.2026</a:t>
             </a:fld>
             <a:endParaRPr lang="de-DE"/>
           </a:p>
@@ -2840,7 +2846,7 @@
           <a:p>
             <a:fld id="{B0B8CC02-5EFB-42DA-BC90-4C89E884E644}" type="datetimeFigureOut">
               <a:rPr lang="de-DE" smtClean="0"/>
-              <a:t>19.02.2026</a:t>
+              <a:t>15.03.2026</a:t>
             </a:fld>
             <a:endParaRPr lang="de-DE"/>
           </a:p>
@@ -3151,7 +3157,7 @@
           <a:p>
             <a:fld id="{B0B8CC02-5EFB-42DA-BC90-4C89E884E644}" type="datetimeFigureOut">
               <a:rPr lang="de-DE" smtClean="0"/>
-              <a:t>19.02.2026</a:t>
+              <a:t>15.03.2026</a:t>
             </a:fld>
             <a:endParaRPr lang="de-DE"/>
           </a:p>
@@ -3439,7 +3445,7 @@
           <a:p>
             <a:fld id="{B0B8CC02-5EFB-42DA-BC90-4C89E884E644}" type="datetimeFigureOut">
               <a:rPr lang="de-DE" smtClean="0"/>
-              <a:t>19.02.2026</a:t>
+              <a:t>15.03.2026</a:t>
             </a:fld>
             <a:endParaRPr lang="de-DE"/>
           </a:p>
@@ -3680,7 +3686,7 @@
           <a:p>
             <a:fld id="{B0B8CC02-5EFB-42DA-BC90-4C89E884E644}" type="datetimeFigureOut">
               <a:rPr lang="de-DE" smtClean="0"/>
-              <a:t>19.02.2026</a:t>
+              <a:t>15.03.2026</a:t>
             </a:fld>
             <a:endParaRPr lang="de-DE"/>
           </a:p>
@@ -14629,6 +14635,2124 @@
     <p:extLst>
       <p:ext uri="{BB962C8B-B14F-4D97-AF65-F5344CB8AC3E}">
         <p14:creationId xmlns:p14="http://schemas.microsoft.com/office/powerpoint/2010/main" val="2789225459"/>
+      </p:ext>
+    </p:extLst>
+  </p:cSld>
+  <p:clrMapOvr>
+    <a:masterClrMapping/>
+  </p:clrMapOvr>
+</p:sld>
+</file>
+
+<file path=ppt/slides/slide4.xml><?xml version="1.0" encoding="utf-8"?>
+<p:sld xmlns:a="http://schemas.openxmlformats.org/drawingml/2006/main" xmlns:r="http://schemas.openxmlformats.org/officeDocument/2006/relationships" xmlns:p="http://schemas.openxmlformats.org/presentationml/2006/main">
+  <p:cSld>
+    <p:spTree>
+      <p:nvGrpSpPr>
+        <p:cNvPr id="1" name="">
+          <a:extLst>
+            <a:ext uri="{FF2B5EF4-FFF2-40B4-BE49-F238E27FC236}">
+              <a16:creationId xmlns:a16="http://schemas.microsoft.com/office/drawing/2014/main" id="{F3E63F2B-DB60-9585-3548-1445B5353347}"/>
+            </a:ext>
+          </a:extLst>
+        </p:cNvPr>
+        <p:cNvGrpSpPr/>
+        <p:nvPr/>
+      </p:nvGrpSpPr>
+      <p:grpSpPr>
+        <a:xfrm>
+          <a:off x="0" y="0"/>
+          <a:ext cx="0" cy="0"/>
+          <a:chOff x="0" y="0"/>
+          <a:chExt cx="0" cy="0"/>
+        </a:xfrm>
+      </p:grpSpPr>
+      <p:graphicFrame>
+        <p:nvGraphicFramePr>
+          <p:cNvPr id="28" name="Tabelle 27">
+            <a:extLst>
+              <a:ext uri="{FF2B5EF4-FFF2-40B4-BE49-F238E27FC236}">
+                <a16:creationId xmlns:a16="http://schemas.microsoft.com/office/drawing/2014/main" id="{551F5C7D-75F9-80E9-F55F-8BD0C4B5E135}"/>
+              </a:ext>
+            </a:extLst>
+          </p:cNvPr>
+          <p:cNvGraphicFramePr>
+            <a:graphicFrameLocks noGrp="1"/>
+          </p:cNvGraphicFramePr>
+          <p:nvPr/>
+        </p:nvGraphicFramePr>
+        <p:xfrm>
+          <a:off x="-812777" y="5868550"/>
+          <a:ext cx="11208840" cy="640080"/>
+        </p:xfrm>
+        <a:graphic>
+          <a:graphicData uri="http://schemas.openxmlformats.org/drawingml/2006/table">
+            <a:tbl>
+              <a:tblPr firstRow="1" bandRow="1">
+                <a:tableStyleId>{2D5ABB26-0587-4C30-8999-92F81FD0307C}</a:tableStyleId>
+              </a:tblPr>
+              <a:tblGrid>
+                <a:gridCol w="934070">
+                  <a:extLst>
+                    <a:ext uri="{9D8B030D-6E8A-4147-A177-3AD203B41FA5}">
+                      <a16:colId xmlns:a16="http://schemas.microsoft.com/office/drawing/2014/main" val="2674426793"/>
+                    </a:ext>
+                  </a:extLst>
+                </a:gridCol>
+                <a:gridCol w="934070">
+                  <a:extLst>
+                    <a:ext uri="{9D8B030D-6E8A-4147-A177-3AD203B41FA5}">
+                      <a16:colId xmlns:a16="http://schemas.microsoft.com/office/drawing/2014/main" val="3572661540"/>
+                    </a:ext>
+                  </a:extLst>
+                </a:gridCol>
+                <a:gridCol w="934070">
+                  <a:extLst>
+                    <a:ext uri="{9D8B030D-6E8A-4147-A177-3AD203B41FA5}">
+                      <a16:colId xmlns:a16="http://schemas.microsoft.com/office/drawing/2014/main" val="3961166950"/>
+                    </a:ext>
+                  </a:extLst>
+                </a:gridCol>
+                <a:gridCol w="934070">
+                  <a:extLst>
+                    <a:ext uri="{9D8B030D-6E8A-4147-A177-3AD203B41FA5}">
+                      <a16:colId xmlns:a16="http://schemas.microsoft.com/office/drawing/2014/main" val="2768585121"/>
+                    </a:ext>
+                  </a:extLst>
+                </a:gridCol>
+                <a:gridCol w="934070">
+                  <a:extLst>
+                    <a:ext uri="{9D8B030D-6E8A-4147-A177-3AD203B41FA5}">
+                      <a16:colId xmlns:a16="http://schemas.microsoft.com/office/drawing/2014/main" val="1351681767"/>
+                    </a:ext>
+                  </a:extLst>
+                </a:gridCol>
+                <a:gridCol w="934070">
+                  <a:extLst>
+                    <a:ext uri="{9D8B030D-6E8A-4147-A177-3AD203B41FA5}">
+                      <a16:colId xmlns:a16="http://schemas.microsoft.com/office/drawing/2014/main" val="3656942"/>
+                    </a:ext>
+                  </a:extLst>
+                </a:gridCol>
+                <a:gridCol w="934070">
+                  <a:extLst>
+                    <a:ext uri="{9D8B030D-6E8A-4147-A177-3AD203B41FA5}">
+                      <a16:colId xmlns:a16="http://schemas.microsoft.com/office/drawing/2014/main" val="684801856"/>
+                    </a:ext>
+                  </a:extLst>
+                </a:gridCol>
+                <a:gridCol w="934070">
+                  <a:extLst>
+                    <a:ext uri="{9D8B030D-6E8A-4147-A177-3AD203B41FA5}">
+                      <a16:colId xmlns:a16="http://schemas.microsoft.com/office/drawing/2014/main" val="2683172096"/>
+                    </a:ext>
+                  </a:extLst>
+                </a:gridCol>
+                <a:gridCol w="934070">
+                  <a:extLst>
+                    <a:ext uri="{9D8B030D-6E8A-4147-A177-3AD203B41FA5}">
+                      <a16:colId xmlns:a16="http://schemas.microsoft.com/office/drawing/2014/main" val="2798623327"/>
+                    </a:ext>
+                  </a:extLst>
+                </a:gridCol>
+                <a:gridCol w="934070">
+                  <a:extLst>
+                    <a:ext uri="{9D8B030D-6E8A-4147-A177-3AD203B41FA5}">
+                      <a16:colId xmlns:a16="http://schemas.microsoft.com/office/drawing/2014/main" val="1580858874"/>
+                    </a:ext>
+                  </a:extLst>
+                </a:gridCol>
+                <a:gridCol w="934070">
+                  <a:extLst>
+                    <a:ext uri="{9D8B030D-6E8A-4147-A177-3AD203B41FA5}">
+                      <a16:colId xmlns:a16="http://schemas.microsoft.com/office/drawing/2014/main" val="259720998"/>
+                    </a:ext>
+                  </a:extLst>
+                </a:gridCol>
+                <a:gridCol w="934070">
+                  <a:extLst>
+                    <a:ext uri="{9D8B030D-6E8A-4147-A177-3AD203B41FA5}">
+                      <a16:colId xmlns:a16="http://schemas.microsoft.com/office/drawing/2014/main" val="3917417724"/>
+                    </a:ext>
+                  </a:extLst>
+                </a:gridCol>
+              </a:tblGrid>
+              <a:tr h="163560">
+                <a:tc>
+                  <a:txBody>
+                    <a:bodyPr/>
+                    <a:lstStyle/>
+                    <a:p>
+                      <a:endParaRPr lang="de-DE" sz="500" dirty="0"/>
+                    </a:p>
+                  </a:txBody>
+                  <a:tcPr>
+                    <a:lnL w="12700" cap="flat" cmpd="sng" algn="ctr">
+                      <a:noFill/>
+                      <a:prstDash val="solid"/>
+                      <a:round/>
+                      <a:headEnd type="none" w="med" len="med"/>
+                      <a:tailEnd type="none" w="med" len="med"/>
+                    </a:lnL>
+                    <a:lnR w="12700" cap="flat" cmpd="sng" algn="ctr">
+                      <a:solidFill>
+                        <a:schemeClr val="tx1"/>
+                      </a:solidFill>
+                      <a:prstDash val="solid"/>
+                      <a:round/>
+                      <a:headEnd type="none" w="med" len="med"/>
+                      <a:tailEnd type="none" w="med" len="med"/>
+                    </a:lnR>
+                    <a:lnT w="12700" cap="flat" cmpd="sng" algn="ctr">
+                      <a:noFill/>
+                      <a:prstDash val="solid"/>
+                      <a:round/>
+                      <a:headEnd type="none" w="med" len="med"/>
+                      <a:tailEnd type="none" w="med" len="med"/>
+                    </a:lnT>
+                    <a:lnB w="12700" cap="flat" cmpd="sng" algn="ctr">
+                      <a:noFill/>
+                      <a:prstDash val="solid"/>
+                      <a:round/>
+                      <a:headEnd type="none" w="med" len="med"/>
+                      <a:tailEnd type="none" w="med" len="med"/>
+                    </a:lnB>
+                    <a:lnTlToBr w="12700" cmpd="sng">
+                      <a:noFill/>
+                      <a:prstDash val="solid"/>
+                    </a:lnTlToBr>
+                    <a:lnBlToTr w="12700" cmpd="sng">
+                      <a:noFill/>
+                      <a:prstDash val="solid"/>
+                    </a:lnBlToTr>
+                  </a:tcPr>
+                </a:tc>
+                <a:tc>
+                  <a:txBody>
+                    <a:bodyPr/>
+                    <a:lstStyle/>
+                    <a:p>
+                      <a:endParaRPr lang="de-DE" sz="500" dirty="0"/>
+                    </a:p>
+                  </a:txBody>
+                  <a:tcPr>
+                    <a:lnL w="12700" cap="flat" cmpd="sng" algn="ctr">
+                      <a:solidFill>
+                        <a:schemeClr val="tx1"/>
+                      </a:solidFill>
+                      <a:prstDash val="solid"/>
+                      <a:round/>
+                      <a:headEnd type="none" w="med" len="med"/>
+                      <a:tailEnd type="none" w="med" len="med"/>
+                    </a:lnL>
+                    <a:lnR w="12700" cap="flat" cmpd="sng" algn="ctr">
+                      <a:noFill/>
+                      <a:prstDash val="solid"/>
+                      <a:round/>
+                      <a:headEnd type="none" w="med" len="med"/>
+                      <a:tailEnd type="none" w="med" len="med"/>
+                    </a:lnR>
+                    <a:lnT w="12700" cap="flat" cmpd="sng" algn="ctr">
+                      <a:noFill/>
+                      <a:prstDash val="solid"/>
+                      <a:round/>
+                      <a:headEnd type="none" w="med" len="med"/>
+                      <a:tailEnd type="none" w="med" len="med"/>
+                    </a:lnT>
+                    <a:lnB w="12700" cap="flat" cmpd="sng" algn="ctr">
+                      <a:noFill/>
+                      <a:prstDash val="solid"/>
+                      <a:round/>
+                      <a:headEnd type="none" w="med" len="med"/>
+                      <a:tailEnd type="none" w="med" len="med"/>
+                    </a:lnB>
+                    <a:lnTlToBr w="12700" cmpd="sng">
+                      <a:noFill/>
+                      <a:prstDash val="solid"/>
+                    </a:lnTlToBr>
+                    <a:lnBlToTr w="12700" cmpd="sng">
+                      <a:noFill/>
+                      <a:prstDash val="solid"/>
+                    </a:lnBlToTr>
+                  </a:tcPr>
+                </a:tc>
+                <a:tc>
+                  <a:txBody>
+                    <a:bodyPr/>
+                    <a:lstStyle/>
+                    <a:p>
+                      <a:endParaRPr lang="de-DE" sz="500" dirty="0"/>
+                    </a:p>
+                  </a:txBody>
+                  <a:tcPr>
+                    <a:lnL w="12700" cap="flat" cmpd="sng" algn="ctr">
+                      <a:noFill/>
+                      <a:prstDash val="solid"/>
+                      <a:round/>
+                      <a:headEnd type="none" w="med" len="med"/>
+                      <a:tailEnd type="none" w="med" len="med"/>
+                    </a:lnL>
+                    <a:lnR w="12700" cap="flat" cmpd="sng" algn="ctr">
+                      <a:solidFill>
+                        <a:schemeClr val="tx1"/>
+                      </a:solidFill>
+                      <a:prstDash val="solid"/>
+                      <a:round/>
+                      <a:headEnd type="none" w="med" len="med"/>
+                      <a:tailEnd type="none" w="med" len="med"/>
+                    </a:lnR>
+                    <a:lnT w="12700" cap="flat" cmpd="sng" algn="ctr">
+                      <a:noFill/>
+                      <a:prstDash val="solid"/>
+                      <a:round/>
+                      <a:headEnd type="none" w="med" len="med"/>
+                      <a:tailEnd type="none" w="med" len="med"/>
+                    </a:lnT>
+                    <a:lnB w="12700" cap="flat" cmpd="sng" algn="ctr">
+                      <a:noFill/>
+                      <a:prstDash val="solid"/>
+                      <a:round/>
+                      <a:headEnd type="none" w="med" len="med"/>
+                      <a:tailEnd type="none" w="med" len="med"/>
+                    </a:lnB>
+                    <a:lnTlToBr w="12700" cmpd="sng">
+                      <a:noFill/>
+                      <a:prstDash val="solid"/>
+                    </a:lnTlToBr>
+                    <a:lnBlToTr w="12700" cmpd="sng">
+                      <a:noFill/>
+                      <a:prstDash val="solid"/>
+                    </a:lnBlToTr>
+                  </a:tcPr>
+                </a:tc>
+                <a:tc>
+                  <a:txBody>
+                    <a:bodyPr/>
+                    <a:lstStyle/>
+                    <a:p>
+                      <a:endParaRPr lang="de-DE" sz="500" dirty="0"/>
+                    </a:p>
+                  </a:txBody>
+                  <a:tcPr>
+                    <a:lnL w="12700" cap="flat" cmpd="sng" algn="ctr">
+                      <a:solidFill>
+                        <a:schemeClr val="tx1"/>
+                      </a:solidFill>
+                      <a:prstDash val="solid"/>
+                      <a:round/>
+                      <a:headEnd type="none" w="med" len="med"/>
+                      <a:tailEnd type="none" w="med" len="med"/>
+                    </a:lnL>
+                    <a:lnR w="12700" cap="flat" cmpd="sng" algn="ctr">
+                      <a:noFill/>
+                      <a:prstDash val="solid"/>
+                      <a:round/>
+                      <a:headEnd type="none" w="med" len="med"/>
+                      <a:tailEnd type="none" w="med" len="med"/>
+                    </a:lnR>
+                    <a:lnT w="12700" cap="flat" cmpd="sng" algn="ctr">
+                      <a:noFill/>
+                      <a:prstDash val="solid"/>
+                      <a:round/>
+                      <a:headEnd type="none" w="med" len="med"/>
+                      <a:tailEnd type="none" w="med" len="med"/>
+                    </a:lnT>
+                    <a:lnB w="12700" cap="flat" cmpd="sng" algn="ctr">
+                      <a:noFill/>
+                      <a:prstDash val="solid"/>
+                      <a:round/>
+                      <a:headEnd type="none" w="med" len="med"/>
+                      <a:tailEnd type="none" w="med" len="med"/>
+                    </a:lnB>
+                    <a:lnTlToBr w="12700" cmpd="sng">
+                      <a:noFill/>
+                      <a:prstDash val="solid"/>
+                    </a:lnTlToBr>
+                    <a:lnBlToTr w="12700" cmpd="sng">
+                      <a:noFill/>
+                      <a:prstDash val="solid"/>
+                    </a:lnBlToTr>
+                  </a:tcPr>
+                </a:tc>
+                <a:tc>
+                  <a:txBody>
+                    <a:bodyPr/>
+                    <a:lstStyle/>
+                    <a:p>
+                      <a:endParaRPr lang="de-DE" sz="500" dirty="0"/>
+                    </a:p>
+                  </a:txBody>
+                  <a:tcPr>
+                    <a:lnL w="12700" cap="flat" cmpd="sng" algn="ctr">
+                      <a:noFill/>
+                      <a:prstDash val="solid"/>
+                      <a:round/>
+                      <a:headEnd type="none" w="med" len="med"/>
+                      <a:tailEnd type="none" w="med" len="med"/>
+                    </a:lnL>
+                    <a:lnR w="12700" cap="flat" cmpd="sng" algn="ctr">
+                      <a:solidFill>
+                        <a:schemeClr val="tx1"/>
+                      </a:solidFill>
+                      <a:prstDash val="solid"/>
+                      <a:round/>
+                      <a:headEnd type="none" w="med" len="med"/>
+                      <a:tailEnd type="none" w="med" len="med"/>
+                    </a:lnR>
+                    <a:lnT w="12700" cap="flat" cmpd="sng" algn="ctr">
+                      <a:noFill/>
+                      <a:prstDash val="solid"/>
+                      <a:round/>
+                      <a:headEnd type="none" w="med" len="med"/>
+                      <a:tailEnd type="none" w="med" len="med"/>
+                    </a:lnT>
+                    <a:lnB w="12700" cap="flat" cmpd="sng" algn="ctr">
+                      <a:noFill/>
+                      <a:prstDash val="solid"/>
+                      <a:round/>
+                      <a:headEnd type="none" w="med" len="med"/>
+                      <a:tailEnd type="none" w="med" len="med"/>
+                    </a:lnB>
+                    <a:lnTlToBr w="12700" cmpd="sng">
+                      <a:noFill/>
+                      <a:prstDash val="solid"/>
+                    </a:lnTlToBr>
+                    <a:lnBlToTr w="12700" cmpd="sng">
+                      <a:noFill/>
+                      <a:prstDash val="solid"/>
+                    </a:lnBlToTr>
+                  </a:tcPr>
+                </a:tc>
+                <a:tc>
+                  <a:txBody>
+                    <a:bodyPr/>
+                    <a:lstStyle/>
+                    <a:p>
+                      <a:endParaRPr lang="de-DE" sz="500" dirty="0"/>
+                    </a:p>
+                  </a:txBody>
+                  <a:tcPr>
+                    <a:lnL w="12700" cap="flat" cmpd="sng" algn="ctr">
+                      <a:solidFill>
+                        <a:schemeClr val="tx1"/>
+                      </a:solidFill>
+                      <a:prstDash val="solid"/>
+                      <a:round/>
+                      <a:headEnd type="none" w="med" len="med"/>
+                      <a:tailEnd type="none" w="med" len="med"/>
+                    </a:lnL>
+                    <a:lnR w="12700" cap="flat" cmpd="sng" algn="ctr">
+                      <a:noFill/>
+                      <a:prstDash val="solid"/>
+                      <a:round/>
+                      <a:headEnd type="none" w="med" len="med"/>
+                      <a:tailEnd type="none" w="med" len="med"/>
+                    </a:lnR>
+                    <a:lnT w="12700" cap="flat" cmpd="sng" algn="ctr">
+                      <a:noFill/>
+                      <a:prstDash val="solid"/>
+                      <a:round/>
+                      <a:headEnd type="none" w="med" len="med"/>
+                      <a:tailEnd type="none" w="med" len="med"/>
+                    </a:lnT>
+                    <a:lnB w="12700" cap="flat" cmpd="sng" algn="ctr">
+                      <a:noFill/>
+                      <a:prstDash val="solid"/>
+                      <a:round/>
+                      <a:headEnd type="none" w="med" len="med"/>
+                      <a:tailEnd type="none" w="med" len="med"/>
+                    </a:lnB>
+                    <a:lnTlToBr w="12700" cmpd="sng">
+                      <a:noFill/>
+                      <a:prstDash val="solid"/>
+                    </a:lnTlToBr>
+                    <a:lnBlToTr w="12700" cmpd="sng">
+                      <a:noFill/>
+                      <a:prstDash val="solid"/>
+                    </a:lnBlToTr>
+                  </a:tcPr>
+                </a:tc>
+                <a:tc>
+                  <a:txBody>
+                    <a:bodyPr/>
+                    <a:lstStyle/>
+                    <a:p>
+                      <a:endParaRPr lang="de-DE" sz="500" dirty="0"/>
+                    </a:p>
+                  </a:txBody>
+                  <a:tcPr>
+                    <a:lnL w="12700" cap="flat" cmpd="sng" algn="ctr">
+                      <a:noFill/>
+                      <a:prstDash val="solid"/>
+                      <a:round/>
+                      <a:headEnd type="none" w="med" len="med"/>
+                      <a:tailEnd type="none" w="med" len="med"/>
+                    </a:lnL>
+                    <a:lnR w="12700" cap="flat" cmpd="sng" algn="ctr">
+                      <a:solidFill>
+                        <a:schemeClr val="tx1"/>
+                      </a:solidFill>
+                      <a:prstDash val="solid"/>
+                      <a:round/>
+                      <a:headEnd type="none" w="med" len="med"/>
+                      <a:tailEnd type="none" w="med" len="med"/>
+                    </a:lnR>
+                    <a:lnT w="12700" cap="flat" cmpd="sng" algn="ctr">
+                      <a:noFill/>
+                      <a:prstDash val="solid"/>
+                      <a:round/>
+                      <a:headEnd type="none" w="med" len="med"/>
+                      <a:tailEnd type="none" w="med" len="med"/>
+                    </a:lnT>
+                    <a:lnB w="12700" cap="flat" cmpd="sng" algn="ctr">
+                      <a:noFill/>
+                      <a:prstDash val="solid"/>
+                      <a:round/>
+                      <a:headEnd type="none" w="med" len="med"/>
+                      <a:tailEnd type="none" w="med" len="med"/>
+                    </a:lnB>
+                    <a:lnTlToBr w="12700" cmpd="sng">
+                      <a:noFill/>
+                      <a:prstDash val="solid"/>
+                    </a:lnTlToBr>
+                    <a:lnBlToTr w="12700" cmpd="sng">
+                      <a:noFill/>
+                      <a:prstDash val="solid"/>
+                    </a:lnBlToTr>
+                  </a:tcPr>
+                </a:tc>
+                <a:tc>
+                  <a:txBody>
+                    <a:bodyPr/>
+                    <a:lstStyle/>
+                    <a:p>
+                      <a:endParaRPr lang="de-DE" sz="500" dirty="0"/>
+                    </a:p>
+                  </a:txBody>
+                  <a:tcPr>
+                    <a:lnL w="12700" cap="flat" cmpd="sng" algn="ctr">
+                      <a:solidFill>
+                        <a:schemeClr val="tx1"/>
+                      </a:solidFill>
+                      <a:prstDash val="solid"/>
+                      <a:round/>
+                      <a:headEnd type="none" w="med" len="med"/>
+                      <a:tailEnd type="none" w="med" len="med"/>
+                    </a:lnL>
+                    <a:lnR w="12700" cap="flat" cmpd="sng" algn="ctr">
+                      <a:noFill/>
+                      <a:prstDash val="solid"/>
+                      <a:round/>
+                      <a:headEnd type="none" w="med" len="med"/>
+                      <a:tailEnd type="none" w="med" len="med"/>
+                    </a:lnR>
+                    <a:lnT w="12700" cap="flat" cmpd="sng" algn="ctr">
+                      <a:noFill/>
+                      <a:prstDash val="solid"/>
+                      <a:round/>
+                      <a:headEnd type="none" w="med" len="med"/>
+                      <a:tailEnd type="none" w="med" len="med"/>
+                    </a:lnT>
+                    <a:lnB w="12700" cap="flat" cmpd="sng" algn="ctr">
+                      <a:noFill/>
+                      <a:prstDash val="solid"/>
+                      <a:round/>
+                      <a:headEnd type="none" w="med" len="med"/>
+                      <a:tailEnd type="none" w="med" len="med"/>
+                    </a:lnB>
+                    <a:lnTlToBr w="12700" cmpd="sng">
+                      <a:noFill/>
+                      <a:prstDash val="solid"/>
+                    </a:lnTlToBr>
+                    <a:lnBlToTr w="12700" cmpd="sng">
+                      <a:noFill/>
+                      <a:prstDash val="solid"/>
+                    </a:lnBlToTr>
+                  </a:tcPr>
+                </a:tc>
+                <a:tc>
+                  <a:txBody>
+                    <a:bodyPr/>
+                    <a:lstStyle/>
+                    <a:p>
+                      <a:endParaRPr lang="de-DE" sz="500" dirty="0"/>
+                    </a:p>
+                  </a:txBody>
+                  <a:tcPr>
+                    <a:lnL w="12700" cap="flat" cmpd="sng" algn="ctr">
+                      <a:noFill/>
+                      <a:prstDash val="solid"/>
+                      <a:round/>
+                      <a:headEnd type="none" w="med" len="med"/>
+                      <a:tailEnd type="none" w="med" len="med"/>
+                    </a:lnL>
+                    <a:lnR w="12700" cap="flat" cmpd="sng" algn="ctr">
+                      <a:solidFill>
+                        <a:schemeClr val="tx1"/>
+                      </a:solidFill>
+                      <a:prstDash val="solid"/>
+                      <a:round/>
+                      <a:headEnd type="none" w="med" len="med"/>
+                      <a:tailEnd type="none" w="med" len="med"/>
+                    </a:lnR>
+                    <a:lnT w="12700" cap="flat" cmpd="sng" algn="ctr">
+                      <a:noFill/>
+                      <a:prstDash val="solid"/>
+                      <a:round/>
+                      <a:headEnd type="none" w="med" len="med"/>
+                      <a:tailEnd type="none" w="med" len="med"/>
+                    </a:lnT>
+                    <a:lnB w="12700" cap="flat" cmpd="sng" algn="ctr">
+                      <a:noFill/>
+                      <a:prstDash val="solid"/>
+                      <a:round/>
+                      <a:headEnd type="none" w="med" len="med"/>
+                      <a:tailEnd type="none" w="med" len="med"/>
+                    </a:lnB>
+                    <a:lnTlToBr w="12700" cmpd="sng">
+                      <a:noFill/>
+                      <a:prstDash val="solid"/>
+                    </a:lnTlToBr>
+                    <a:lnBlToTr w="12700" cmpd="sng">
+                      <a:noFill/>
+                      <a:prstDash val="solid"/>
+                    </a:lnBlToTr>
+                  </a:tcPr>
+                </a:tc>
+                <a:tc>
+                  <a:txBody>
+                    <a:bodyPr/>
+                    <a:lstStyle/>
+                    <a:p>
+                      <a:endParaRPr lang="de-DE" sz="500" dirty="0"/>
+                    </a:p>
+                  </a:txBody>
+                  <a:tcPr>
+                    <a:lnL w="12700" cap="flat" cmpd="sng" algn="ctr">
+                      <a:solidFill>
+                        <a:schemeClr val="tx1"/>
+                      </a:solidFill>
+                      <a:prstDash val="solid"/>
+                      <a:round/>
+                      <a:headEnd type="none" w="med" len="med"/>
+                      <a:tailEnd type="none" w="med" len="med"/>
+                    </a:lnL>
+                    <a:lnR w="12700" cap="flat" cmpd="sng" algn="ctr">
+                      <a:noFill/>
+                      <a:prstDash val="solid"/>
+                      <a:round/>
+                      <a:headEnd type="none" w="med" len="med"/>
+                      <a:tailEnd type="none" w="med" len="med"/>
+                    </a:lnR>
+                    <a:lnT w="12700" cap="flat" cmpd="sng" algn="ctr">
+                      <a:noFill/>
+                      <a:prstDash val="solid"/>
+                      <a:round/>
+                      <a:headEnd type="none" w="med" len="med"/>
+                      <a:tailEnd type="none" w="med" len="med"/>
+                    </a:lnT>
+                    <a:lnB w="12700" cap="flat" cmpd="sng" algn="ctr">
+                      <a:noFill/>
+                      <a:prstDash val="solid"/>
+                      <a:round/>
+                      <a:headEnd type="none" w="med" len="med"/>
+                      <a:tailEnd type="none" w="med" len="med"/>
+                    </a:lnB>
+                    <a:lnTlToBr w="12700" cmpd="sng">
+                      <a:noFill/>
+                      <a:prstDash val="solid"/>
+                    </a:lnTlToBr>
+                    <a:lnBlToTr w="12700" cmpd="sng">
+                      <a:noFill/>
+                      <a:prstDash val="solid"/>
+                    </a:lnBlToTr>
+                  </a:tcPr>
+                </a:tc>
+                <a:tc>
+                  <a:txBody>
+                    <a:bodyPr/>
+                    <a:lstStyle/>
+                    <a:p>
+                      <a:endParaRPr lang="de-DE" sz="500" dirty="0"/>
+                    </a:p>
+                  </a:txBody>
+                  <a:tcPr>
+                    <a:lnL w="12700" cap="flat" cmpd="sng" algn="ctr">
+                      <a:noFill/>
+                      <a:prstDash val="solid"/>
+                      <a:round/>
+                      <a:headEnd type="none" w="med" len="med"/>
+                      <a:tailEnd type="none" w="med" len="med"/>
+                    </a:lnL>
+                    <a:lnR w="12700" cap="flat" cmpd="sng" algn="ctr">
+                      <a:solidFill>
+                        <a:schemeClr val="tx1"/>
+                      </a:solidFill>
+                      <a:prstDash val="solid"/>
+                      <a:round/>
+                      <a:headEnd type="none" w="med" len="med"/>
+                      <a:tailEnd type="none" w="med" len="med"/>
+                    </a:lnR>
+                    <a:lnT w="12700" cap="flat" cmpd="sng" algn="ctr">
+                      <a:noFill/>
+                      <a:prstDash val="solid"/>
+                      <a:round/>
+                      <a:headEnd type="none" w="med" len="med"/>
+                      <a:tailEnd type="none" w="med" len="med"/>
+                    </a:lnT>
+                    <a:lnB w="12700" cap="flat" cmpd="sng" algn="ctr">
+                      <a:noFill/>
+                      <a:prstDash val="solid"/>
+                      <a:round/>
+                      <a:headEnd type="none" w="med" len="med"/>
+                      <a:tailEnd type="none" w="med" len="med"/>
+                    </a:lnB>
+                    <a:lnTlToBr w="12700" cmpd="sng">
+                      <a:noFill/>
+                      <a:prstDash val="solid"/>
+                    </a:lnTlToBr>
+                    <a:lnBlToTr w="12700" cmpd="sng">
+                      <a:noFill/>
+                      <a:prstDash val="solid"/>
+                    </a:lnBlToTr>
+                  </a:tcPr>
+                </a:tc>
+                <a:tc>
+                  <a:txBody>
+                    <a:bodyPr/>
+                    <a:lstStyle/>
+                    <a:p>
+                      <a:endParaRPr lang="de-DE" sz="500" dirty="0"/>
+                    </a:p>
+                  </a:txBody>
+                  <a:tcPr>
+                    <a:lnL w="12700" cap="flat" cmpd="sng" algn="ctr">
+                      <a:solidFill>
+                        <a:schemeClr val="tx1"/>
+                      </a:solidFill>
+                      <a:prstDash val="solid"/>
+                      <a:round/>
+                      <a:headEnd type="none" w="med" len="med"/>
+                      <a:tailEnd type="none" w="med" len="med"/>
+                    </a:lnL>
+                    <a:lnR w="12700" cap="flat" cmpd="sng" algn="ctr">
+                      <a:noFill/>
+                      <a:prstDash val="solid"/>
+                      <a:round/>
+                      <a:headEnd type="none" w="med" len="med"/>
+                      <a:tailEnd type="none" w="med" len="med"/>
+                    </a:lnR>
+                    <a:lnT w="12700" cap="flat" cmpd="sng" algn="ctr">
+                      <a:noFill/>
+                      <a:prstDash val="solid"/>
+                      <a:round/>
+                      <a:headEnd type="none" w="med" len="med"/>
+                      <a:tailEnd type="none" w="med" len="med"/>
+                    </a:lnT>
+                    <a:lnB w="12700" cap="flat" cmpd="sng" algn="ctr">
+                      <a:noFill/>
+                      <a:prstDash val="solid"/>
+                      <a:round/>
+                      <a:headEnd type="none" w="med" len="med"/>
+                      <a:tailEnd type="none" w="med" len="med"/>
+                    </a:lnB>
+                    <a:lnTlToBr w="12700" cmpd="sng">
+                      <a:noFill/>
+                      <a:prstDash val="solid"/>
+                    </a:lnTlToBr>
+                    <a:lnBlToTr w="12700" cmpd="sng">
+                      <a:noFill/>
+                      <a:prstDash val="solid"/>
+                    </a:lnBlToTr>
+                  </a:tcPr>
+                </a:tc>
+                <a:extLst>
+                  <a:ext uri="{0D108BD9-81ED-4DB2-BD59-A6C34878D82A}">
+                    <a16:rowId xmlns:a16="http://schemas.microsoft.com/office/drawing/2014/main" val="556338525"/>
+                  </a:ext>
+                </a:extLst>
+              </a:tr>
+              <a:tr h="370840">
+                <a:tc gridSpan="2">
+                  <a:txBody>
+                    <a:bodyPr/>
+                    <a:lstStyle/>
+                    <a:p>
+                      <a:pPr algn="ctr"/>
+                      <a:r>
+                        <a:rPr lang="de-DE" sz="2500" kern="1200" dirty="0">
+                          <a:solidFill>
+                            <a:schemeClr val="tx1"/>
+                          </a:solidFill>
+                          <a:latin typeface="Times New Roman" panose="02020603050405020304" pitchFamily="18" charset="0"/>
+                          <a:ea typeface="+mn-ea"/>
+                          <a:cs typeface="Times New Roman" panose="02020603050405020304" pitchFamily="18" charset="0"/>
+                        </a:rPr>
+                        <a:t>0</a:t>
+                      </a:r>
+                    </a:p>
+                  </a:txBody>
+                  <a:tcPr>
+                    <a:lnL w="12700" cap="flat" cmpd="sng" algn="ctr">
+                      <a:noFill/>
+                      <a:prstDash val="solid"/>
+                      <a:round/>
+                      <a:headEnd type="none" w="med" len="med"/>
+                      <a:tailEnd type="none" w="med" len="med"/>
+                    </a:lnL>
+                    <a:lnR w="12700" cap="flat" cmpd="sng" algn="ctr">
+                      <a:noFill/>
+                      <a:prstDash val="solid"/>
+                      <a:round/>
+                      <a:headEnd type="none" w="med" len="med"/>
+                      <a:tailEnd type="none" w="med" len="med"/>
+                    </a:lnR>
+                    <a:lnT w="12700" cap="flat" cmpd="sng" algn="ctr">
+                      <a:noFill/>
+                      <a:prstDash val="solid"/>
+                      <a:round/>
+                      <a:headEnd type="none" w="med" len="med"/>
+                      <a:tailEnd type="none" w="med" len="med"/>
+                    </a:lnT>
+                    <a:lnB w="12700" cap="flat" cmpd="sng" algn="ctr">
+                      <a:noFill/>
+                      <a:prstDash val="solid"/>
+                      <a:round/>
+                      <a:headEnd type="none" w="med" len="med"/>
+                      <a:tailEnd type="none" w="med" len="med"/>
+                    </a:lnB>
+                    <a:lnTlToBr w="12700" cmpd="sng">
+                      <a:noFill/>
+                      <a:prstDash val="solid"/>
+                    </a:lnTlToBr>
+                    <a:lnBlToTr w="12700" cmpd="sng">
+                      <a:noFill/>
+                      <a:prstDash val="solid"/>
+                    </a:lnBlToTr>
+                  </a:tcPr>
+                </a:tc>
+                <a:tc hMerge="1">
+                  <a:txBody>
+                    <a:bodyPr/>
+                    <a:lstStyle/>
+                    <a:p>
+                      <a:endParaRPr lang="de-DE" dirty="0"/>
+                    </a:p>
+                  </a:txBody>
+                  <a:tcPr>
+                    <a:lnL w="12700" cap="flat" cmpd="sng" algn="ctr">
+                      <a:solidFill>
+                        <a:schemeClr val="tx1"/>
+                      </a:solidFill>
+                      <a:prstDash val="solid"/>
+                      <a:round/>
+                      <a:headEnd type="none" w="med" len="med"/>
+                      <a:tailEnd type="none" w="med" len="med"/>
+                    </a:lnL>
+                    <a:lnR w="12700" cap="flat" cmpd="sng" algn="ctr">
+                      <a:solidFill>
+                        <a:schemeClr val="tx1"/>
+                      </a:solidFill>
+                      <a:prstDash val="solid"/>
+                      <a:round/>
+                      <a:headEnd type="none" w="med" len="med"/>
+                      <a:tailEnd type="none" w="med" len="med"/>
+                    </a:lnR>
+                    <a:lnT w="12700" cap="flat" cmpd="sng" algn="ctr">
+                      <a:solidFill>
+                        <a:schemeClr val="tx1"/>
+                      </a:solidFill>
+                      <a:prstDash val="solid"/>
+                      <a:round/>
+                      <a:headEnd type="none" w="med" len="med"/>
+                      <a:tailEnd type="none" w="med" len="med"/>
+                    </a:lnT>
+                    <a:lnB w="12700" cap="flat" cmpd="sng" algn="ctr">
+                      <a:solidFill>
+                        <a:schemeClr val="tx1"/>
+                      </a:solidFill>
+                      <a:prstDash val="solid"/>
+                      <a:round/>
+                      <a:headEnd type="none" w="med" len="med"/>
+                      <a:tailEnd type="none" w="med" len="med"/>
+                    </a:lnB>
+                    <a:lnTlToBr w="12700" cmpd="sng">
+                      <a:noFill/>
+                      <a:prstDash val="solid"/>
+                    </a:lnTlToBr>
+                    <a:lnBlToTr w="12700" cmpd="sng">
+                      <a:noFill/>
+                      <a:prstDash val="solid"/>
+                    </a:lnBlToTr>
+                  </a:tcPr>
+                </a:tc>
+                <a:tc gridSpan="2">
+                  <a:txBody>
+                    <a:bodyPr/>
+                    <a:lstStyle/>
+                    <a:p>
+                      <a:pPr algn="ctr"/>
+                      <a:r>
+                        <a:rPr lang="de-DE" sz="2500" kern="1200" dirty="0">
+                          <a:solidFill>
+                            <a:schemeClr val="tx1"/>
+                          </a:solidFill>
+                          <a:latin typeface="Times New Roman" panose="02020603050405020304" pitchFamily="18" charset="0"/>
+                          <a:ea typeface="+mn-ea"/>
+                          <a:cs typeface="Times New Roman" panose="02020603050405020304" pitchFamily="18" charset="0"/>
+                        </a:rPr>
+                        <a:t>20</a:t>
+                      </a:r>
+                    </a:p>
+                  </a:txBody>
+                  <a:tcPr>
+                    <a:lnL w="12700" cap="flat" cmpd="sng" algn="ctr">
+                      <a:noFill/>
+                      <a:prstDash val="solid"/>
+                      <a:round/>
+                      <a:headEnd type="none" w="med" len="med"/>
+                      <a:tailEnd type="none" w="med" len="med"/>
+                    </a:lnL>
+                    <a:lnR w="12700" cap="flat" cmpd="sng" algn="ctr">
+                      <a:noFill/>
+                      <a:prstDash val="solid"/>
+                      <a:round/>
+                      <a:headEnd type="none" w="med" len="med"/>
+                      <a:tailEnd type="none" w="med" len="med"/>
+                    </a:lnR>
+                    <a:lnT w="12700" cap="flat" cmpd="sng" algn="ctr">
+                      <a:noFill/>
+                      <a:prstDash val="solid"/>
+                      <a:round/>
+                      <a:headEnd type="none" w="med" len="med"/>
+                      <a:tailEnd type="none" w="med" len="med"/>
+                    </a:lnT>
+                    <a:lnB w="12700" cap="flat" cmpd="sng" algn="ctr">
+                      <a:noFill/>
+                      <a:prstDash val="solid"/>
+                      <a:round/>
+                      <a:headEnd type="none" w="med" len="med"/>
+                      <a:tailEnd type="none" w="med" len="med"/>
+                    </a:lnB>
+                    <a:lnTlToBr w="12700" cmpd="sng">
+                      <a:noFill/>
+                      <a:prstDash val="solid"/>
+                    </a:lnTlToBr>
+                    <a:lnBlToTr w="12700" cmpd="sng">
+                      <a:noFill/>
+                      <a:prstDash val="solid"/>
+                    </a:lnBlToTr>
+                  </a:tcPr>
+                </a:tc>
+                <a:tc hMerge="1">
+                  <a:txBody>
+                    <a:bodyPr/>
+                    <a:lstStyle/>
+                    <a:p>
+                      <a:endParaRPr lang="de-DE" dirty="0"/>
+                    </a:p>
+                  </a:txBody>
+                  <a:tcPr>
+                    <a:lnL w="12700" cap="flat" cmpd="sng" algn="ctr">
+                      <a:solidFill>
+                        <a:schemeClr val="tx1"/>
+                      </a:solidFill>
+                      <a:prstDash val="solid"/>
+                      <a:round/>
+                      <a:headEnd type="none" w="med" len="med"/>
+                      <a:tailEnd type="none" w="med" len="med"/>
+                    </a:lnL>
+                    <a:lnR w="12700" cap="flat" cmpd="sng" algn="ctr">
+                      <a:solidFill>
+                        <a:schemeClr val="tx1"/>
+                      </a:solidFill>
+                      <a:prstDash val="solid"/>
+                      <a:round/>
+                      <a:headEnd type="none" w="med" len="med"/>
+                      <a:tailEnd type="none" w="med" len="med"/>
+                    </a:lnR>
+                    <a:lnT w="12700" cap="flat" cmpd="sng" algn="ctr">
+                      <a:solidFill>
+                        <a:schemeClr val="tx1"/>
+                      </a:solidFill>
+                      <a:prstDash val="solid"/>
+                      <a:round/>
+                      <a:headEnd type="none" w="med" len="med"/>
+                      <a:tailEnd type="none" w="med" len="med"/>
+                    </a:lnT>
+                    <a:lnB w="12700" cap="flat" cmpd="sng" algn="ctr">
+                      <a:solidFill>
+                        <a:schemeClr val="tx1"/>
+                      </a:solidFill>
+                      <a:prstDash val="solid"/>
+                      <a:round/>
+                      <a:headEnd type="none" w="med" len="med"/>
+                      <a:tailEnd type="none" w="med" len="med"/>
+                    </a:lnB>
+                    <a:lnTlToBr w="12700" cmpd="sng">
+                      <a:noFill/>
+                      <a:prstDash val="solid"/>
+                    </a:lnTlToBr>
+                    <a:lnBlToTr w="12700" cmpd="sng">
+                      <a:noFill/>
+                      <a:prstDash val="solid"/>
+                    </a:lnBlToTr>
+                  </a:tcPr>
+                </a:tc>
+                <a:tc gridSpan="2">
+                  <a:txBody>
+                    <a:bodyPr/>
+                    <a:lstStyle/>
+                    <a:p>
+                      <a:pPr algn="ctr"/>
+                      <a:r>
+                        <a:rPr lang="de-DE" sz="2500" kern="1200" dirty="0">
+                          <a:solidFill>
+                            <a:schemeClr val="tx1"/>
+                          </a:solidFill>
+                          <a:latin typeface="Times New Roman" panose="02020603050405020304" pitchFamily="18" charset="0"/>
+                          <a:ea typeface="+mn-ea"/>
+                          <a:cs typeface="Times New Roman" panose="02020603050405020304" pitchFamily="18" charset="0"/>
+                        </a:rPr>
+                        <a:t>40</a:t>
+                      </a:r>
+                    </a:p>
+                  </a:txBody>
+                  <a:tcPr>
+                    <a:lnL w="12700" cap="flat" cmpd="sng" algn="ctr">
+                      <a:noFill/>
+                      <a:prstDash val="solid"/>
+                      <a:round/>
+                      <a:headEnd type="none" w="med" len="med"/>
+                      <a:tailEnd type="none" w="med" len="med"/>
+                    </a:lnL>
+                    <a:lnR w="12700" cap="flat" cmpd="sng" algn="ctr">
+                      <a:noFill/>
+                      <a:prstDash val="solid"/>
+                      <a:round/>
+                      <a:headEnd type="none" w="med" len="med"/>
+                      <a:tailEnd type="none" w="med" len="med"/>
+                    </a:lnR>
+                    <a:lnT w="12700" cap="flat" cmpd="sng" algn="ctr">
+                      <a:noFill/>
+                      <a:prstDash val="solid"/>
+                      <a:round/>
+                      <a:headEnd type="none" w="med" len="med"/>
+                      <a:tailEnd type="none" w="med" len="med"/>
+                    </a:lnT>
+                    <a:lnB w="12700" cap="flat" cmpd="sng" algn="ctr">
+                      <a:noFill/>
+                      <a:prstDash val="solid"/>
+                      <a:round/>
+                      <a:headEnd type="none" w="med" len="med"/>
+                      <a:tailEnd type="none" w="med" len="med"/>
+                    </a:lnB>
+                    <a:lnTlToBr w="12700" cmpd="sng">
+                      <a:noFill/>
+                      <a:prstDash val="solid"/>
+                    </a:lnTlToBr>
+                    <a:lnBlToTr w="12700" cmpd="sng">
+                      <a:noFill/>
+                      <a:prstDash val="solid"/>
+                    </a:lnBlToTr>
+                  </a:tcPr>
+                </a:tc>
+                <a:tc hMerge="1">
+                  <a:txBody>
+                    <a:bodyPr/>
+                    <a:lstStyle/>
+                    <a:p>
+                      <a:endParaRPr lang="de-DE" dirty="0"/>
+                    </a:p>
+                  </a:txBody>
+                  <a:tcPr>
+                    <a:lnL w="12700" cap="flat" cmpd="sng" algn="ctr">
+                      <a:solidFill>
+                        <a:schemeClr val="tx1"/>
+                      </a:solidFill>
+                      <a:prstDash val="solid"/>
+                      <a:round/>
+                      <a:headEnd type="none" w="med" len="med"/>
+                      <a:tailEnd type="none" w="med" len="med"/>
+                    </a:lnL>
+                    <a:lnR w="12700" cap="flat" cmpd="sng" algn="ctr">
+                      <a:solidFill>
+                        <a:schemeClr val="tx1"/>
+                      </a:solidFill>
+                      <a:prstDash val="solid"/>
+                      <a:round/>
+                      <a:headEnd type="none" w="med" len="med"/>
+                      <a:tailEnd type="none" w="med" len="med"/>
+                    </a:lnR>
+                    <a:lnT w="12700" cap="flat" cmpd="sng" algn="ctr">
+                      <a:solidFill>
+                        <a:schemeClr val="tx1"/>
+                      </a:solidFill>
+                      <a:prstDash val="solid"/>
+                      <a:round/>
+                      <a:headEnd type="none" w="med" len="med"/>
+                      <a:tailEnd type="none" w="med" len="med"/>
+                    </a:lnT>
+                    <a:lnB w="12700" cap="flat" cmpd="sng" algn="ctr">
+                      <a:solidFill>
+                        <a:schemeClr val="tx1"/>
+                      </a:solidFill>
+                      <a:prstDash val="solid"/>
+                      <a:round/>
+                      <a:headEnd type="none" w="med" len="med"/>
+                      <a:tailEnd type="none" w="med" len="med"/>
+                    </a:lnB>
+                    <a:lnTlToBr w="12700" cmpd="sng">
+                      <a:noFill/>
+                      <a:prstDash val="solid"/>
+                    </a:lnTlToBr>
+                    <a:lnBlToTr w="12700" cmpd="sng">
+                      <a:noFill/>
+                      <a:prstDash val="solid"/>
+                    </a:lnBlToTr>
+                  </a:tcPr>
+                </a:tc>
+                <a:tc gridSpan="2">
+                  <a:txBody>
+                    <a:bodyPr/>
+                    <a:lstStyle/>
+                    <a:p>
+                      <a:pPr algn="ctr"/>
+                      <a:r>
+                        <a:rPr lang="de-DE" sz="2500" kern="1200" dirty="0">
+                          <a:solidFill>
+                            <a:schemeClr val="tx1"/>
+                          </a:solidFill>
+                          <a:latin typeface="Times New Roman" panose="02020603050405020304" pitchFamily="18" charset="0"/>
+                          <a:ea typeface="+mn-ea"/>
+                          <a:cs typeface="Times New Roman" panose="02020603050405020304" pitchFamily="18" charset="0"/>
+                        </a:rPr>
+                        <a:t>60</a:t>
+                      </a:r>
+                    </a:p>
+                  </a:txBody>
+                  <a:tcPr>
+                    <a:lnL w="12700" cap="flat" cmpd="sng" algn="ctr">
+                      <a:noFill/>
+                      <a:prstDash val="solid"/>
+                      <a:round/>
+                      <a:headEnd type="none" w="med" len="med"/>
+                      <a:tailEnd type="none" w="med" len="med"/>
+                    </a:lnL>
+                    <a:lnR w="12700" cap="flat" cmpd="sng" algn="ctr">
+                      <a:noFill/>
+                      <a:prstDash val="solid"/>
+                      <a:round/>
+                      <a:headEnd type="none" w="med" len="med"/>
+                      <a:tailEnd type="none" w="med" len="med"/>
+                    </a:lnR>
+                    <a:lnT w="12700" cap="flat" cmpd="sng" algn="ctr">
+                      <a:noFill/>
+                      <a:prstDash val="solid"/>
+                      <a:round/>
+                      <a:headEnd type="none" w="med" len="med"/>
+                      <a:tailEnd type="none" w="med" len="med"/>
+                    </a:lnT>
+                    <a:lnB w="12700" cap="flat" cmpd="sng" algn="ctr">
+                      <a:noFill/>
+                      <a:prstDash val="solid"/>
+                      <a:round/>
+                      <a:headEnd type="none" w="med" len="med"/>
+                      <a:tailEnd type="none" w="med" len="med"/>
+                    </a:lnB>
+                    <a:lnTlToBr w="12700" cmpd="sng">
+                      <a:noFill/>
+                      <a:prstDash val="solid"/>
+                    </a:lnTlToBr>
+                    <a:lnBlToTr w="12700" cmpd="sng">
+                      <a:noFill/>
+                      <a:prstDash val="solid"/>
+                    </a:lnBlToTr>
+                  </a:tcPr>
+                </a:tc>
+                <a:tc hMerge="1">
+                  <a:txBody>
+                    <a:bodyPr/>
+                    <a:lstStyle/>
+                    <a:p>
+                      <a:endParaRPr lang="de-DE" dirty="0"/>
+                    </a:p>
+                  </a:txBody>
+                  <a:tcPr>
+                    <a:lnL w="12700" cap="flat" cmpd="sng" algn="ctr">
+                      <a:solidFill>
+                        <a:schemeClr val="tx1"/>
+                      </a:solidFill>
+                      <a:prstDash val="solid"/>
+                      <a:round/>
+                      <a:headEnd type="none" w="med" len="med"/>
+                      <a:tailEnd type="none" w="med" len="med"/>
+                    </a:lnL>
+                    <a:lnR w="12700" cap="flat" cmpd="sng" algn="ctr">
+                      <a:solidFill>
+                        <a:schemeClr val="tx1"/>
+                      </a:solidFill>
+                      <a:prstDash val="solid"/>
+                      <a:round/>
+                      <a:headEnd type="none" w="med" len="med"/>
+                      <a:tailEnd type="none" w="med" len="med"/>
+                    </a:lnR>
+                    <a:lnT w="12700" cap="flat" cmpd="sng" algn="ctr">
+                      <a:solidFill>
+                        <a:schemeClr val="tx1"/>
+                      </a:solidFill>
+                      <a:prstDash val="solid"/>
+                      <a:round/>
+                      <a:headEnd type="none" w="med" len="med"/>
+                      <a:tailEnd type="none" w="med" len="med"/>
+                    </a:lnT>
+                    <a:lnB w="12700" cap="flat" cmpd="sng" algn="ctr">
+                      <a:solidFill>
+                        <a:schemeClr val="tx1"/>
+                      </a:solidFill>
+                      <a:prstDash val="solid"/>
+                      <a:round/>
+                      <a:headEnd type="none" w="med" len="med"/>
+                      <a:tailEnd type="none" w="med" len="med"/>
+                    </a:lnB>
+                    <a:lnTlToBr w="12700" cmpd="sng">
+                      <a:noFill/>
+                      <a:prstDash val="solid"/>
+                    </a:lnTlToBr>
+                    <a:lnBlToTr w="12700" cmpd="sng">
+                      <a:noFill/>
+                      <a:prstDash val="solid"/>
+                    </a:lnBlToTr>
+                  </a:tcPr>
+                </a:tc>
+                <a:tc gridSpan="2">
+                  <a:txBody>
+                    <a:bodyPr/>
+                    <a:lstStyle/>
+                    <a:p>
+                      <a:pPr algn="ctr"/>
+                      <a:r>
+                        <a:rPr lang="de-DE" sz="2500" kern="1200" dirty="0">
+                          <a:solidFill>
+                            <a:schemeClr val="tx1"/>
+                          </a:solidFill>
+                          <a:latin typeface="Times New Roman" panose="02020603050405020304" pitchFamily="18" charset="0"/>
+                          <a:ea typeface="+mn-ea"/>
+                          <a:cs typeface="Times New Roman" panose="02020603050405020304" pitchFamily="18" charset="0"/>
+                        </a:rPr>
+                        <a:t>80</a:t>
+                      </a:r>
+                    </a:p>
+                  </a:txBody>
+                  <a:tcPr>
+                    <a:lnL w="12700" cap="flat" cmpd="sng" algn="ctr">
+                      <a:noFill/>
+                      <a:prstDash val="solid"/>
+                      <a:round/>
+                      <a:headEnd type="none" w="med" len="med"/>
+                      <a:tailEnd type="none" w="med" len="med"/>
+                    </a:lnL>
+                    <a:lnR w="12700" cap="flat" cmpd="sng" algn="ctr">
+                      <a:noFill/>
+                      <a:prstDash val="solid"/>
+                      <a:round/>
+                      <a:headEnd type="none" w="med" len="med"/>
+                      <a:tailEnd type="none" w="med" len="med"/>
+                    </a:lnR>
+                    <a:lnT w="12700" cap="flat" cmpd="sng" algn="ctr">
+                      <a:noFill/>
+                      <a:prstDash val="solid"/>
+                      <a:round/>
+                      <a:headEnd type="none" w="med" len="med"/>
+                      <a:tailEnd type="none" w="med" len="med"/>
+                    </a:lnT>
+                    <a:lnB w="12700" cap="flat" cmpd="sng" algn="ctr">
+                      <a:noFill/>
+                      <a:prstDash val="solid"/>
+                      <a:round/>
+                      <a:headEnd type="none" w="med" len="med"/>
+                      <a:tailEnd type="none" w="med" len="med"/>
+                    </a:lnB>
+                    <a:lnTlToBr w="12700" cmpd="sng">
+                      <a:noFill/>
+                      <a:prstDash val="solid"/>
+                    </a:lnTlToBr>
+                    <a:lnBlToTr w="12700" cmpd="sng">
+                      <a:noFill/>
+                      <a:prstDash val="solid"/>
+                    </a:lnBlToTr>
+                  </a:tcPr>
+                </a:tc>
+                <a:tc hMerge="1">
+                  <a:txBody>
+                    <a:bodyPr/>
+                    <a:lstStyle/>
+                    <a:p>
+                      <a:endParaRPr lang="de-DE" dirty="0"/>
+                    </a:p>
+                  </a:txBody>
+                  <a:tcPr>
+                    <a:lnL w="12700" cap="flat" cmpd="sng" algn="ctr">
+                      <a:solidFill>
+                        <a:schemeClr val="tx1"/>
+                      </a:solidFill>
+                      <a:prstDash val="solid"/>
+                      <a:round/>
+                      <a:headEnd type="none" w="med" len="med"/>
+                      <a:tailEnd type="none" w="med" len="med"/>
+                    </a:lnL>
+                    <a:lnR w="12700" cap="flat" cmpd="sng" algn="ctr">
+                      <a:solidFill>
+                        <a:schemeClr val="tx1"/>
+                      </a:solidFill>
+                      <a:prstDash val="solid"/>
+                      <a:round/>
+                      <a:headEnd type="none" w="med" len="med"/>
+                      <a:tailEnd type="none" w="med" len="med"/>
+                    </a:lnR>
+                    <a:lnT w="12700" cap="flat" cmpd="sng" algn="ctr">
+                      <a:solidFill>
+                        <a:schemeClr val="tx1"/>
+                      </a:solidFill>
+                      <a:prstDash val="solid"/>
+                      <a:round/>
+                      <a:headEnd type="none" w="med" len="med"/>
+                      <a:tailEnd type="none" w="med" len="med"/>
+                    </a:lnT>
+                    <a:lnB w="12700" cap="flat" cmpd="sng" algn="ctr">
+                      <a:solidFill>
+                        <a:schemeClr val="tx1"/>
+                      </a:solidFill>
+                      <a:prstDash val="solid"/>
+                      <a:round/>
+                      <a:headEnd type="none" w="med" len="med"/>
+                      <a:tailEnd type="none" w="med" len="med"/>
+                    </a:lnB>
+                    <a:lnTlToBr w="12700" cmpd="sng">
+                      <a:noFill/>
+                      <a:prstDash val="solid"/>
+                    </a:lnTlToBr>
+                    <a:lnBlToTr w="12700" cmpd="sng">
+                      <a:noFill/>
+                      <a:prstDash val="solid"/>
+                    </a:lnBlToTr>
+                  </a:tcPr>
+                </a:tc>
+                <a:tc gridSpan="2">
+                  <a:txBody>
+                    <a:bodyPr/>
+                    <a:lstStyle/>
+                    <a:p>
+                      <a:pPr algn="ctr"/>
+                      <a:r>
+                        <a:rPr lang="de-DE" sz="2500" kern="1200" dirty="0">
+                          <a:solidFill>
+                            <a:schemeClr val="tx1"/>
+                          </a:solidFill>
+                          <a:latin typeface="Times New Roman" panose="02020603050405020304" pitchFamily="18" charset="0"/>
+                          <a:ea typeface="+mn-ea"/>
+                          <a:cs typeface="Times New Roman" panose="02020603050405020304" pitchFamily="18" charset="0"/>
+                        </a:rPr>
+                        <a:t>100</a:t>
+                      </a:r>
+                    </a:p>
+                  </a:txBody>
+                  <a:tcPr>
+                    <a:lnL w="12700" cap="flat" cmpd="sng" algn="ctr">
+                      <a:noFill/>
+                      <a:prstDash val="solid"/>
+                      <a:round/>
+                      <a:headEnd type="none" w="med" len="med"/>
+                      <a:tailEnd type="none" w="med" len="med"/>
+                    </a:lnL>
+                    <a:lnR w="12700" cap="flat" cmpd="sng" algn="ctr">
+                      <a:noFill/>
+                      <a:prstDash val="solid"/>
+                      <a:round/>
+                      <a:headEnd type="none" w="med" len="med"/>
+                      <a:tailEnd type="none" w="med" len="med"/>
+                    </a:lnR>
+                    <a:lnT w="12700" cap="flat" cmpd="sng" algn="ctr">
+                      <a:noFill/>
+                      <a:prstDash val="solid"/>
+                      <a:round/>
+                      <a:headEnd type="none" w="med" len="med"/>
+                      <a:tailEnd type="none" w="med" len="med"/>
+                    </a:lnT>
+                    <a:lnB w="12700" cap="flat" cmpd="sng" algn="ctr">
+                      <a:noFill/>
+                      <a:prstDash val="solid"/>
+                      <a:round/>
+                      <a:headEnd type="none" w="med" len="med"/>
+                      <a:tailEnd type="none" w="med" len="med"/>
+                    </a:lnB>
+                    <a:lnTlToBr w="12700" cmpd="sng">
+                      <a:noFill/>
+                      <a:prstDash val="solid"/>
+                    </a:lnTlToBr>
+                    <a:lnBlToTr w="12700" cmpd="sng">
+                      <a:noFill/>
+                      <a:prstDash val="solid"/>
+                    </a:lnBlToTr>
+                  </a:tcPr>
+                </a:tc>
+                <a:tc hMerge="1">
+                  <a:txBody>
+                    <a:bodyPr/>
+                    <a:lstStyle/>
+                    <a:p>
+                      <a:endParaRPr lang="de-DE" dirty="0"/>
+                    </a:p>
+                  </a:txBody>
+                  <a:tcPr>
+                    <a:lnL w="12700" cap="flat" cmpd="sng" algn="ctr">
+                      <a:solidFill>
+                        <a:schemeClr val="tx1"/>
+                      </a:solidFill>
+                      <a:prstDash val="solid"/>
+                      <a:round/>
+                      <a:headEnd type="none" w="med" len="med"/>
+                      <a:tailEnd type="none" w="med" len="med"/>
+                    </a:lnL>
+                    <a:lnR w="12700" cap="flat" cmpd="sng" algn="ctr">
+                      <a:solidFill>
+                        <a:schemeClr val="tx1"/>
+                      </a:solidFill>
+                      <a:prstDash val="solid"/>
+                      <a:round/>
+                      <a:headEnd type="none" w="med" len="med"/>
+                      <a:tailEnd type="none" w="med" len="med"/>
+                    </a:lnR>
+                    <a:lnT w="12700" cap="flat" cmpd="sng" algn="ctr">
+                      <a:solidFill>
+                        <a:schemeClr val="tx1"/>
+                      </a:solidFill>
+                      <a:prstDash val="solid"/>
+                      <a:round/>
+                      <a:headEnd type="none" w="med" len="med"/>
+                      <a:tailEnd type="none" w="med" len="med"/>
+                    </a:lnT>
+                    <a:lnB w="12700" cap="flat" cmpd="sng" algn="ctr">
+                      <a:solidFill>
+                        <a:schemeClr val="tx1"/>
+                      </a:solidFill>
+                      <a:prstDash val="solid"/>
+                      <a:round/>
+                      <a:headEnd type="none" w="med" len="med"/>
+                      <a:tailEnd type="none" w="med" len="med"/>
+                    </a:lnB>
+                    <a:lnTlToBr w="12700" cmpd="sng">
+                      <a:noFill/>
+                      <a:prstDash val="solid"/>
+                    </a:lnTlToBr>
+                    <a:lnBlToTr w="12700" cmpd="sng">
+                      <a:noFill/>
+                      <a:prstDash val="solid"/>
+                    </a:lnBlToTr>
+                  </a:tcPr>
+                </a:tc>
+                <a:extLst>
+                  <a:ext uri="{0D108BD9-81ED-4DB2-BD59-A6C34878D82A}">
+                    <a16:rowId xmlns:a16="http://schemas.microsoft.com/office/drawing/2014/main" val="3568978587"/>
+                  </a:ext>
+                </a:extLst>
+              </a:tr>
+            </a:tbl>
+          </a:graphicData>
+        </a:graphic>
+      </p:graphicFrame>
+      <p:sp>
+        <p:nvSpPr>
+          <p:cNvPr id="22" name="Rechteck 21">
+            <a:extLst>
+              <a:ext uri="{FF2B5EF4-FFF2-40B4-BE49-F238E27FC236}">
+                <a16:creationId xmlns:a16="http://schemas.microsoft.com/office/drawing/2014/main" id="{297FB0F3-01E6-A149-5C15-2E91A16D2A9F}"/>
+              </a:ext>
+            </a:extLst>
+          </p:cNvPr>
+          <p:cNvSpPr/>
+          <p:nvPr/>
+        </p:nvSpPr>
+        <p:spPr>
+          <a:xfrm>
+            <a:off x="111270" y="5544466"/>
+            <a:ext cx="9360746" cy="350972"/>
+          </a:xfrm>
+          <a:prstGeom prst="rect">
+            <a:avLst/>
+          </a:prstGeom>
+          <a:gradFill>
+            <a:gsLst>
+              <a:gs pos="50000">
+                <a:srgbClr val="FFF201"/>
+              </a:gs>
+              <a:gs pos="85000">
+                <a:srgbClr val="FF4593"/>
+              </a:gs>
+              <a:gs pos="70000">
+                <a:srgbClr val="FF9433"/>
+              </a:gs>
+              <a:gs pos="60000">
+                <a:srgbClr val="FFC210"/>
+              </a:gs>
+              <a:gs pos="40000">
+                <a:srgbClr val="D9FF06"/>
+              </a:gs>
+              <a:gs pos="20000">
+                <a:srgbClr val="7BFF4C"/>
+              </a:gs>
+              <a:gs pos="10000">
+                <a:srgbClr val="45FF93"/>
+              </a:gs>
+              <a:gs pos="30000">
+                <a:srgbClr val="ABFF1F"/>
+              </a:gs>
+              <a:gs pos="0">
+                <a:srgbClr val="00FFFF"/>
+              </a:gs>
+              <a:gs pos="95000">
+                <a:srgbClr val="FF00FF"/>
+              </a:gs>
+            </a:gsLst>
+            <a:lin ang="0" scaled="0"/>
+          </a:gradFill>
+          <a:ln>
+            <a:noFill/>
+          </a:ln>
+        </p:spPr>
+        <p:style>
+          <a:lnRef idx="2">
+            <a:schemeClr val="accent1">
+              <a:shade val="15000"/>
+            </a:schemeClr>
+          </a:lnRef>
+          <a:fillRef idx="1">
+            <a:schemeClr val="accent1"/>
+          </a:fillRef>
+          <a:effectRef idx="0">
+            <a:schemeClr val="accent1"/>
+          </a:effectRef>
+          <a:fontRef idx="minor">
+            <a:schemeClr val="lt1"/>
+          </a:fontRef>
+        </p:style>
+        <p:txBody>
+          <a:bodyPr rtlCol="0" anchor="ctr"/>
+          <a:lstStyle/>
+          <a:p>
+            <a:pPr algn="ctr"/>
+            <a:endParaRPr lang="de-DE"/>
+          </a:p>
+        </p:txBody>
+      </p:sp>
+      <p:sp>
+        <p:nvSpPr>
+          <p:cNvPr id="30" name="Textfeld 29">
+            <a:extLst>
+              <a:ext uri="{FF2B5EF4-FFF2-40B4-BE49-F238E27FC236}">
+                <a16:creationId xmlns:a16="http://schemas.microsoft.com/office/drawing/2014/main" id="{52BF42C4-2EED-B4B3-30B6-3F53A5BCEDC4}"/>
+              </a:ext>
+            </a:extLst>
+          </p:cNvPr>
+          <p:cNvSpPr txBox="1"/>
+          <p:nvPr/>
+        </p:nvSpPr>
+        <p:spPr>
+          <a:xfrm>
+            <a:off x="9840642" y="6036712"/>
+            <a:ext cx="1091514" cy="477054"/>
+          </a:xfrm>
+          <a:prstGeom prst="rect">
+            <a:avLst/>
+          </a:prstGeom>
+          <a:noFill/>
+        </p:spPr>
+        <p:txBody>
+          <a:bodyPr wrap="square">
+            <a:spAutoFit/>
+          </a:bodyPr>
+          <a:lstStyle/>
+          <a:p>
+            <a:pPr algn="ctr"/>
+            <a:r>
+              <a:rPr lang="de-DE" sz="2500" kern="1200" dirty="0">
+                <a:solidFill>
+                  <a:schemeClr val="tx1"/>
+                </a:solidFill>
+                <a:latin typeface="Times New Roman" panose="02020603050405020304" pitchFamily="18" charset="0"/>
+                <a:ea typeface="+mn-ea"/>
+                <a:cs typeface="Times New Roman" panose="02020603050405020304" pitchFamily="18" charset="0"/>
+              </a:rPr>
+              <a:t>B[</a:t>
+            </a:r>
+            <a:r>
+              <a:rPr lang="de-DE" sz="2500" kern="1200" dirty="0" err="1">
+                <a:solidFill>
+                  <a:schemeClr val="tx1"/>
+                </a:solidFill>
+                <a:latin typeface="Times New Roman" panose="02020603050405020304" pitchFamily="18" charset="0"/>
+                <a:ea typeface="+mn-ea"/>
+                <a:cs typeface="Times New Roman" panose="02020603050405020304" pitchFamily="18" charset="0"/>
+              </a:rPr>
+              <a:t>mT</a:t>
+            </a:r>
+            <a:r>
+              <a:rPr lang="de-DE" sz="2500" kern="1200" dirty="0">
+                <a:solidFill>
+                  <a:schemeClr val="tx1"/>
+                </a:solidFill>
+                <a:latin typeface="Times New Roman" panose="02020603050405020304" pitchFamily="18" charset="0"/>
+                <a:ea typeface="+mn-ea"/>
+                <a:cs typeface="Times New Roman" panose="02020603050405020304" pitchFamily="18" charset="0"/>
+              </a:rPr>
+              <a:t>]</a:t>
+            </a:r>
+          </a:p>
+        </p:txBody>
+      </p:sp>
+      <p:sp>
+        <p:nvSpPr>
+          <p:cNvPr id="9" name="Rechteck 8">
+            <a:extLst>
+              <a:ext uri="{FF2B5EF4-FFF2-40B4-BE49-F238E27FC236}">
+                <a16:creationId xmlns:a16="http://schemas.microsoft.com/office/drawing/2014/main" id="{EC316A26-0523-0945-9A40-972BDF689013}"/>
+              </a:ext>
+            </a:extLst>
+          </p:cNvPr>
+          <p:cNvSpPr/>
+          <p:nvPr/>
+        </p:nvSpPr>
+        <p:spPr>
+          <a:xfrm>
+            <a:off x="9472016" y="5544466"/>
+            <a:ext cx="1316582" cy="350972"/>
+          </a:xfrm>
+          <a:prstGeom prst="rect">
+            <a:avLst/>
+          </a:prstGeom>
+          <a:solidFill>
+            <a:srgbClr val="FF00FF"/>
+          </a:solidFill>
+          <a:ln>
+            <a:noFill/>
+          </a:ln>
+        </p:spPr>
+        <p:style>
+          <a:lnRef idx="2">
+            <a:schemeClr val="accent1">
+              <a:shade val="15000"/>
+            </a:schemeClr>
+          </a:lnRef>
+          <a:fillRef idx="1">
+            <a:schemeClr val="accent1"/>
+          </a:fillRef>
+          <a:effectRef idx="0">
+            <a:schemeClr val="accent1"/>
+          </a:effectRef>
+          <a:fontRef idx="minor">
+            <a:schemeClr val="lt1"/>
+          </a:fontRef>
+        </p:style>
+        <p:txBody>
+          <a:bodyPr rtlCol="0" anchor="ctr"/>
+          <a:lstStyle/>
+          <a:p>
+            <a:pPr algn="ctr"/>
+            <a:endParaRPr lang="de-DE"/>
+          </a:p>
+        </p:txBody>
+      </p:sp>
+      <p:grpSp>
+        <p:nvGrpSpPr>
+          <p:cNvPr id="18" name="Gruppieren 17">
+            <a:extLst>
+              <a:ext uri="{FF2B5EF4-FFF2-40B4-BE49-F238E27FC236}">
+                <a16:creationId xmlns:a16="http://schemas.microsoft.com/office/drawing/2014/main" id="{66307E74-EBD5-CE09-1B15-2421D8C8E985}"/>
+              </a:ext>
+            </a:extLst>
+          </p:cNvPr>
+          <p:cNvGrpSpPr/>
+          <p:nvPr/>
+        </p:nvGrpSpPr>
+        <p:grpSpPr>
+          <a:xfrm flipH="1">
+            <a:off x="9547312" y="5330165"/>
+            <a:ext cx="468902" cy="782838"/>
+            <a:chOff x="9547312" y="5330165"/>
+            <a:chExt cx="468902" cy="782838"/>
+          </a:xfrm>
+        </p:grpSpPr>
+        <p:sp>
+          <p:nvSpPr>
+            <p:cNvPr id="10" name="Parallelogramm 9">
+              <a:extLst>
+                <a:ext uri="{FF2B5EF4-FFF2-40B4-BE49-F238E27FC236}">
+                  <a16:creationId xmlns:a16="http://schemas.microsoft.com/office/drawing/2014/main" id="{D570A90B-68B3-FE10-4CE8-31DF40441FBF}"/>
+                </a:ext>
+              </a:extLst>
+            </p:cNvPr>
+            <p:cNvSpPr/>
+            <p:nvPr/>
+          </p:nvSpPr>
+          <p:spPr>
+            <a:xfrm flipH="1">
+              <a:off x="9639903" y="5408273"/>
+              <a:ext cx="277245" cy="623303"/>
+            </a:xfrm>
+            <a:prstGeom prst="parallelogram">
+              <a:avLst>
+                <a:gd name="adj" fmla="val 59975"/>
+              </a:avLst>
+            </a:prstGeom>
+            <a:solidFill>
+              <a:schemeClr val="bg1"/>
+            </a:solidFill>
+            <a:ln w="12700">
+              <a:solidFill>
+                <a:schemeClr val="tx1"/>
+              </a:solidFill>
+            </a:ln>
+          </p:spPr>
+          <p:style>
+            <a:lnRef idx="2">
+              <a:schemeClr val="accent1">
+                <a:shade val="15000"/>
+              </a:schemeClr>
+            </a:lnRef>
+            <a:fillRef idx="1">
+              <a:schemeClr val="accent1"/>
+            </a:fillRef>
+            <a:effectRef idx="0">
+              <a:schemeClr val="accent1"/>
+            </a:effectRef>
+            <a:fontRef idx="minor">
+              <a:schemeClr val="lt1"/>
+            </a:fontRef>
+          </p:style>
+          <p:txBody>
+            <a:bodyPr rtlCol="0" anchor="ctr"/>
+            <a:lstStyle/>
+            <a:p>
+              <a:pPr algn="ctr"/>
+              <a:endParaRPr lang="de-DE"/>
+            </a:p>
+          </p:txBody>
+        </p:sp>
+        <p:sp>
+          <p:nvSpPr>
+            <p:cNvPr id="11" name="Rechteck 10">
+              <a:extLst>
+                <a:ext uri="{FF2B5EF4-FFF2-40B4-BE49-F238E27FC236}">
+                  <a16:creationId xmlns:a16="http://schemas.microsoft.com/office/drawing/2014/main" id="{753B4D4F-E6FB-367A-E487-8C43F7DC0C04}"/>
+                </a:ext>
+              </a:extLst>
+            </p:cNvPr>
+            <p:cNvSpPr/>
+            <p:nvPr/>
+          </p:nvSpPr>
+          <p:spPr>
+            <a:xfrm>
+              <a:off x="9547312" y="5330165"/>
+              <a:ext cx="277246" cy="104775"/>
+            </a:xfrm>
+            <a:prstGeom prst="rect">
+              <a:avLst/>
+            </a:prstGeom>
+            <a:solidFill>
+              <a:schemeClr val="bg1"/>
+            </a:solidFill>
+            <a:ln>
+              <a:solidFill>
+                <a:schemeClr val="bg1"/>
+              </a:solidFill>
+            </a:ln>
+          </p:spPr>
+          <p:style>
+            <a:lnRef idx="2">
+              <a:schemeClr val="accent1">
+                <a:shade val="15000"/>
+              </a:schemeClr>
+            </a:lnRef>
+            <a:fillRef idx="1">
+              <a:schemeClr val="accent1"/>
+            </a:fillRef>
+            <a:effectRef idx="0">
+              <a:schemeClr val="accent1"/>
+            </a:effectRef>
+            <a:fontRef idx="minor">
+              <a:schemeClr val="lt1"/>
+            </a:fontRef>
+          </p:style>
+          <p:txBody>
+            <a:bodyPr rtlCol="0" anchor="ctr"/>
+            <a:lstStyle/>
+            <a:p>
+              <a:pPr algn="ctr"/>
+              <a:endParaRPr lang="de-DE"/>
+            </a:p>
+          </p:txBody>
+        </p:sp>
+        <p:sp>
+          <p:nvSpPr>
+            <p:cNvPr id="12" name="Rechteck 11">
+              <a:extLst>
+                <a:ext uri="{FF2B5EF4-FFF2-40B4-BE49-F238E27FC236}">
+                  <a16:creationId xmlns:a16="http://schemas.microsoft.com/office/drawing/2014/main" id="{3C5F8F8C-32CD-27B6-FAA5-B585B0CF3446}"/>
+                </a:ext>
+              </a:extLst>
+            </p:cNvPr>
+            <p:cNvSpPr/>
+            <p:nvPr/>
+          </p:nvSpPr>
+          <p:spPr>
+            <a:xfrm>
+              <a:off x="9738968" y="6008228"/>
+              <a:ext cx="277246" cy="104775"/>
+            </a:xfrm>
+            <a:prstGeom prst="rect">
+              <a:avLst/>
+            </a:prstGeom>
+            <a:solidFill>
+              <a:schemeClr val="bg1"/>
+            </a:solidFill>
+            <a:ln>
+              <a:solidFill>
+                <a:schemeClr val="bg1"/>
+              </a:solidFill>
+            </a:ln>
+          </p:spPr>
+          <p:style>
+            <a:lnRef idx="2">
+              <a:schemeClr val="accent1">
+                <a:shade val="15000"/>
+              </a:schemeClr>
+            </a:lnRef>
+            <a:fillRef idx="1">
+              <a:schemeClr val="accent1"/>
+            </a:fillRef>
+            <a:effectRef idx="0">
+              <a:schemeClr val="accent1"/>
+            </a:effectRef>
+            <a:fontRef idx="minor">
+              <a:schemeClr val="lt1"/>
+            </a:fontRef>
+          </p:style>
+          <p:txBody>
+            <a:bodyPr rtlCol="0" anchor="ctr"/>
+            <a:lstStyle/>
+            <a:p>
+              <a:pPr algn="ctr"/>
+              <a:endParaRPr lang="de-DE"/>
+            </a:p>
+          </p:txBody>
+        </p:sp>
+      </p:grpSp>
+      <p:pic>
+        <p:nvPicPr>
+          <p:cNvPr id="2" name="Inhaltsplatzhalter 5" descr="Ein Bild, das Text, Diagramm, Screenshot, Farbigkeit enthält.&#10;&#10;KI-generierte Inhalte können fehlerhaft sein.">
+            <a:extLst>
+              <a:ext uri="{FF2B5EF4-FFF2-40B4-BE49-F238E27FC236}">
+                <a16:creationId xmlns:a16="http://schemas.microsoft.com/office/drawing/2014/main" id="{3717E753-051A-37EE-A58C-3CDC4BC133C0}"/>
+              </a:ext>
+            </a:extLst>
+          </p:cNvPr>
+          <p:cNvPicPr>
+            <a:picLocks noChangeAspect="1"/>
+          </p:cNvPicPr>
+          <p:nvPr/>
+        </p:nvPicPr>
+        <p:blipFill>
+          <a:blip r:embed="rId2">
+            <a:extLst>
+              <a:ext uri="{28A0092B-C50C-407E-A947-70E740481C1C}">
+                <a14:useLocalDpi xmlns:a14="http://schemas.microsoft.com/office/drawing/2010/main" val="0"/>
+              </a:ext>
+            </a:extLst>
+          </a:blip>
+          <a:srcRect l="1920" t="44503" r="27931" b="932"/>
+          <a:stretch/>
+        </p:blipFill>
+        <p:spPr>
+          <a:xfrm>
+            <a:off x="120497" y="147374"/>
+            <a:ext cx="5250721" cy="2046987"/>
+          </a:xfrm>
+          <a:prstGeom prst="rect">
+            <a:avLst/>
+          </a:prstGeom>
+          <a:ln w="9525">
+            <a:noFill/>
+            <a:miter lim="800000"/>
+            <a:headEnd/>
+            <a:tailEnd/>
+          </a:ln>
+        </p:spPr>
+      </p:pic>
+      <p:sp>
+        <p:nvSpPr>
+          <p:cNvPr id="3" name="Textfeld 2">
+            <a:extLst>
+              <a:ext uri="{FF2B5EF4-FFF2-40B4-BE49-F238E27FC236}">
+                <a16:creationId xmlns:a16="http://schemas.microsoft.com/office/drawing/2014/main" id="{AFC07EB9-36AC-AAB6-A4EE-0F1BD9E6423E}"/>
+              </a:ext>
+            </a:extLst>
+          </p:cNvPr>
+          <p:cNvSpPr txBox="1"/>
+          <p:nvPr/>
+        </p:nvSpPr>
+        <p:spPr>
+          <a:xfrm>
+            <a:off x="111270" y="2194361"/>
+            <a:ext cx="5259948" cy="477054"/>
+          </a:xfrm>
+          <a:prstGeom prst="rect">
+            <a:avLst/>
+          </a:prstGeom>
+          <a:noFill/>
+        </p:spPr>
+        <p:txBody>
+          <a:bodyPr wrap="square" rtlCol="0">
+            <a:spAutoFit/>
+          </a:bodyPr>
+          <a:lstStyle/>
+          <a:p>
+            <a:pPr algn="ctr"/>
+            <a:r>
+              <a:rPr lang="de-DE" sz="2500" dirty="0">
+                <a:latin typeface="Times New Roman" panose="02020603050405020304" pitchFamily="18" charset="0"/>
+                <a:cs typeface="Times New Roman" panose="02020603050405020304" pitchFamily="18" charset="0"/>
+              </a:rPr>
+              <a:t>(a) Neg. Coupling DC</a:t>
+            </a:r>
+          </a:p>
+        </p:txBody>
+      </p:sp>
+      <p:pic>
+        <p:nvPicPr>
+          <p:cNvPr id="16" name="Grafik 15" descr="Ein Bild, das Farbigkeit, Screenshot, Diagramm, Design enthält.&#10;&#10;KI-generierte Inhalte können fehlerhaft sein.">
+            <a:extLst>
+              <a:ext uri="{FF2B5EF4-FFF2-40B4-BE49-F238E27FC236}">
+                <a16:creationId xmlns:a16="http://schemas.microsoft.com/office/drawing/2014/main" id="{F2480594-D856-6F60-E408-A552B7E02412}"/>
+              </a:ext>
+            </a:extLst>
+          </p:cNvPr>
+          <p:cNvPicPr>
+            <a:picLocks noChangeAspect="1"/>
+          </p:cNvPicPr>
+          <p:nvPr/>
+        </p:nvPicPr>
+        <p:blipFill>
+          <a:blip r:embed="rId3">
+            <a:extLst>
+              <a:ext uri="{28A0092B-C50C-407E-A947-70E740481C1C}">
+                <a14:useLocalDpi xmlns:a14="http://schemas.microsoft.com/office/drawing/2010/main" val="0"/>
+              </a:ext>
+            </a:extLst>
+          </a:blip>
+          <a:srcRect l="2232" t="45065" r="28379" b="1423"/>
+          <a:stretch/>
+        </p:blipFill>
+        <p:spPr>
+          <a:xfrm>
+            <a:off x="120497" y="2809936"/>
+            <a:ext cx="5250721" cy="2031839"/>
+          </a:xfrm>
+          <a:prstGeom prst="rect">
+            <a:avLst/>
+          </a:prstGeom>
+        </p:spPr>
+      </p:pic>
+      <p:sp>
+        <p:nvSpPr>
+          <p:cNvPr id="20" name="Textfeld 19">
+            <a:extLst>
+              <a:ext uri="{FF2B5EF4-FFF2-40B4-BE49-F238E27FC236}">
+                <a16:creationId xmlns:a16="http://schemas.microsoft.com/office/drawing/2014/main" id="{9407F2B4-98D8-3E4A-2AAB-1559618AEB7D}"/>
+              </a:ext>
+            </a:extLst>
+          </p:cNvPr>
+          <p:cNvSpPr txBox="1"/>
+          <p:nvPr/>
+        </p:nvSpPr>
+        <p:spPr>
+          <a:xfrm>
+            <a:off x="120497" y="4840213"/>
+            <a:ext cx="5250721" cy="477054"/>
+          </a:xfrm>
+          <a:prstGeom prst="rect">
+            <a:avLst/>
+          </a:prstGeom>
+          <a:noFill/>
+        </p:spPr>
+        <p:txBody>
+          <a:bodyPr wrap="square" rtlCol="0">
+            <a:spAutoFit/>
+          </a:bodyPr>
+          <a:lstStyle/>
+          <a:p>
+            <a:pPr algn="ctr"/>
+            <a:r>
+              <a:rPr lang="de-DE" sz="2500" dirty="0">
+                <a:latin typeface="Times New Roman" panose="02020603050405020304" pitchFamily="18" charset="0"/>
+                <a:cs typeface="Times New Roman" panose="02020603050405020304" pitchFamily="18" charset="0"/>
+              </a:rPr>
+              <a:t>(c) Neg. Coupling Fundamental</a:t>
+            </a:r>
+          </a:p>
+        </p:txBody>
+      </p:sp>
+      <p:pic>
+        <p:nvPicPr>
+          <p:cNvPr id="21" name="Grafik 20" descr="Ein Bild, das Text, Screenshot, Diagramm, Farbigkeit enthält.&#10;&#10;KI-generierte Inhalte können fehlerhaft sein.">
+            <a:extLst>
+              <a:ext uri="{FF2B5EF4-FFF2-40B4-BE49-F238E27FC236}">
+                <a16:creationId xmlns:a16="http://schemas.microsoft.com/office/drawing/2014/main" id="{F7645A6E-DF69-033C-484B-C859D50A6990}"/>
+              </a:ext>
+            </a:extLst>
+          </p:cNvPr>
+          <p:cNvPicPr>
+            <a:picLocks noChangeAspect="1"/>
+          </p:cNvPicPr>
+          <p:nvPr/>
+        </p:nvPicPr>
+        <p:blipFill>
+          <a:blip r:embed="rId4">
+            <a:extLst>
+              <a:ext uri="{28A0092B-C50C-407E-A947-70E740481C1C}">
+                <a14:useLocalDpi xmlns:a14="http://schemas.microsoft.com/office/drawing/2010/main" val="0"/>
+              </a:ext>
+            </a:extLst>
+          </a:blip>
+          <a:srcRect l="1914" t="44598" r="28206" b="1098"/>
+          <a:stretch/>
+        </p:blipFill>
+        <p:spPr>
+          <a:xfrm>
+            <a:off x="5537877" y="2809936"/>
+            <a:ext cx="5250721" cy="2043396"/>
+          </a:xfrm>
+          <a:prstGeom prst="rect">
+            <a:avLst/>
+          </a:prstGeom>
+        </p:spPr>
+      </p:pic>
+      <p:sp>
+        <p:nvSpPr>
+          <p:cNvPr id="23" name="Textfeld 22">
+            <a:extLst>
+              <a:ext uri="{FF2B5EF4-FFF2-40B4-BE49-F238E27FC236}">
+                <a16:creationId xmlns:a16="http://schemas.microsoft.com/office/drawing/2014/main" id="{CFA7B5D4-1170-5B1A-34C9-2C23E6931527}"/>
+              </a:ext>
+            </a:extLst>
+          </p:cNvPr>
+          <p:cNvSpPr txBox="1"/>
+          <p:nvPr/>
+        </p:nvSpPr>
+        <p:spPr>
+          <a:xfrm>
+            <a:off x="5537877" y="4840213"/>
+            <a:ext cx="5250721" cy="477054"/>
+          </a:xfrm>
+          <a:prstGeom prst="rect">
+            <a:avLst/>
+          </a:prstGeom>
+          <a:noFill/>
+        </p:spPr>
+        <p:txBody>
+          <a:bodyPr wrap="square" rtlCol="0">
+            <a:spAutoFit/>
+          </a:bodyPr>
+          <a:lstStyle/>
+          <a:p>
+            <a:pPr algn="ctr"/>
+            <a:r>
+              <a:rPr lang="de-DE" sz="2500" dirty="0">
+                <a:latin typeface="Times New Roman" panose="02020603050405020304" pitchFamily="18" charset="0"/>
+                <a:cs typeface="Times New Roman" panose="02020603050405020304" pitchFamily="18" charset="0"/>
+              </a:rPr>
+              <a:t>(d) Pos. Coupling Fundamental</a:t>
+            </a:r>
+          </a:p>
+        </p:txBody>
+      </p:sp>
+      <p:pic>
+        <p:nvPicPr>
+          <p:cNvPr id="24" name="Grafik 23" descr="Ein Bild, das Farbigkeit, Diagramm, Screenshot, Grafiken enthält.&#10;&#10;KI-generierte Inhalte können fehlerhaft sein.">
+            <a:extLst>
+              <a:ext uri="{FF2B5EF4-FFF2-40B4-BE49-F238E27FC236}">
+                <a16:creationId xmlns:a16="http://schemas.microsoft.com/office/drawing/2014/main" id="{6F4BA41F-53CF-8E58-6EAB-4CD13A73015C}"/>
+              </a:ext>
+            </a:extLst>
+          </p:cNvPr>
+          <p:cNvPicPr>
+            <a:picLocks noChangeAspect="1"/>
+          </p:cNvPicPr>
+          <p:nvPr/>
+        </p:nvPicPr>
+        <p:blipFill>
+          <a:blip r:embed="rId5">
+            <a:extLst>
+              <a:ext uri="{28A0092B-C50C-407E-A947-70E740481C1C}">
+                <a14:useLocalDpi xmlns:a14="http://schemas.microsoft.com/office/drawing/2010/main" val="0"/>
+              </a:ext>
+            </a:extLst>
+          </a:blip>
+          <a:srcRect l="1857" t="44493" r="28263" b="1290"/>
+          <a:stretch/>
+        </p:blipFill>
+        <p:spPr>
+          <a:xfrm>
+            <a:off x="5537877" y="144621"/>
+            <a:ext cx="5259948" cy="2046987"/>
+          </a:xfrm>
+          <a:prstGeom prst="rect">
+            <a:avLst/>
+          </a:prstGeom>
+        </p:spPr>
+      </p:pic>
+      <p:sp>
+        <p:nvSpPr>
+          <p:cNvPr id="25" name="Textfeld 24">
+            <a:extLst>
+              <a:ext uri="{FF2B5EF4-FFF2-40B4-BE49-F238E27FC236}">
+                <a16:creationId xmlns:a16="http://schemas.microsoft.com/office/drawing/2014/main" id="{FAC27945-6F0A-0F34-ED7C-351F4433CB92}"/>
+              </a:ext>
+            </a:extLst>
+          </p:cNvPr>
+          <p:cNvSpPr txBox="1"/>
+          <p:nvPr/>
+        </p:nvSpPr>
+        <p:spPr>
+          <a:xfrm>
+            <a:off x="5537878" y="2191608"/>
+            <a:ext cx="5250720" cy="477054"/>
+          </a:xfrm>
+          <a:prstGeom prst="rect">
+            <a:avLst/>
+          </a:prstGeom>
+          <a:noFill/>
+        </p:spPr>
+        <p:txBody>
+          <a:bodyPr wrap="square" rtlCol="0">
+            <a:spAutoFit/>
+          </a:bodyPr>
+          <a:lstStyle/>
+          <a:p>
+            <a:pPr algn="ctr"/>
+            <a:r>
+              <a:rPr lang="de-DE" sz="2500" dirty="0">
+                <a:latin typeface="Times New Roman" panose="02020603050405020304" pitchFamily="18" charset="0"/>
+                <a:cs typeface="Times New Roman" panose="02020603050405020304" pitchFamily="18" charset="0"/>
+              </a:rPr>
+              <a:t>(b) Pos. Coupling DC</a:t>
+            </a:r>
+          </a:p>
+        </p:txBody>
+      </p:sp>
+    </p:spTree>
+    <p:extLst>
+      <p:ext uri="{BB962C8B-B14F-4D97-AF65-F5344CB8AC3E}">
+        <p14:creationId xmlns:p14="http://schemas.microsoft.com/office/powerpoint/2010/main" val="1263921761"/>
       </p:ext>
     </p:extLst>
   </p:cSld>
